--- a/skills/dsh-academic-ppt/references/templates/figure.pptx
+++ b/skills/dsh-academic-ppt/references/templates/figure.pptx
@@ -511,8 +511,15 @@
 全部文本为填写指引，图表值是合成演示值，不是任何研究结果。使用前替换论文、数据、原图与来源。
 内容职责：图例与处理；主要趋势；必要限定。
 建议讲述时间只是排练起点，按实际内容调整。
+原图来源：T1
+示例图
+宽幅面板示例；合成演示值
+https://github.com/YuZhou0311/dsh-academic-ppt
+原创排版教学示例 v0.3.0
+MIT; all plotted values are synthetic
+完整原图，无裁切
 参考文献（完整题名）
-T1 · Full article title: connecting decision models, experimental evidence and independent validation in crop cultivation · 期刊与卷页（替换） · 2026 · 待替换 · 书目占位，非真实文献</a:t>
+T1 · Full article title: connecting decision models, experimental evidence and independent validation in crop cultivation · 期刊与卷页（替换） · 2026 · 书目占位；图表均为合成示例 · 书目占位，非真实文献</a:t>
             </a:r>
             <a:endParaRPr lang="en-US" dirty="0"/>
           </a:p>
@@ -604,8 +611,22 @@
 全部文本为填写指引，图表值是合成演示值，不是任何研究结果。使用前替换论文、数据、原图与来源。
 内容职责：面板 A；面板 B。
 建议讲述时间只是排练起点，按实际内容调整。
+原图来源：T1
+示例图
+响应曲线；合成演示值
+https://github.com/YuZhou0311/dsh-academic-ppt
+原创排版教学示例 v0.3.0
+MIT; all plotted values are synthetic
+完整原图，无裁切
+原图来源：T1
+示例图
+效应与区间；合成演示值
+https://github.com/YuZhou0311/dsh-academic-ppt
+原创排版教学示例 v0.3.0
+MIT; all plotted values are synthetic
+完整原图，无裁切
 参考文献（完整题名）
-T1 · Full article title: connecting decision models, experimental evidence and independent validation in crop cultivation · 期刊与卷页（替换） · 2026 · 待替换 · 书目占位，非真实文献</a:t>
+T1 · Full article title: connecting decision models, experimental evidence and independent validation in crop cultivation · 期刊与卷页（替换） · 2026 · 书目占位；图表均为合成示例 · 书目占位，非真实文献</a:t>
             </a:r>
             <a:endParaRPr lang="en-US" dirty="0"/>
           </a:p>
@@ -697,8 +718,29 @@
 全部文本为填写指引，图表值是合成演示值，不是任何研究结果。使用前替换论文、数据、原图与来源。
 内容职责：证据 A；证据 B；证据 C。
 建议讲述时间只是排练起点，按实际内容调整。
+原图来源：T1
+示例图
+响应曲线；合成演示值
+https://github.com/YuZhou0311/dsh-academic-ppt
+原创排版教学示例 v0.3.0
+MIT; all plotted values are synthetic
+完整原图，无裁切
+原图来源：T1
+示例图
+效应与区间；合成演示值
+https://github.com/YuZhou0311/dsh-academic-ppt
+原创排版教学示例 v0.3.0
+MIT; all plotted values are synthetic
+完整原图，无裁切
+原图来源：T1
+示例图
+跨环境矩阵；合成演示值
+https://github.com/YuZhou0311/dsh-academic-ppt
+原创排版教学示例 v0.3.0
+MIT; all plotted values are synthetic
+完整原图，无裁切
 参考文献（完整题名）
-T1 · Full article title: connecting decision models, experimental evidence and independent validation in crop cultivation · 期刊与卷页（替换） · 2026 · 待替换 · 书目占位，非真实文献</a:t>
+T1 · Full article title: connecting decision models, experimental evidence and independent validation in crop cultivation · 期刊与卷页（替换） · 2026 · 书目占位；图表均为合成示例 · 书目占位，非真实文献</a:t>
             </a:r>
             <a:endParaRPr lang="en-US" dirty="0"/>
           </a:p>
@@ -786,12 +828,26 @@
           <a:p>
             <a:r>
               <a:rPr lang="en-US" dirty="0"/>
-              <a:t>本页为原创学术版式模板，ID figure-detail-window。全图与细节分别保留为独立图像，附面板位置和放大范围说明。
+              <a:t>本页为原创学术版式模板，ID figure-detail-window。主面板占左侧主要面积，右上展开补充面板、右下解释两者关系；两图都承担可读的证据任务。
 全部文本为填写指引，图表值是合成演示值，不是任何研究结果。使用前替换论文、数据、原图与来源。
-内容职责：全图定位；局部读数与上下文。
+内容职责：主面板的读图结论；补充证据与限定。
 建议讲述时间只是排练起点，按实际内容调整。
+原图来源：T1
+示例图
+合成图面板 A 的局部视窗
+https://github.com/YuZhou0311/dsh-academic-ppt
+原创排版教学示例 v0.3.0
+MIT; all plotted values are synthetic
+视窗 x=.015,y=.025,w=.495,h=.49；包含面板标题、坐标、图例及单位，原始图像完整保留
+原图来源：T1
+示例图
+效应与区间；合成演示值
+https://github.com/YuZhou0311/dsh-academic-ppt
+原创排版教学示例 v0.3.0
+MIT; all plotted values are synthetic
+完整原图，无裁切
 参考文献（完整题名）
-T1 · Full article title: connecting decision models, experimental evidence and independent validation in crop cultivation · 期刊与卷页（替换） · 2026 · 待替换 · 书目占位，非真实文献</a:t>
+T1 · Full article title: connecting decision models, experimental evidence and independent validation in crop cultivation · 期刊与卷页（替换） · 2026 · 书目占位；图表均为合成示例 · 书目占位，非真实文献</a:t>
             </a:r>
             <a:endParaRPr lang="en-US" dirty="0"/>
           </a:p>
@@ -879,12 +935,19 @@
           <a:p>
             <a:r>
               <a:rPr lang="en-US" dirty="0"/>
-              <a:t>本页为原创学术版式模板，ID figure-portrait-reading。竖图使用整列高度，右侧先解释流程，再记录关键证据和局限。
+              <a:t>本页为原创学术版式模板，ID figure-portrait-reading。从竖长多面板原图选择当前论点所需的独立面板，占主要区域；保留轴与图例，其他面板按论证另页展开。
 全部文本为填写指引，图表值是合成演示值，不是任何研究结果。使用前替换论文、数据、原图与来源。
-内容职责：阅读顺序；关键证据；局限与外推。
+内容职责：所选面板的范围；关键证据；局限与外推。
 建议讲述时间只是排练起点，按实际内容调整。
+原图来源：T1
+示例图
+竖长合成图中的面板 A
+https://github.com/YuZhou0311/dsh-academic-ppt
+原创排版教学示例 v0.3.0
+MIT; all plotted values are synthetic
+视窗 x=.035,y=.008,w=.95,h=.315；保留顶部面板的完整标题、两条件图例、坐标及单位。未把总图缩略图当作证据。
 参考文献（完整题名）
-T1 · Full article title: connecting decision models, experimental evidence and independent validation in crop cultivation · 期刊与卷页（替换） · 2026 · 待替换 · 书目占位，非真实文献</a:t>
+T1 · Full article title: connecting decision models, experimental evidence and independent validation in crop cultivation · 期刊与卷页（替换） · 2026 · 书目占位；图表均为合成示例 · 书目占位，非真实文献</a:t>
             </a:r>
             <a:endParaRPr lang="en-US" dirty="0"/>
           </a:p>
@@ -976,8 +1039,15 @@
 全部文本为填写指引，图表值是合成演示值，不是任何研究结果。使用前替换论文、数据、原图与来源。
 内容职责：坐标与变量；颜色与处理；判读规则。
 建议讲述时间只是排练起点，按实际内容调整。
+原图来源：T1
+示例图
+响应曲线；合成演示值
+https://github.com/YuZhou0311/dsh-academic-ppt
+原创排版教学示例 v0.3.0
+MIT; all plotted values are synthetic
+完整原图，无裁切
 参考文献（完整题名）
-T1 · Full article title: connecting decision models, experimental evidence and independent validation in crop cultivation · 期刊与卷页（替换） · 2026 · 待替换 · 书目占位，非真实文献</a:t>
+T1 · Full article title: connecting decision models, experimental evidence and independent validation in crop cultivation · 期刊与卷页（替换） · 2026 · 书目占位；图表均为合成示例 · 书目占位，非真实文献</a:t>
             </a:r>
             <a:endParaRPr lang="en-US" dirty="0"/>
           </a:p>
@@ -1421,14 +1491,14 @@
       </p:sp>
       <p:sp>
         <p:nvSpPr>
-          <p:cNvPr id="4" name="T25/kicker"/>
-          <p:cNvSpPr/>
-          <p:nvPr/>
-        </p:nvSpPr>
-        <p:spPr>
-          <a:xfrm>
-            <a:off x="457200" y="152400"/>
-            <a:ext cx="11277600" cy="190500"/>
+          <p:cNvPr id="4" name="T25/title"/>
+          <p:cNvSpPr/>
+          <p:nvPr/>
+        </p:nvSpPr>
+        <p:spPr>
+          <a:xfrm>
+            <a:off x="457200" y="209550"/>
+            <a:ext cx="11277600" cy="438150"/>
           </a:xfrm>
           <a:prstGeom prst="rect">
             <a:avLst/>
@@ -1442,54 +1512,12 @@
           <a:p>
             <a:pPr algn="l" indent="0" marL="0">
               <a:lnSpc>
-                <a:spcPts val="1320"/>
-              </a:lnSpc>
-              <a:buNone/>
-            </a:pPr>
-            <a:r>
-              <a:rPr lang="zh-CN" altLang="en-US" sz="1200" dirty="0">
-                <a:solidFill>
-                  <a:srgbClr val="515B68"/>
-                </a:solidFill>
-                <a:latin typeface="Noto Sans CJK SC" pitchFamily="34" charset="0"/>
-                <a:ea typeface="Noto Sans CJK SC" pitchFamily="34" charset="-122"/>
-                <a:cs typeface="Noto Sans CJK SC" pitchFamily="34" charset="-120"/>
-              </a:rPr>
-              <a:t>结构模板 / 占位说明与合成数据</a:t>
-            </a:r>
-            <a:endParaRPr lang="zh-CN" sz="1200" dirty="0"/>
-          </a:p>
-        </p:txBody>
-      </p:sp>
-      <p:sp>
-        <p:nvSpPr>
-          <p:cNvPr id="5" name="T25/title"/>
-          <p:cNvSpPr/>
-          <p:nvPr/>
-        </p:nvSpPr>
-        <p:spPr>
-          <a:xfrm>
-            <a:off x="457200" y="381000"/>
-            <a:ext cx="11277600" cy="400050"/>
-          </a:xfrm>
-          <a:prstGeom prst="rect">
-            <a:avLst/>
-          </a:prstGeom>
-          <a:noFill/>
-          <a:ln/>
-        </p:spPr>
-        <p:txBody>
-          <a:bodyPr wrap="none" lIns="0" tIns="0" rIns="0" bIns="0" rtlCol="0" anchor="t"/>
-          <a:lstStyle/>
-          <a:p>
-            <a:pPr algn="l" indent="0" marL="0">
-              <a:lnSpc>
-                <a:spcPts val="2856"/>
-              </a:lnSpc>
-              <a:buNone/>
-            </a:pPr>
-            <a:r>
-              <a:rPr lang="zh-CN" altLang="en-US" sz="2550" b="1" dirty="0">
+                <a:spcPts val="3360"/>
+              </a:lnSpc>
+              <a:buNone/>
+            </a:pPr>
+            <a:r>
+              <a:rPr lang="zh-CN" altLang="en-US" sz="3000" b="1" dirty="0">
                 <a:solidFill>
                   <a:srgbClr val="1C2430"/>
                 </a:solidFill>
@@ -1499,26 +1527,49 @@
               </a:rPr>
               <a:t>宽幅原图与读图说明</a:t>
             </a:r>
-            <a:endParaRPr lang="zh-CN" sz="2550" dirty="0"/>
-          </a:p>
-        </p:txBody>
-      </p:sp>
-      <p:sp>
-        <p:nvSpPr>
-          <p:cNvPr id="6" name="T25/header-rule"/>
-          <p:cNvSpPr/>
-          <p:nvPr/>
-        </p:nvSpPr>
-        <p:spPr>
-          <a:xfrm>
-            <a:off x="457200" y="876300"/>
+            <a:endParaRPr lang="zh-CN" sz="3000" dirty="0"/>
+          </a:p>
+        </p:txBody>
+      </p:sp>
+      <p:sp>
+        <p:nvSpPr>
+          <p:cNvPr id="5" name="T25/header-rule"/>
+          <p:cNvSpPr/>
+          <p:nvPr/>
+        </p:nvSpPr>
+        <p:spPr>
+          <a:xfrm>
+            <a:off x="457200" y="752475"/>
             <a:ext cx="11277600" cy="0"/>
           </a:xfrm>
           <a:prstGeom prst="line">
             <a:avLst/>
           </a:prstGeom>
           <a:noFill/>
-          <a:ln w="11430">
+          <a:ln w="10478">
+            <a:solidFill>
+              <a:srgbClr val="BEC8D4"/>
+            </a:solidFill>
+            <a:prstDash val="solid"/>
+          </a:ln>
+        </p:spPr>
+      </p:sp>
+      <p:sp>
+        <p:nvSpPr>
+          <p:cNvPr id="6" name="T25/header-accent"/>
+          <p:cNvSpPr/>
+          <p:nvPr/>
+        </p:nvSpPr>
+        <p:spPr>
+          <a:xfrm>
+            <a:off x="457200" y="752475"/>
+            <a:ext cx="704850" cy="0"/>
+          </a:xfrm>
+          <a:prstGeom prst="line">
+            <a:avLst/>
+          </a:prstGeom>
+          <a:noFill/>
+          <a:ln w="28575">
             <a:solidFill>
               <a:srgbClr val="173C70"/>
             </a:solidFill>
@@ -1534,8 +1585,8 @@
         </p:nvSpPr>
         <p:spPr>
           <a:xfrm>
-            <a:off x="457200" y="1390650"/>
-            <a:ext cx="11277600" cy="3124200"/>
+            <a:off x="457200" y="1202341"/>
+            <a:ext cx="11277600" cy="3446621"/>
           </a:xfrm>
           <a:prstGeom prst="rect">
             <a:avLst/>
@@ -1559,14 +1610,14 @@
         </p:nvSpPr>
         <p:spPr>
           <a:xfrm>
-            <a:off x="571500" y="1276350"/>
-            <a:ext cx="2095500" cy="323850"/>
+            <a:off x="571500" y="1088041"/>
+            <a:ext cx="2343150" cy="342900"/>
           </a:xfrm>
           <a:prstGeom prst="rect">
             <a:avLst/>
           </a:prstGeom>
           <a:solidFill>
-            <a:srgbClr val="173C70"/>
+            <a:srgbClr val="146C63"/>
           </a:solidFill>
           <a:ln w="12700">
             <a:solidFill>
@@ -1586,8 +1637,8 @@
         </p:nvSpPr>
         <p:spPr>
           <a:xfrm>
-            <a:off x="676275" y="1304925"/>
-            <a:ext cx="1885950" cy="276225"/>
+            <a:off x="676275" y="1116616"/>
+            <a:ext cx="2133600" cy="285750"/>
           </a:xfrm>
           <a:prstGeom prst="rect">
             <a:avLst/>
@@ -1601,12 +1652,12 @@
           <a:p>
             <a:pPr algn="l" indent="0" marL="0">
               <a:lnSpc>
-                <a:spcPts val="2070"/>
-              </a:lnSpc>
-              <a:buNone/>
-            </a:pPr>
-            <a:r>
-              <a:rPr lang="zh-CN" altLang="en-US" sz="1800" b="1" dirty="0">
+                <a:spcPts val="2242"/>
+              </a:lnSpc>
+              <a:buNone/>
+            </a:pPr>
+            <a:r>
+              <a:rPr lang="zh-CN" altLang="en-US" sz="1950" b="1" dirty="0">
                 <a:solidFill>
                   <a:srgbClr val="FFFFFF"/>
                 </a:solidFill>
@@ -1616,7 +1667,7 @@
               </a:rPr>
               <a:t>证据图与面板顺序</a:t>
             </a:r>
-            <a:endParaRPr lang="zh-CN" sz="1800" dirty="0"/>
+            <a:endParaRPr lang="zh-CN" sz="1950" dirty="0"/>
           </a:p>
         </p:txBody>
       </p:sp>
@@ -1628,8 +1679,8 @@
         </p:nvSpPr>
         <p:spPr>
           <a:xfrm>
-            <a:off x="590550" y="1714500"/>
-            <a:ext cx="11010900" cy="2647950"/>
+            <a:off x="1048512" y="1562100"/>
+            <a:ext cx="10094976" cy="2566607"/>
           </a:xfrm>
           <a:prstGeom prst="rect">
             <a:avLst/>
@@ -1637,19 +1688,24 @@
           <a:solidFill>
             <a:srgbClr val="FFFFFF"/>
           </a:solidFill>
-          <a:ln w="12700">
-            <a:solidFill>
-              <a:srgbClr val="FFFFFF">
-                <a:alpha val="0"/>
+          <a:ln w="7620">
+            <a:solidFill>
+              <a:srgbClr val="CCD4DD"/>
+            </a:solidFill>
+            <a:prstDash val="solid"/>
+          </a:ln>
+          <a:effectLst>
+            <a:outerShdw sx="100000" sy="100000" kx="0" ky="0" algn="bl" rotWithShape="0" blurRad="28575" dist="19050" dir="5400000">
+              <a:srgbClr val="263B50">
+                <a:alpha val="12000"/>
               </a:srgbClr>
-            </a:solidFill>
-            <a:prstDash val="solid"/>
-          </a:ln>
+            </a:outerShdw>
+          </a:effectLst>
         </p:spPr>
       </p:sp>
       <p:pic>
         <p:nvPicPr>
-          <p:cNvPr id="11" name="T25/figure:0:image" descr="T1 · 示例图 · 宽幅面板示例；合成演示值">    </p:cNvPr>
+          <p:cNvPr id="11" name="T25/figure:0:image" descr="A/B 为条件；所有数值为合成示例">    </p:cNvPr>
           <p:cNvPicPr>
             <a:picLocks noChangeAspect="1"/>
           </p:cNvPicPr>
@@ -1663,8 +1719,8 @@
         </p:blipFill>
         <p:spPr>
           <a:xfrm>
-            <a:off x="1243263" y="1714500"/>
-            <a:ext cx="9705474" cy="2305050"/>
+            <a:off x="1077087" y="1590675"/>
+            <a:ext cx="10037826" cy="2509457"/>
           </a:xfrm>
           <a:prstGeom prst="rect">
             <a:avLst/>
@@ -1679,7 +1735,7 @@
         </p:nvSpPr>
         <p:spPr>
           <a:xfrm>
-            <a:off x="590550" y="4105275"/>
+            <a:off x="590550" y="4233482"/>
             <a:ext cx="11010900" cy="257175"/>
           </a:xfrm>
           <a:prstGeom prst="rect">
@@ -1707,7 +1763,7 @@
                 <a:ea typeface="Noto Sans CJK SC" pitchFamily="34" charset="-122"/>
                 <a:cs typeface="Noto Sans CJK SC" pitchFamily="34" charset="-120"/>
               </a:rPr>
-              <a:t>T1 · 示例图 · 宽幅面板示例；合成演示值</a:t>
+              <a:t>A/B 为条件；所有数值为合成示例</a:t>
             </a:r>
             <a:endParaRPr lang="zh-CN" sz="1350" dirty="0"/>
           </a:p>
@@ -1721,7 +1777,7 @@
         </p:nvSpPr>
         <p:spPr>
           <a:xfrm>
-            <a:off x="457200" y="6019800"/>
+            <a:off x="457200" y="6073331"/>
             <a:ext cx="3467100" cy="0"/>
           </a:xfrm>
           <a:prstGeom prst="line">
@@ -1744,14 +1800,14 @@
         </p:nvSpPr>
         <p:spPr>
           <a:xfrm>
-            <a:off x="457200" y="4743450"/>
+            <a:off x="457200" y="4846034"/>
             <a:ext cx="47625" cy="295275"/>
           </a:xfrm>
           <a:prstGeom prst="rect">
             <a:avLst/>
           </a:prstGeom>
           <a:solidFill>
-            <a:srgbClr val="173C70"/>
+            <a:srgbClr val="235E96"/>
           </a:solidFill>
           <a:ln w="12700">
             <a:solidFill>
@@ -1771,7 +1827,7 @@
         </p:nvSpPr>
         <p:spPr>
           <a:xfrm>
-            <a:off x="609600" y="4743450"/>
+            <a:off x="609600" y="4846034"/>
             <a:ext cx="3314700" cy="304800"/>
           </a:xfrm>
           <a:prstGeom prst="rect">
@@ -1786,20 +1842,249 @@
           <a:p>
             <a:pPr algn="l" indent="0" marL="0">
               <a:lnSpc>
-                <a:spcPts val="2070"/>
+                <a:spcPts val="2242"/>
+              </a:lnSpc>
+              <a:buNone/>
+            </a:pPr>
+            <a:r>
+              <a:rPr lang="zh-CN" altLang="en-US" sz="1950" b="1" dirty="0">
+                <a:solidFill>
+                  <a:srgbClr val="235E96"/>
+                </a:solidFill>
+                <a:latin typeface="Noto Sans CJK SC" pitchFamily="34" charset="0"/>
+                <a:ea typeface="Noto Sans CJK SC" pitchFamily="34" charset="-122"/>
+                <a:cs typeface="Noto Sans CJK SC" pitchFamily="34" charset="-120"/>
+              </a:rPr>
+              <a:t>图例与处理</a:t>
+            </a:r>
+            <a:endParaRPr lang="zh-CN" sz="1950" dirty="0"/>
+          </a:p>
+        </p:txBody>
+      </p:sp>
+      <p:sp>
+        <p:nvSpPr>
+          <p:cNvPr id="16" name="T25/card/region-1/body"/>
+          <p:cNvSpPr/>
+          <p:nvPr/>
+        </p:nvSpPr>
+        <p:spPr>
+          <a:xfrm>
+            <a:off x="609600" y="5265134"/>
+            <a:ext cx="3314700" cy="712946"/>
+          </a:xfrm>
+          <a:prstGeom prst="rect">
+            <a:avLst/>
+          </a:prstGeom>
+          <a:noFill/>
+          <a:ln/>
+        </p:spPr>
+        <p:txBody>
+          <a:bodyPr wrap="none" lIns="0" tIns="0" rIns="0" bIns="0" rtlCol="0" anchor="t"/>
+          <a:lstStyle/>
+          <a:p>
+            <a:pPr algn="l" indent="0" marL="0">
+              <a:lnSpc>
+                <a:spcPts val="2232"/>
+              </a:lnSpc>
+              <a:buNone/>
+            </a:pPr>
+            <a:r>
+              <a:rPr lang="zh-CN" altLang="en-US" sz="1800" dirty="0">
+                <a:solidFill>
+                  <a:srgbClr val="1C2430"/>
+                </a:solidFill>
+                <a:latin typeface="Noto Sans CJK SC" pitchFamily="34" charset="0"/>
+                <a:ea typeface="Noto Sans CJK SC" pitchFamily="34" charset="-122"/>
+                <a:cs typeface="Noto Sans CJK SC" pitchFamily="34" charset="-120"/>
+              </a:rPr>
+              <a:t>解释颜色、线型与实验条件</a:t>
+            </a:r>
+            <a:endParaRPr lang="zh-CN" sz="1800" dirty="0"/>
+          </a:p>
+          <a:p>
+            <a:pPr algn="l" indent="0" marL="0">
+              <a:lnSpc>
+                <a:spcPts val="2232"/>
+              </a:lnSpc>
+              <a:buNone/>
+            </a:pPr>
+            <a:r>
+              <a:rPr lang="zh-CN" altLang="en-US" sz="1800" dirty="0">
+                <a:solidFill>
+                  <a:srgbClr val="1C2430"/>
+                </a:solidFill>
+                <a:latin typeface="Noto Sans CJK SC" pitchFamily="34" charset="0"/>
+                <a:ea typeface="Noto Sans CJK SC" pitchFamily="34" charset="-122"/>
+                <a:cs typeface="Noto Sans CJK SC" pitchFamily="34" charset="-120"/>
+              </a:rPr>
+              <a:t>读图前先明确比较对象</a:t>
+            </a:r>
+            <a:endParaRPr lang="zh-CN" sz="1800" dirty="0"/>
+          </a:p>
+        </p:txBody>
+      </p:sp>
+      <p:sp>
+        <p:nvSpPr>
+          <p:cNvPr id="17" name="T25/card/region-2/heading-rule"/>
+          <p:cNvSpPr/>
+          <p:nvPr/>
+        </p:nvSpPr>
+        <p:spPr>
+          <a:xfrm>
+            <a:off x="4210050" y="5188934"/>
+            <a:ext cx="3467100" cy="0"/>
+          </a:xfrm>
+          <a:prstGeom prst="line">
+            <a:avLst/>
+          </a:prstGeom>
+          <a:noFill/>
+          <a:ln w="9525">
+            <a:solidFill>
+              <a:srgbClr val="BEC8D4"/>
+            </a:solidFill>
+            <a:prstDash val="solid"/>
+          </a:ln>
+        </p:spPr>
+      </p:sp>
+      <p:sp>
+        <p:nvSpPr>
+          <p:cNvPr id="18" name="T25/card/region-2/heading-mark"/>
+          <p:cNvSpPr/>
+          <p:nvPr/>
+        </p:nvSpPr>
+        <p:spPr>
+          <a:xfrm>
+            <a:off x="4210050" y="5188934"/>
+            <a:ext cx="342900" cy="0"/>
+          </a:xfrm>
+          <a:prstGeom prst="line">
+            <a:avLst/>
+          </a:prstGeom>
+          <a:noFill/>
+          <a:ln w="17145">
+            <a:solidFill>
+              <a:srgbClr val="146C63"/>
+            </a:solidFill>
+            <a:prstDash val="solid"/>
+          </a:ln>
+        </p:spPr>
+      </p:sp>
+      <p:sp>
+        <p:nvSpPr>
+          <p:cNvPr id="19" name="T25/card/region-2/title"/>
+          <p:cNvSpPr/>
+          <p:nvPr/>
+        </p:nvSpPr>
+        <p:spPr>
+          <a:xfrm>
+            <a:off x="4210050" y="4846034"/>
+            <a:ext cx="3467100" cy="323850"/>
+          </a:xfrm>
+          <a:prstGeom prst="rect">
+            <a:avLst/>
+          </a:prstGeom>
+          <a:noFill/>
+          <a:ln/>
+        </p:spPr>
+        <p:txBody>
+          <a:bodyPr wrap="none" lIns="0" tIns="0" rIns="0" bIns="0" rtlCol="0" anchor="t"/>
+          <a:lstStyle/>
+          <a:p>
+            <a:pPr algn="l" indent="0" marL="0">
+              <a:lnSpc>
+                <a:spcPts val="2242"/>
+              </a:lnSpc>
+              <a:buNone/>
+            </a:pPr>
+            <a:r>
+              <a:rPr lang="zh-CN" altLang="en-US" sz="1950" b="1" dirty="0">
+                <a:solidFill>
+                  <a:srgbClr val="146C63"/>
+                </a:solidFill>
+                <a:latin typeface="Noto Sans CJK SC" pitchFamily="34" charset="0"/>
+                <a:ea typeface="Noto Sans CJK SC" pitchFamily="34" charset="-122"/>
+                <a:cs typeface="Noto Sans CJK SC" pitchFamily="34" charset="-120"/>
+              </a:rPr>
+              <a:t>主要趋势</a:t>
+            </a:r>
+            <a:endParaRPr lang="zh-CN" sz="1950" dirty="0"/>
+          </a:p>
+        </p:txBody>
+      </p:sp>
+      <p:sp>
+        <p:nvSpPr>
+          <p:cNvPr id="20" name="T25/card/region-2/body"/>
+          <p:cNvSpPr/>
+          <p:nvPr/>
+        </p:nvSpPr>
+        <p:spPr>
+          <a:xfrm>
+            <a:off x="4210050" y="5322284"/>
+            <a:ext cx="3467100" cy="712946"/>
+          </a:xfrm>
+          <a:prstGeom prst="rect">
+            <a:avLst/>
+          </a:prstGeom>
+          <a:noFill/>
+          <a:ln/>
+        </p:spPr>
+        <p:txBody>
+          <a:bodyPr wrap="none" lIns="0" tIns="0" rIns="0" bIns="0" rtlCol="0" anchor="t"/>
+          <a:lstStyle/>
+          <a:p>
+            <a:pPr algn="l" indent="0" marL="0">
+              <a:lnSpc>
+                <a:spcPts val="2232"/>
+              </a:lnSpc>
+              <a:buNone/>
+            </a:pPr>
+            <a:r>
+              <a:rPr lang="zh-CN" altLang="en-US" sz="1800" dirty="0">
+                <a:solidFill>
+                  <a:srgbClr val="1C2430"/>
+                </a:solidFill>
+                <a:latin typeface="Noto Sans CJK SC" pitchFamily="34" charset="0"/>
+                <a:ea typeface="Noto Sans CJK SC" pitchFamily="34" charset="-122"/>
+                <a:cs typeface="Noto Sans CJK SC" pitchFamily="34" charset="-120"/>
+              </a:rPr>
+              <a:t>指出具体面板和变化方向</a:t>
+            </a:r>
+            <a:endParaRPr lang="zh-CN" sz="1800" dirty="0"/>
+          </a:p>
+          <a:p>
+            <a:pPr algn="l" indent="0" marL="0">
+              <a:lnSpc>
+                <a:spcPts val="2232"/>
               </a:lnSpc>
               <a:buNone/>
             </a:pPr>
             <a:r>
               <a:rPr lang="zh-CN" altLang="en-US" sz="1800" b="1" dirty="0">
                 <a:solidFill>
-                  <a:srgbClr val="173C70"/>
-                </a:solidFill>
-                <a:latin typeface="Noto Sans CJK SC" pitchFamily="34" charset="0"/>
-                <a:ea typeface="Noto Sans CJK SC" pitchFamily="34" charset="-122"/>
-                <a:cs typeface="Noto Sans CJK SC" pitchFamily="34" charset="-120"/>
-              </a:rPr>
-              <a:t>图例与处理</a:t>
+                  <a:srgbClr val="146C63"/>
+                </a:solidFill>
+                <a:latin typeface="Noto Sans CJK SC" pitchFamily="34" charset="0"/>
+                <a:ea typeface="Noto Sans CJK SC" pitchFamily="34" charset="-122"/>
+                <a:cs typeface="Noto Sans CJK SC" pitchFamily="34" charset="-120"/>
+              </a:rPr>
+              <a:t>对照</a:t>
+            </a:r>
+            <a:pPr algn="l" indent="0" marL="0">
+              <a:lnSpc>
+                <a:spcPts val="2232"/>
+              </a:lnSpc>
+              <a:buNone/>
+            </a:pPr>
+            <a:r>
+              <a:rPr lang="zh-CN" altLang="en-US" sz="1800" dirty="0">
+                <a:solidFill>
+                  <a:srgbClr val="1C2430"/>
+                </a:solidFill>
+                <a:latin typeface="Noto Sans CJK SC" pitchFamily="34" charset="0"/>
+                <a:ea typeface="Noto Sans CJK SC" pitchFamily="34" charset="-122"/>
+                <a:cs typeface="Noto Sans CJK SC" pitchFamily="34" charset="-120"/>
+              </a:rPr>
+              <a:t>图注与原始数据核对数值</a:t>
             </a:r>
             <a:endParaRPr lang="zh-CN" sz="1800" dirty="0"/>
           </a:p>
@@ -1807,226 +2092,14 @@
       </p:sp>
       <p:sp>
         <p:nvSpPr>
-          <p:cNvPr id="16" name="T25/card/region-1/body"/>
-          <p:cNvSpPr/>
-          <p:nvPr/>
-        </p:nvSpPr>
-        <p:spPr>
-          <a:xfrm>
-            <a:off x="609600" y="5162550"/>
-            <a:ext cx="3314700" cy="762000"/>
-          </a:xfrm>
-          <a:prstGeom prst="rect">
-            <a:avLst/>
-          </a:prstGeom>
-          <a:noFill/>
-          <a:ln/>
-        </p:spPr>
-        <p:txBody>
-          <a:bodyPr wrap="none" lIns="0" tIns="0" rIns="0" bIns="0" rtlCol="0" anchor="t"/>
-          <a:lstStyle/>
-          <a:p>
-            <a:pPr algn="l" indent="0" marL="0">
-              <a:lnSpc>
-                <a:spcPts val="2139"/>
-              </a:lnSpc>
-              <a:buNone/>
-            </a:pPr>
-            <a:r>
-              <a:rPr lang="zh-CN" altLang="en-US" sz="1725" dirty="0">
-                <a:solidFill>
-                  <a:srgbClr val="1C2430"/>
-                </a:solidFill>
-                <a:latin typeface="Noto Sans CJK SC" pitchFamily="34" charset="0"/>
-                <a:ea typeface="Noto Sans CJK SC" pitchFamily="34" charset="-122"/>
-                <a:cs typeface="Noto Sans CJK SC" pitchFamily="34" charset="-120"/>
-              </a:rPr>
-              <a:t>解释颜色、线型与实验条件</a:t>
-            </a:r>
-            <a:endParaRPr lang="zh-CN" sz="1725" dirty="0"/>
-          </a:p>
-          <a:p>
-            <a:pPr algn="l" indent="0" marL="0">
-              <a:lnSpc>
-                <a:spcPts val="2139"/>
-              </a:lnSpc>
-              <a:buNone/>
-            </a:pPr>
-            <a:r>
-              <a:rPr lang="zh-CN" altLang="en-US" sz="1725" dirty="0">
-                <a:solidFill>
-                  <a:srgbClr val="1C2430"/>
-                </a:solidFill>
-                <a:latin typeface="Noto Sans CJK SC" pitchFamily="34" charset="0"/>
-                <a:ea typeface="Noto Sans CJK SC" pitchFamily="34" charset="-122"/>
-                <a:cs typeface="Noto Sans CJK SC" pitchFamily="34" charset="-120"/>
-              </a:rPr>
-              <a:t>读图前先明确比较对象</a:t>
-            </a:r>
-            <a:endParaRPr lang="zh-CN" sz="1725" dirty="0"/>
-          </a:p>
-        </p:txBody>
-      </p:sp>
-      <p:sp>
-        <p:nvSpPr>
-          <p:cNvPr id="17" name="T25/card/region-2/heading-rule"/>
-          <p:cNvSpPr/>
-          <p:nvPr/>
-        </p:nvSpPr>
-        <p:spPr>
-          <a:xfrm>
-            <a:off x="4210050" y="5086350"/>
-            <a:ext cx="3467100" cy="0"/>
-          </a:xfrm>
-          <a:prstGeom prst="line">
-            <a:avLst/>
-          </a:prstGeom>
-          <a:noFill/>
-          <a:ln w="9525">
-            <a:solidFill>
-              <a:srgbClr val="BEC8D4"/>
-            </a:solidFill>
-            <a:prstDash val="solid"/>
-          </a:ln>
-        </p:spPr>
-      </p:sp>
-      <p:sp>
-        <p:nvSpPr>
-          <p:cNvPr id="18" name="T25/card/region-2/heading-mark"/>
-          <p:cNvSpPr/>
-          <p:nvPr/>
-        </p:nvSpPr>
-        <p:spPr>
-          <a:xfrm>
-            <a:off x="4210050" y="5086350"/>
-            <a:ext cx="342900" cy="0"/>
-          </a:xfrm>
-          <a:prstGeom prst="line">
-            <a:avLst/>
-          </a:prstGeom>
-          <a:noFill/>
-          <a:ln w="17145">
-            <a:solidFill>
-              <a:srgbClr val="173C70"/>
-            </a:solidFill>
-            <a:prstDash val="solid"/>
-          </a:ln>
-        </p:spPr>
-      </p:sp>
-      <p:sp>
-        <p:nvSpPr>
-          <p:cNvPr id="19" name="T25/card/region-2/title"/>
-          <p:cNvSpPr/>
-          <p:nvPr/>
-        </p:nvSpPr>
-        <p:spPr>
-          <a:xfrm>
-            <a:off x="4210050" y="4743450"/>
-            <a:ext cx="3467100" cy="323850"/>
-          </a:xfrm>
-          <a:prstGeom prst="rect">
-            <a:avLst/>
-          </a:prstGeom>
-          <a:noFill/>
-          <a:ln/>
-        </p:spPr>
-        <p:txBody>
-          <a:bodyPr wrap="none" lIns="0" tIns="0" rIns="0" bIns="0" rtlCol="0" anchor="t"/>
-          <a:lstStyle/>
-          <a:p>
-            <a:pPr algn="l" indent="0" marL="0">
-              <a:lnSpc>
-                <a:spcPts val="2156"/>
-              </a:lnSpc>
-              <a:buNone/>
-            </a:pPr>
-            <a:r>
-              <a:rPr lang="zh-CN" altLang="en-US" sz="1875" b="1" dirty="0">
-                <a:solidFill>
-                  <a:srgbClr val="173C70"/>
-                </a:solidFill>
-                <a:latin typeface="Noto Sans CJK SC" pitchFamily="34" charset="0"/>
-                <a:ea typeface="Noto Sans CJK SC" pitchFamily="34" charset="-122"/>
-                <a:cs typeface="Noto Sans CJK SC" pitchFamily="34" charset="-120"/>
-              </a:rPr>
-              <a:t>主要趋势</a:t>
-            </a:r>
-            <a:endParaRPr lang="zh-CN" sz="1875" dirty="0"/>
-          </a:p>
-        </p:txBody>
-      </p:sp>
-      <p:sp>
-        <p:nvSpPr>
-          <p:cNvPr id="20" name="T25/card/region-2/body"/>
-          <p:cNvSpPr/>
-          <p:nvPr/>
-        </p:nvSpPr>
-        <p:spPr>
-          <a:xfrm>
-            <a:off x="4210050" y="5219700"/>
-            <a:ext cx="3467100" cy="762000"/>
-          </a:xfrm>
-          <a:prstGeom prst="rect">
-            <a:avLst/>
-          </a:prstGeom>
-          <a:noFill/>
-          <a:ln/>
-        </p:spPr>
-        <p:txBody>
-          <a:bodyPr wrap="none" lIns="0" tIns="0" rIns="0" bIns="0" rtlCol="0" anchor="t"/>
-          <a:lstStyle/>
-          <a:p>
-            <a:pPr algn="l" indent="0" marL="0">
-              <a:lnSpc>
-                <a:spcPts val="2232"/>
-              </a:lnSpc>
-              <a:buNone/>
-            </a:pPr>
-            <a:r>
-              <a:rPr lang="zh-CN" altLang="en-US" sz="1800" dirty="0">
-                <a:solidFill>
-                  <a:srgbClr val="1C2430"/>
-                </a:solidFill>
-                <a:latin typeface="Noto Sans CJK SC" pitchFamily="34" charset="0"/>
-                <a:ea typeface="Noto Sans CJK SC" pitchFamily="34" charset="-122"/>
-                <a:cs typeface="Noto Sans CJK SC" pitchFamily="34" charset="-120"/>
-              </a:rPr>
-              <a:t>指出具体面板和变化方向</a:t>
-            </a:r>
-            <a:endParaRPr lang="zh-CN" sz="1800" dirty="0"/>
-          </a:p>
-          <a:p>
-            <a:pPr algn="l" indent="0" marL="0">
-              <a:lnSpc>
-                <a:spcPts val="2232"/>
-              </a:lnSpc>
-              <a:buNone/>
-            </a:pPr>
-            <a:r>
-              <a:rPr lang="zh-CN" altLang="en-US" sz="1800" dirty="0">
-                <a:solidFill>
-                  <a:srgbClr val="1C2430"/>
-                </a:solidFill>
-                <a:latin typeface="Noto Sans CJK SC" pitchFamily="34" charset="0"/>
-                <a:ea typeface="Noto Sans CJK SC" pitchFamily="34" charset="-122"/>
-                <a:cs typeface="Noto Sans CJK SC" pitchFamily="34" charset="-120"/>
-              </a:rPr>
-              <a:t>对照图注与原始数据核对数值</a:t>
-            </a:r>
-            <a:endParaRPr lang="zh-CN" sz="1800" dirty="0"/>
-          </a:p>
-        </p:txBody>
-      </p:sp>
-      <p:sp>
-        <p:nvSpPr>
           <p:cNvPr id="21" name="T25/card/region-3/frame"/>
           <p:cNvSpPr/>
           <p:nvPr/>
         </p:nvSpPr>
         <p:spPr>
           <a:xfrm>
-            <a:off x="7962900" y="4838700"/>
-            <a:ext cx="3771900" cy="1181100"/>
+            <a:off x="7962900" y="4941284"/>
+            <a:ext cx="3771900" cy="1132046"/>
           </a:xfrm>
           <a:prstGeom prst="rect">
             <a:avLst/>
@@ -2050,14 +2123,14 @@
         </p:nvSpPr>
         <p:spPr>
           <a:xfrm>
-            <a:off x="8077200" y="4724400"/>
-            <a:ext cx="1181100" cy="320040"/>
+            <a:off x="8077200" y="4826984"/>
+            <a:ext cx="1257300" cy="342900"/>
           </a:xfrm>
           <a:prstGeom prst="rect">
             <a:avLst/>
           </a:prstGeom>
           <a:solidFill>
-            <a:srgbClr val="173C70"/>
+            <a:srgbClr val="235E96"/>
           </a:solidFill>
           <a:ln w="12700">
             <a:solidFill>
@@ -2077,8 +2150,8 @@
         </p:nvSpPr>
         <p:spPr>
           <a:xfrm>
-            <a:off x="8181975" y="4752975"/>
-            <a:ext cx="971550" cy="262890"/>
+            <a:off x="8181975" y="4855559"/>
+            <a:ext cx="1047750" cy="285750"/>
           </a:xfrm>
           <a:prstGeom prst="rect">
             <a:avLst/>
@@ -2092,12 +2165,12 @@
           <a:p>
             <a:pPr algn="l" indent="0" marL="0">
               <a:lnSpc>
-                <a:spcPts val="2070"/>
-              </a:lnSpc>
-              <a:buNone/>
-            </a:pPr>
-            <a:r>
-              <a:rPr lang="zh-CN" altLang="en-US" sz="1800" b="1" dirty="0">
+                <a:spcPts val="2242"/>
+              </a:lnSpc>
+              <a:buNone/>
+            </a:pPr>
+            <a:r>
+              <a:rPr lang="zh-CN" altLang="en-US" sz="1950" b="1" dirty="0">
                 <a:solidFill>
                   <a:srgbClr val="FFFFFF"/>
                 </a:solidFill>
@@ -2107,39 +2180,59 @@
               </a:rPr>
               <a:t>必要限定</a:t>
             </a:r>
+            <a:endParaRPr lang="zh-CN" sz="1950" dirty="0"/>
+          </a:p>
+        </p:txBody>
+      </p:sp>
+      <p:sp>
+        <p:nvSpPr>
+          <p:cNvPr id="24" name="T25/card/region-3/body"/>
+          <p:cNvSpPr/>
+          <p:nvPr/>
+        </p:nvSpPr>
+        <p:spPr>
+          <a:xfrm>
+            <a:off x="8096250" y="5312759"/>
+            <a:ext cx="3505200" cy="665321"/>
+          </a:xfrm>
+          <a:prstGeom prst="rect">
+            <a:avLst/>
+          </a:prstGeom>
+          <a:noFill/>
+          <a:ln/>
+        </p:spPr>
+        <p:txBody>
+          <a:bodyPr wrap="none" lIns="0" tIns="0" rIns="0" bIns="0" rtlCol="0" anchor="t"/>
+          <a:lstStyle/>
+          <a:p>
+            <a:pPr algn="l" indent="0" marL="0">
+              <a:lnSpc>
+                <a:spcPts val="2232"/>
+              </a:lnSpc>
+              <a:buNone/>
+            </a:pPr>
+            <a:r>
+              <a:rPr lang="zh-CN" altLang="en-US" sz="1800" dirty="0">
+                <a:solidFill>
+                  <a:srgbClr val="1C2430"/>
+                </a:solidFill>
+                <a:latin typeface="Noto Sans CJK SC" pitchFamily="34" charset="0"/>
+                <a:ea typeface="Noto Sans CJK SC" pitchFamily="34" charset="-122"/>
+                <a:cs typeface="Noto Sans CJK SC" pitchFamily="34" charset="-120"/>
+              </a:rPr>
+              <a:t>保留样本、误差与实验范围</a:t>
+            </a:r>
             <a:endParaRPr lang="zh-CN" sz="1800" dirty="0"/>
           </a:p>
-        </p:txBody>
-      </p:sp>
-      <p:sp>
-        <p:nvSpPr>
-          <p:cNvPr id="24" name="T25/card/region-3/body"/>
-          <p:cNvSpPr/>
-          <p:nvPr/>
-        </p:nvSpPr>
-        <p:spPr>
-          <a:xfrm>
-            <a:off x="8096250" y="5187315"/>
-            <a:ext cx="3505200" cy="737235"/>
-          </a:xfrm>
-          <a:prstGeom prst="rect">
-            <a:avLst/>
-          </a:prstGeom>
-          <a:noFill/>
-          <a:ln/>
-        </p:spPr>
-        <p:txBody>
-          <a:bodyPr wrap="none" lIns="0" tIns="0" rIns="0" bIns="0" rtlCol="0" anchor="t"/>
-          <a:lstStyle/>
-          <a:p>
-            <a:pPr algn="l" indent="0" marL="0">
-              <a:lnSpc>
-                <a:spcPts val="2139"/>
-              </a:lnSpc>
-              <a:buNone/>
-            </a:pPr>
-            <a:r>
-              <a:rPr lang="zh-CN" altLang="en-US" sz="1725" dirty="0">
+          <a:p>
+            <a:pPr algn="l" indent="0" marL="0">
+              <a:lnSpc>
+                <a:spcPts val="2232"/>
+              </a:lnSpc>
+              <a:buNone/>
+            </a:pPr>
+            <a:r>
+              <a:rPr lang="zh-CN" altLang="en-US" sz="1800" dirty="0">
                 <a:solidFill>
                   <a:srgbClr val="1C2430"/>
                 </a:solidFill>
@@ -2147,29 +2240,9 @@
                 <a:ea typeface="Noto Sans CJK SC" pitchFamily="34" charset="-122"/>
                 <a:cs typeface="Noto Sans CJK SC" pitchFamily="34" charset="-120"/>
               </a:rPr>
-              <a:t>保留样本、误差与实验范围</a:t>
-            </a:r>
-            <a:endParaRPr lang="zh-CN" sz="1725" dirty="0"/>
-          </a:p>
-          <a:p>
-            <a:pPr algn="l" indent="0" marL="0">
-              <a:lnSpc>
-                <a:spcPts val="2139"/>
-              </a:lnSpc>
-              <a:buNone/>
-            </a:pPr>
-            <a:r>
-              <a:rPr lang="zh-CN" altLang="en-US" sz="1725" dirty="0">
-                <a:solidFill>
-                  <a:srgbClr val="1C2430"/>
-                </a:solidFill>
-                <a:latin typeface="Noto Sans CJK SC" pitchFamily="34" charset="0"/>
-                <a:ea typeface="Noto Sans CJK SC" pitchFamily="34" charset="-122"/>
-                <a:cs typeface="Noto Sans CJK SC" pitchFamily="34" charset="-120"/>
-              </a:rPr>
               <a:t>不从示意图推导真实研究结论</a:t>
             </a:r>
-            <a:endParaRPr lang="zh-CN" sz="1725" dirty="0"/>
+            <a:endParaRPr lang="zh-CN" sz="1800" dirty="0"/>
           </a:p>
         </p:txBody>
       </p:sp>
@@ -2209,7 +2282,7 @@
                 <a:ea typeface="Noto Sans CJK SC" pitchFamily="34" charset="-122"/>
                 <a:cs typeface="Noto Sans CJK SC" pitchFamily="34" charset="-120"/>
               </a:rPr>
-              <a:t>T1 · 2026 · 待替换</a:t>
+              <a:t>T1 · 2026 · 书目占位；图表均为合成示例</a:t>
             </a:r>
             <a:endParaRPr lang="zh-CN" sz="1125" dirty="0"/>
           </a:p>
@@ -2318,14 +2391,14 @@
       </p:sp>
       <p:sp>
         <p:nvSpPr>
-          <p:cNvPr id="4" name="T26/kicker"/>
-          <p:cNvSpPr/>
-          <p:nvPr/>
-        </p:nvSpPr>
-        <p:spPr>
-          <a:xfrm>
-            <a:off x="457200" y="152400"/>
-            <a:ext cx="11277600" cy="190500"/>
+          <p:cNvPr id="4" name="T26/title"/>
+          <p:cNvSpPr/>
+          <p:nvPr/>
+        </p:nvSpPr>
+        <p:spPr>
+          <a:xfrm>
+            <a:off x="457200" y="209550"/>
+            <a:ext cx="11277600" cy="438150"/>
           </a:xfrm>
           <a:prstGeom prst="rect">
             <a:avLst/>
@@ -2339,54 +2412,12 @@
           <a:p>
             <a:pPr algn="l" indent="0" marL="0">
               <a:lnSpc>
-                <a:spcPts val="1320"/>
-              </a:lnSpc>
-              <a:buNone/>
-            </a:pPr>
-            <a:r>
-              <a:rPr lang="zh-CN" altLang="en-US" sz="1200" dirty="0">
-                <a:solidFill>
-                  <a:srgbClr val="515B68"/>
-                </a:solidFill>
-                <a:latin typeface="Noto Sans CJK SC" pitchFamily="34" charset="0"/>
-                <a:ea typeface="Noto Sans CJK SC" pitchFamily="34" charset="-122"/>
-                <a:cs typeface="Noto Sans CJK SC" pitchFamily="34" charset="-120"/>
-              </a:rPr>
-              <a:t>结构模板 / 占位说明与合成数据</a:t>
-            </a:r>
-            <a:endParaRPr lang="zh-CN" sz="1200" dirty="0"/>
-          </a:p>
-        </p:txBody>
-      </p:sp>
-      <p:sp>
-        <p:nvSpPr>
-          <p:cNvPr id="5" name="T26/title"/>
-          <p:cNvSpPr/>
-          <p:nvPr/>
-        </p:nvSpPr>
-        <p:spPr>
-          <a:xfrm>
-            <a:off x="457200" y="381000"/>
-            <a:ext cx="11277600" cy="400050"/>
-          </a:xfrm>
-          <a:prstGeom prst="rect">
-            <a:avLst/>
-          </a:prstGeom>
-          <a:noFill/>
-          <a:ln/>
-        </p:spPr>
-        <p:txBody>
-          <a:bodyPr wrap="none" lIns="0" tIns="0" rIns="0" bIns="0" rtlCol="0" anchor="t"/>
-          <a:lstStyle/>
-          <a:p>
-            <a:pPr algn="l" indent="0" marL="0">
-              <a:lnSpc>
-                <a:spcPts val="2856"/>
-              </a:lnSpc>
-              <a:buNone/>
-            </a:pPr>
-            <a:r>
-              <a:rPr lang="zh-CN" altLang="en-US" sz="2550" b="1" dirty="0">
+                <a:spcPts val="3360"/>
+              </a:lnSpc>
+              <a:buNone/>
+            </a:pPr>
+            <a:r>
+              <a:rPr lang="zh-CN" altLang="en-US" sz="3000" b="1" dirty="0">
                 <a:solidFill>
                   <a:srgbClr val="1C2430"/>
                 </a:solidFill>
@@ -2396,26 +2427,49 @@
               </a:rPr>
               <a:t>双面板对照解读</a:t>
             </a:r>
-            <a:endParaRPr lang="zh-CN" sz="2550" dirty="0"/>
-          </a:p>
-        </p:txBody>
-      </p:sp>
-      <p:sp>
-        <p:nvSpPr>
-          <p:cNvPr id="6" name="T26/header-rule"/>
-          <p:cNvSpPr/>
-          <p:nvPr/>
-        </p:nvSpPr>
-        <p:spPr>
-          <a:xfrm>
-            <a:off x="457200" y="876300"/>
+            <a:endParaRPr lang="zh-CN" sz="3000" dirty="0"/>
+          </a:p>
+        </p:txBody>
+      </p:sp>
+      <p:sp>
+        <p:nvSpPr>
+          <p:cNvPr id="5" name="T26/header-rule"/>
+          <p:cNvSpPr/>
+          <p:nvPr/>
+        </p:nvSpPr>
+        <p:spPr>
+          <a:xfrm>
+            <a:off x="457200" y="752475"/>
             <a:ext cx="11277600" cy="0"/>
           </a:xfrm>
           <a:prstGeom prst="line">
             <a:avLst/>
           </a:prstGeom>
           <a:noFill/>
-          <a:ln w="11430">
+          <a:ln w="10478">
+            <a:solidFill>
+              <a:srgbClr val="BEC8D4"/>
+            </a:solidFill>
+            <a:prstDash val="solid"/>
+          </a:ln>
+        </p:spPr>
+      </p:sp>
+      <p:sp>
+        <p:nvSpPr>
+          <p:cNvPr id="6" name="T26/header-accent"/>
+          <p:cNvSpPr/>
+          <p:nvPr/>
+        </p:nvSpPr>
+        <p:spPr>
+          <a:xfrm>
+            <a:off x="457200" y="752475"/>
+            <a:ext cx="704850" cy="0"/>
+          </a:xfrm>
+          <a:prstGeom prst="line">
+            <a:avLst/>
+          </a:prstGeom>
+          <a:noFill/>
+          <a:ln w="28575">
             <a:solidFill>
               <a:srgbClr val="173C70"/>
             </a:solidFill>
@@ -2431,8 +2485,8 @@
         </p:nvSpPr>
         <p:spPr>
           <a:xfrm>
-            <a:off x="457200" y="1314450"/>
-            <a:ext cx="5467350" cy="4724400"/>
+            <a:off x="457200" y="1127570"/>
+            <a:ext cx="5467350" cy="4965478"/>
           </a:xfrm>
           <a:prstGeom prst="rect">
             <a:avLst/>
@@ -2456,14 +2510,14 @@
         </p:nvSpPr>
         <p:spPr>
           <a:xfrm>
-            <a:off x="466725" y="1323975"/>
+            <a:off x="466725" y="1137095"/>
             <a:ext cx="5448300" cy="381000"/>
           </a:xfrm>
           <a:prstGeom prst="rect">
             <a:avLst/>
           </a:prstGeom>
           <a:solidFill>
-            <a:srgbClr val="EEF3F8"/>
+            <a:srgbClr val="EAF2FA"/>
           </a:solidFill>
           <a:ln w="12700">
             <a:solidFill>
@@ -2483,7 +2537,7 @@
         </p:nvSpPr>
         <p:spPr>
           <a:xfrm>
-            <a:off x="457200" y="1704975"/>
+            <a:off x="457200" y="1518095"/>
             <a:ext cx="5467350" cy="0"/>
           </a:xfrm>
           <a:prstGeom prst="line">
@@ -2506,8 +2560,8 @@
         </p:nvSpPr>
         <p:spPr>
           <a:xfrm>
-            <a:off x="581025" y="1371600"/>
-            <a:ext cx="5219700" cy="295275"/>
+            <a:off x="581025" y="1175195"/>
+            <a:ext cx="5219700" cy="304800"/>
           </a:xfrm>
           <a:prstGeom prst="rect">
             <a:avLst/>
@@ -2521,14 +2575,14 @@
           <a:p>
             <a:pPr algn="l" indent="0" marL="0">
               <a:lnSpc>
-                <a:spcPts val="2070"/>
-              </a:lnSpc>
-              <a:buNone/>
-            </a:pPr>
-            <a:r>
-              <a:rPr lang="zh-CN" altLang="en-US" sz="1800" b="1" dirty="0">
-                <a:solidFill>
-                  <a:srgbClr val="173C70"/>
+                <a:spcPts val="2242"/>
+              </a:lnSpc>
+              <a:buNone/>
+            </a:pPr>
+            <a:r>
+              <a:rPr lang="zh-CN" altLang="en-US" sz="1950" b="1" dirty="0">
+                <a:solidFill>
+                  <a:srgbClr val="235E96"/>
                 </a:solidFill>
                 <a:latin typeface="Noto Sans CJK SC" pitchFamily="34" charset="0"/>
                 <a:ea typeface="Noto Sans CJK SC" pitchFamily="34" charset="-122"/>
@@ -2536,7 +2590,7 @@
               </a:rPr>
               <a:t>A  面板及对应解读</a:t>
             </a:r>
-            <a:endParaRPr lang="zh-CN" sz="1800" dirty="0"/>
+            <a:endParaRPr lang="zh-CN" sz="1950" dirty="0"/>
           </a:p>
         </p:txBody>
       </p:sp>
@@ -2548,8 +2602,8 @@
         </p:nvSpPr>
         <p:spPr>
           <a:xfrm>
-            <a:off x="6248400" y="1314450"/>
-            <a:ext cx="5486400" cy="4724400"/>
+            <a:off x="6248400" y="1127570"/>
+            <a:ext cx="5486400" cy="4965478"/>
           </a:xfrm>
           <a:prstGeom prst="rect">
             <a:avLst/>
@@ -2573,14 +2627,14 @@
         </p:nvSpPr>
         <p:spPr>
           <a:xfrm>
-            <a:off x="6257925" y="1323975"/>
+            <a:off x="6257925" y="1137095"/>
             <a:ext cx="5467350" cy="381000"/>
           </a:xfrm>
           <a:prstGeom prst="rect">
             <a:avLst/>
           </a:prstGeom>
           <a:solidFill>
-            <a:srgbClr val="EEF3F8"/>
+            <a:srgbClr val="EAF2FA"/>
           </a:solidFill>
           <a:ln w="12700">
             <a:solidFill>
@@ -2600,7 +2654,7 @@
         </p:nvSpPr>
         <p:spPr>
           <a:xfrm>
-            <a:off x="6248400" y="1704975"/>
+            <a:off x="6248400" y="1518095"/>
             <a:ext cx="5486400" cy="0"/>
           </a:xfrm>
           <a:prstGeom prst="line">
@@ -2623,8 +2677,8 @@
         </p:nvSpPr>
         <p:spPr>
           <a:xfrm>
-            <a:off x="6372225" y="1371600"/>
-            <a:ext cx="5238750" cy="295275"/>
+            <a:off x="6372225" y="1175195"/>
+            <a:ext cx="5238750" cy="304800"/>
           </a:xfrm>
           <a:prstGeom prst="rect">
             <a:avLst/>
@@ -2638,14 +2692,14 @@
           <a:p>
             <a:pPr algn="l" indent="0" marL="0">
               <a:lnSpc>
-                <a:spcPts val="2070"/>
-              </a:lnSpc>
-              <a:buNone/>
-            </a:pPr>
-            <a:r>
-              <a:rPr lang="zh-CN" altLang="en-US" sz="1800" b="1" dirty="0">
-                <a:solidFill>
-                  <a:srgbClr val="173C70"/>
+                <a:spcPts val="2242"/>
+              </a:lnSpc>
+              <a:buNone/>
+            </a:pPr>
+            <a:r>
+              <a:rPr lang="zh-CN" altLang="en-US" sz="1950" b="1" dirty="0">
+                <a:solidFill>
+                  <a:srgbClr val="235E96"/>
                 </a:solidFill>
                 <a:latin typeface="Noto Sans CJK SC" pitchFamily="34" charset="0"/>
                 <a:ea typeface="Noto Sans CJK SC" pitchFamily="34" charset="-122"/>
@@ -2653,7 +2707,7 @@
               </a:rPr>
               <a:t>B  面板及对应解读</a:t>
             </a:r>
-            <a:endParaRPr lang="zh-CN" sz="1800" dirty="0"/>
+            <a:endParaRPr lang="zh-CN" sz="1950" dirty="0"/>
           </a:p>
         </p:txBody>
       </p:sp>
@@ -2665,8 +2719,8 @@
         </p:nvSpPr>
         <p:spPr>
           <a:xfrm>
-            <a:off x="590550" y="1790700"/>
-            <a:ext cx="5200650" cy="2609850"/>
+            <a:off x="1217788" y="1641253"/>
+            <a:ext cx="3946173" cy="2922746"/>
           </a:xfrm>
           <a:prstGeom prst="rect">
             <a:avLst/>
@@ -2674,19 +2728,24 @@
           <a:solidFill>
             <a:srgbClr val="FFFFFF"/>
           </a:solidFill>
-          <a:ln w="12700">
-            <a:solidFill>
-              <a:srgbClr val="FFFFFF">
-                <a:alpha val="0"/>
+          <a:ln w="7620">
+            <a:solidFill>
+              <a:srgbClr val="CCD4DD"/>
+            </a:solidFill>
+            <a:prstDash val="solid"/>
+          </a:ln>
+          <a:effectLst>
+            <a:outerShdw sx="100000" sy="100000" kx="0" ky="0" algn="bl" rotWithShape="0" blurRad="28575" dist="19050" dir="5400000">
+              <a:srgbClr val="263B50">
+                <a:alpha val="12000"/>
               </a:srgbClr>
-            </a:solidFill>
-            <a:prstDash val="solid"/>
-          </a:ln>
+            </a:outerShdw>
+          </a:effectLst>
         </p:spPr>
       </p:sp>
       <p:pic>
         <p:nvPicPr>
-          <p:cNvPr id="16" name="T26/figure:0:image" descr="T1 · 示例图 · 响应曲线；合成演示值">    </p:cNvPr>
+          <p:cNvPr id="16" name="T26/figure:0:image" descr="A/B 为条件；合成数据">    </p:cNvPr>
           <p:cNvPicPr>
             <a:picLocks noChangeAspect="1"/>
           </p:cNvPicPr>
@@ -2700,8 +2759,8 @@
         </p:blipFill>
         <p:spPr>
           <a:xfrm>
-            <a:off x="1301750" y="1790700"/>
-            <a:ext cx="3778250" cy="2266950"/>
+            <a:off x="1246363" y="1669828"/>
+            <a:ext cx="3889023" cy="2865596"/>
           </a:xfrm>
           <a:prstGeom prst="rect">
             <a:avLst/>
@@ -2716,7 +2775,7 @@
         </p:nvSpPr>
         <p:spPr>
           <a:xfrm>
-            <a:off x="590550" y="4143375"/>
+            <a:off x="590550" y="4668774"/>
             <a:ext cx="5200650" cy="257175"/>
           </a:xfrm>
           <a:prstGeom prst="rect">
@@ -2744,7 +2803,7 @@
                 <a:ea typeface="Noto Sans CJK SC" pitchFamily="34" charset="-122"/>
                 <a:cs typeface="Noto Sans CJK SC" pitchFamily="34" charset="-120"/>
               </a:rPr>
-              <a:t>T1 · 示例图 · 响应曲线；合成演示值</a:t>
+              <a:t>A/B 为条件；合成数据</a:t>
             </a:r>
             <a:endParaRPr lang="zh-CN" sz="1350" dirty="0"/>
           </a:p>
@@ -2758,8 +2817,8 @@
         </p:nvSpPr>
         <p:spPr>
           <a:xfrm>
-            <a:off x="6381750" y="1790700"/>
-            <a:ext cx="5219700" cy="2609850"/>
+            <a:off x="7018513" y="1641253"/>
+            <a:ext cx="3946173" cy="2922746"/>
           </a:xfrm>
           <a:prstGeom prst="rect">
             <a:avLst/>
@@ -2767,19 +2826,24 @@
           <a:solidFill>
             <a:srgbClr val="FFFFFF"/>
           </a:solidFill>
-          <a:ln w="12700">
-            <a:solidFill>
-              <a:srgbClr val="FFFFFF">
-                <a:alpha val="0"/>
+          <a:ln w="7620">
+            <a:solidFill>
+              <a:srgbClr val="CCD4DD"/>
+            </a:solidFill>
+            <a:prstDash val="solid"/>
+          </a:ln>
+          <a:effectLst>
+            <a:outerShdw sx="100000" sy="100000" kx="0" ky="0" algn="bl" rotWithShape="0" blurRad="28575" dist="19050" dir="5400000">
+              <a:srgbClr val="263B50">
+                <a:alpha val="12000"/>
               </a:srgbClr>
-            </a:solidFill>
-            <a:prstDash val="solid"/>
-          </a:ln>
+            </a:outerShdw>
+          </a:effectLst>
         </p:spPr>
       </p:sp>
       <p:pic>
         <p:nvPicPr>
-          <p:cNvPr id="19" name="T26/figure:1:image" descr="T1 · 示例图 · 效应与区间；合成演示值">    </p:cNvPr>
+          <p:cNvPr id="19" name="T26/figure:1:image" descr="Ref. 为参考，V1–V3 为变体；合成数据">    </p:cNvPr>
           <p:cNvPicPr>
             <a:picLocks noChangeAspect="1"/>
           </p:cNvPicPr>
@@ -2793,8 +2857,8 @@
         </p:blipFill>
         <p:spPr>
           <a:xfrm>
-            <a:off x="7102475" y="1790700"/>
-            <a:ext cx="3778250" cy="2266950"/>
+            <a:off x="7047088" y="1669828"/>
+            <a:ext cx="3889023" cy="2865596"/>
           </a:xfrm>
           <a:prstGeom prst="rect">
             <a:avLst/>
@@ -2809,7 +2873,7 @@
         </p:nvSpPr>
         <p:spPr>
           <a:xfrm>
-            <a:off x="6381750" y="4143375"/>
+            <a:off x="6381750" y="4668774"/>
             <a:ext cx="5219700" cy="257175"/>
           </a:xfrm>
           <a:prstGeom prst="rect">
@@ -2837,7 +2901,7 @@
                 <a:ea typeface="Noto Sans CJK SC" pitchFamily="34" charset="-122"/>
                 <a:cs typeface="Noto Sans CJK SC" pitchFamily="34" charset="-120"/>
               </a:rPr>
-              <a:t>T1 · 示例图 · 效应与区间；合成演示值</a:t>
+              <a:t>Ref. 为参考，V1–V3 为变体；合成数据</a:t>
             </a:r>
             <a:endParaRPr lang="zh-CN" sz="1350" dirty="0"/>
           </a:p>
@@ -2851,7 +2915,7 @@
         </p:nvSpPr>
         <p:spPr>
           <a:xfrm>
-            <a:off x="590550" y="4705350"/>
+            <a:off x="590550" y="5103209"/>
             <a:ext cx="5200650" cy="323850"/>
           </a:xfrm>
           <a:prstGeom prst="rect">
@@ -2866,14 +2930,14 @@
           <a:p>
             <a:pPr algn="l" indent="0" marL="0">
               <a:lnSpc>
-                <a:spcPts val="2156"/>
-              </a:lnSpc>
-              <a:buNone/>
-            </a:pPr>
-            <a:r>
-              <a:rPr lang="zh-CN" altLang="en-US" sz="1875" b="1" dirty="0">
-                <a:solidFill>
-                  <a:srgbClr val="173C70"/>
+                <a:spcPts val="2242"/>
+              </a:lnSpc>
+              <a:buNone/>
+            </a:pPr>
+            <a:r>
+              <a:rPr lang="zh-CN" altLang="en-US" sz="1950" b="1" dirty="0">
+                <a:solidFill>
+                  <a:srgbClr val="235E96"/>
                 </a:solidFill>
                 <a:latin typeface="Noto Sans CJK SC" pitchFamily="34" charset="0"/>
                 <a:ea typeface="Noto Sans CJK SC" pitchFamily="34" charset="-122"/>
@@ -2881,7 +2945,7 @@
               </a:rPr>
               <a:t>面板 A</a:t>
             </a:r>
-            <a:endParaRPr lang="zh-CN" sz="1875" dirty="0"/>
+            <a:endParaRPr lang="zh-CN" sz="1950" dirty="0"/>
           </a:p>
         </p:txBody>
       </p:sp>
@@ -2893,8 +2957,8 @@
         </p:nvSpPr>
         <p:spPr>
           <a:xfrm>
-            <a:off x="590550" y="5086350"/>
-            <a:ext cx="5200650" cy="781050"/>
+            <a:off x="590550" y="5484209"/>
+            <a:ext cx="5200650" cy="511397"/>
           </a:xfrm>
           <a:prstGeom prst="rect">
             <a:avLst/>
@@ -2908,12 +2972,12 @@
           <a:p>
             <a:pPr algn="l" indent="0" marL="0">
               <a:lnSpc>
-                <a:spcPts val="2139"/>
-              </a:lnSpc>
-              <a:buNone/>
-            </a:pPr>
-            <a:r>
-              <a:rPr lang="zh-CN" altLang="en-US" sz="1725" dirty="0">
+                <a:spcPts val="2232"/>
+              </a:lnSpc>
+              <a:buNone/>
+            </a:pPr>
+            <a:r>
+              <a:rPr lang="zh-CN" altLang="en-US" sz="1800" dirty="0">
                 <a:solidFill>
                   <a:srgbClr val="1C2430"/>
                 </a:solidFill>
@@ -2923,17 +2987,81 @@
               </a:rPr>
               <a:t>解释该面板的变量和处理</a:t>
             </a:r>
-            <a:endParaRPr lang="zh-CN" sz="1725" dirty="0"/>
-          </a:p>
-          <a:p>
-            <a:pPr algn="l" indent="0" marL="0">
-              <a:lnSpc>
-                <a:spcPts val="2139"/>
-              </a:lnSpc>
-              <a:buNone/>
-            </a:pPr>
-            <a:r>
-              <a:rPr lang="zh-CN" altLang="en-US" sz="1725" dirty="0">
+            <a:endParaRPr lang="zh-CN" sz="1800" dirty="0"/>
+          </a:p>
+        </p:txBody>
+      </p:sp>
+      <p:sp>
+        <p:nvSpPr>
+          <p:cNvPr id="23" name="T26/card/region-2/title"/>
+          <p:cNvSpPr/>
+          <p:nvPr/>
+        </p:nvSpPr>
+        <p:spPr>
+          <a:xfrm>
+            <a:off x="6381750" y="5103209"/>
+            <a:ext cx="5219700" cy="323850"/>
+          </a:xfrm>
+          <a:prstGeom prst="rect">
+            <a:avLst/>
+          </a:prstGeom>
+          <a:noFill/>
+          <a:ln/>
+        </p:spPr>
+        <p:txBody>
+          <a:bodyPr wrap="none" lIns="0" tIns="0" rIns="0" bIns="0" rtlCol="0" anchor="t"/>
+          <a:lstStyle/>
+          <a:p>
+            <a:pPr algn="l" indent="0" marL="0">
+              <a:lnSpc>
+                <a:spcPts val="2242"/>
+              </a:lnSpc>
+              <a:buNone/>
+            </a:pPr>
+            <a:r>
+              <a:rPr lang="zh-CN" altLang="en-US" sz="1950" b="1" dirty="0">
+                <a:solidFill>
+                  <a:srgbClr val="235E96"/>
+                </a:solidFill>
+                <a:latin typeface="Noto Sans CJK SC" pitchFamily="34" charset="0"/>
+                <a:ea typeface="Noto Sans CJK SC" pitchFamily="34" charset="-122"/>
+                <a:cs typeface="Noto Sans CJK SC" pitchFamily="34" charset="-120"/>
+              </a:rPr>
+              <a:t>面板 B</a:t>
+            </a:r>
+            <a:endParaRPr lang="zh-CN" sz="1950" dirty="0"/>
+          </a:p>
+        </p:txBody>
+      </p:sp>
+      <p:sp>
+        <p:nvSpPr>
+          <p:cNvPr id="24" name="T26/card/region-2/body"/>
+          <p:cNvSpPr/>
+          <p:nvPr/>
+        </p:nvSpPr>
+        <p:spPr>
+          <a:xfrm>
+            <a:off x="6381750" y="5484209"/>
+            <a:ext cx="5219700" cy="511397"/>
+          </a:xfrm>
+          <a:prstGeom prst="rect">
+            <a:avLst/>
+          </a:prstGeom>
+          <a:noFill/>
+          <a:ln/>
+        </p:spPr>
+        <p:txBody>
+          <a:bodyPr wrap="none" lIns="0" tIns="0" rIns="0" bIns="0" rtlCol="0" anchor="t"/>
+          <a:lstStyle/>
+          <a:p>
+            <a:pPr algn="l" indent="0" marL="0">
+              <a:lnSpc>
+                <a:spcPts val="2232"/>
+              </a:lnSpc>
+              <a:buNone/>
+            </a:pPr>
+            <a:r>
+              <a:rPr lang="zh-CN" altLang="en-US" sz="1800" dirty="0">
                 <a:solidFill>
                   <a:srgbClr val="1C2430"/>
                 </a:solidFill>
@@ -2941,113 +3069,9 @@
                 <a:ea typeface="Noto Sans CJK SC" pitchFamily="34" charset="-122"/>
                 <a:cs typeface="Noto Sans CJK SC" pitchFamily="34" charset="-120"/>
               </a:rPr>
-              <a:t>对应的图注与样本条件独立保留</a:t>
-            </a:r>
-            <a:endParaRPr lang="zh-CN" sz="1725" dirty="0"/>
-          </a:p>
-        </p:txBody>
-      </p:sp>
-      <p:sp>
-        <p:nvSpPr>
-          <p:cNvPr id="23" name="T26/card/region-2/title"/>
-          <p:cNvSpPr/>
-          <p:nvPr/>
-        </p:nvSpPr>
-        <p:spPr>
-          <a:xfrm>
-            <a:off x="6381750" y="4705350"/>
-            <a:ext cx="5219700" cy="323850"/>
-          </a:xfrm>
-          <a:prstGeom prst="rect">
-            <a:avLst/>
-          </a:prstGeom>
-          <a:noFill/>
-          <a:ln/>
-        </p:spPr>
-        <p:txBody>
-          <a:bodyPr wrap="none" lIns="0" tIns="0" rIns="0" bIns="0" rtlCol="0" anchor="t"/>
-          <a:lstStyle/>
-          <a:p>
-            <a:pPr algn="l" indent="0" marL="0">
-              <a:lnSpc>
-                <a:spcPts val="2156"/>
-              </a:lnSpc>
-              <a:buNone/>
-            </a:pPr>
-            <a:r>
-              <a:rPr lang="zh-CN" altLang="en-US" sz="1875" b="1" dirty="0">
-                <a:solidFill>
-                  <a:srgbClr val="173C70"/>
-                </a:solidFill>
-                <a:latin typeface="Noto Sans CJK SC" pitchFamily="34" charset="0"/>
-                <a:ea typeface="Noto Sans CJK SC" pitchFamily="34" charset="-122"/>
-                <a:cs typeface="Noto Sans CJK SC" pitchFamily="34" charset="-120"/>
-              </a:rPr>
-              <a:t>面板 B</a:t>
-            </a:r>
-            <a:endParaRPr lang="zh-CN" sz="1875" dirty="0"/>
-          </a:p>
-        </p:txBody>
-      </p:sp>
-      <p:sp>
-        <p:nvSpPr>
-          <p:cNvPr id="24" name="T26/card/region-2/body"/>
-          <p:cNvSpPr/>
-          <p:nvPr/>
-        </p:nvSpPr>
-        <p:spPr>
-          <a:xfrm>
-            <a:off x="6381750" y="5086350"/>
-            <a:ext cx="5219700" cy="781050"/>
-          </a:xfrm>
-          <a:prstGeom prst="rect">
-            <a:avLst/>
-          </a:prstGeom>
-          <a:noFill/>
-          <a:ln/>
-        </p:spPr>
-        <p:txBody>
-          <a:bodyPr wrap="none" lIns="0" tIns="0" rIns="0" bIns="0" rtlCol="0" anchor="t"/>
-          <a:lstStyle/>
-          <a:p>
-            <a:pPr algn="l" indent="0" marL="0">
-              <a:lnSpc>
-                <a:spcPts val="2139"/>
-              </a:lnSpc>
-              <a:buNone/>
-            </a:pPr>
-            <a:r>
-              <a:rPr lang="zh-CN" altLang="en-US" sz="1725" dirty="0">
-                <a:solidFill>
-                  <a:srgbClr val="1C2430"/>
-                </a:solidFill>
-                <a:latin typeface="Noto Sans CJK SC" pitchFamily="34" charset="0"/>
-                <a:ea typeface="Noto Sans CJK SC" pitchFamily="34" charset="-122"/>
-                <a:cs typeface="Noto Sans CJK SC" pitchFamily="34" charset="-120"/>
-              </a:rPr>
               <a:t>说明它如何补充前一面板</a:t>
             </a:r>
-            <a:endParaRPr lang="zh-CN" sz="1725" dirty="0"/>
-          </a:p>
-          <a:p>
-            <a:pPr algn="l" indent="0" marL="0">
-              <a:lnSpc>
-                <a:spcPts val="2139"/>
-              </a:lnSpc>
-              <a:buNone/>
-            </a:pPr>
-            <a:r>
-              <a:rPr lang="zh-CN" altLang="en-US" sz="1725" dirty="0">
-                <a:solidFill>
-                  <a:srgbClr val="1C2430"/>
-                </a:solidFill>
-                <a:latin typeface="Noto Sans CJK SC" pitchFamily="34" charset="0"/>
-                <a:ea typeface="Noto Sans CJK SC" pitchFamily="34" charset="-122"/>
-                <a:cs typeface="Noto Sans CJK SC" pitchFamily="34" charset="-120"/>
-              </a:rPr>
-              <a:t>确认两图尺度是否可以直接比较</a:t>
-            </a:r>
-            <a:endParaRPr lang="zh-CN" sz="1725" dirty="0"/>
+            <a:endParaRPr lang="zh-CN" sz="1800" dirty="0"/>
           </a:p>
         </p:txBody>
       </p:sp>
@@ -3087,7 +3111,7 @@
                 <a:ea typeface="Noto Sans CJK SC" pitchFamily="34" charset="-122"/>
                 <a:cs typeface="Noto Sans CJK SC" pitchFamily="34" charset="-120"/>
               </a:rPr>
-              <a:t>T1 · 2026 · 待替换</a:t>
+              <a:t>T1 · 2026 · 书目占位；图表均为合成示例</a:t>
             </a:r>
             <a:endParaRPr lang="zh-CN" sz="1125" dirty="0"/>
           </a:p>
@@ -3196,14 +3220,14 @@
       </p:sp>
       <p:sp>
         <p:nvSpPr>
-          <p:cNvPr id="4" name="T27/kicker"/>
-          <p:cNvSpPr/>
-          <p:nvPr/>
-        </p:nvSpPr>
-        <p:spPr>
-          <a:xfrm>
-            <a:off x="457200" y="152400"/>
-            <a:ext cx="11277600" cy="190500"/>
+          <p:cNvPr id="4" name="T27/title"/>
+          <p:cNvSpPr/>
+          <p:nvPr/>
+        </p:nvSpPr>
+        <p:spPr>
+          <a:xfrm>
+            <a:off x="457200" y="209550"/>
+            <a:ext cx="11277600" cy="438150"/>
           </a:xfrm>
           <a:prstGeom prst="rect">
             <a:avLst/>
@@ -3217,54 +3241,12 @@
           <a:p>
             <a:pPr algn="l" indent="0" marL="0">
               <a:lnSpc>
-                <a:spcPts val="1320"/>
-              </a:lnSpc>
-              <a:buNone/>
-            </a:pPr>
-            <a:r>
-              <a:rPr lang="zh-CN" altLang="en-US" sz="1200" dirty="0">
-                <a:solidFill>
-                  <a:srgbClr val="515B68"/>
-                </a:solidFill>
-                <a:latin typeface="Noto Sans CJK SC" pitchFamily="34" charset="0"/>
-                <a:ea typeface="Noto Sans CJK SC" pitchFamily="34" charset="-122"/>
-                <a:cs typeface="Noto Sans CJK SC" pitchFamily="34" charset="-120"/>
-              </a:rPr>
-              <a:t>结构模板 / 占位说明与合成数据</a:t>
-            </a:r>
-            <a:endParaRPr lang="zh-CN" sz="1200" dirty="0"/>
-          </a:p>
-        </p:txBody>
-      </p:sp>
-      <p:sp>
-        <p:nvSpPr>
-          <p:cNvPr id="5" name="T27/title"/>
-          <p:cNvSpPr/>
-          <p:nvPr/>
-        </p:nvSpPr>
-        <p:spPr>
-          <a:xfrm>
-            <a:off x="457200" y="381000"/>
-            <a:ext cx="11277600" cy="400050"/>
-          </a:xfrm>
-          <a:prstGeom prst="rect">
-            <a:avLst/>
-          </a:prstGeom>
-          <a:noFill/>
-          <a:ln/>
-        </p:spPr>
-        <p:txBody>
-          <a:bodyPr wrap="none" lIns="0" tIns="0" rIns="0" bIns="0" rtlCol="0" anchor="t"/>
-          <a:lstStyle/>
-          <a:p>
-            <a:pPr algn="l" indent="0" marL="0">
-              <a:lnSpc>
-                <a:spcPts val="2856"/>
-              </a:lnSpc>
-              <a:buNone/>
-            </a:pPr>
-            <a:r>
-              <a:rPr lang="zh-CN" altLang="en-US" sz="2550" b="1" dirty="0">
+                <a:spcPts val="3360"/>
+              </a:lnSpc>
+              <a:buNone/>
+            </a:pPr>
+            <a:r>
+              <a:rPr lang="zh-CN" altLang="en-US" sz="3000" b="1" dirty="0">
                 <a:solidFill>
                   <a:srgbClr val="1C2430"/>
                 </a:solidFill>
@@ -3274,26 +3256,49 @@
               </a:rPr>
               <a:t>三项互补证据</a:t>
             </a:r>
-            <a:endParaRPr lang="zh-CN" sz="2550" dirty="0"/>
-          </a:p>
-        </p:txBody>
-      </p:sp>
-      <p:sp>
-        <p:nvSpPr>
-          <p:cNvPr id="6" name="T27/header-rule"/>
-          <p:cNvSpPr/>
-          <p:nvPr/>
-        </p:nvSpPr>
-        <p:spPr>
-          <a:xfrm>
-            <a:off x="457200" y="876300"/>
+            <a:endParaRPr lang="zh-CN" sz="3000" dirty="0"/>
+          </a:p>
+        </p:txBody>
+      </p:sp>
+      <p:sp>
+        <p:nvSpPr>
+          <p:cNvPr id="5" name="T27/header-rule"/>
+          <p:cNvSpPr/>
+          <p:nvPr/>
+        </p:nvSpPr>
+        <p:spPr>
+          <a:xfrm>
+            <a:off x="457200" y="752475"/>
             <a:ext cx="11277600" cy="0"/>
           </a:xfrm>
           <a:prstGeom prst="line">
             <a:avLst/>
           </a:prstGeom>
           <a:noFill/>
-          <a:ln w="11430">
+          <a:ln w="10478">
+            <a:solidFill>
+              <a:srgbClr val="BEC8D4"/>
+            </a:solidFill>
+            <a:prstDash val="solid"/>
+          </a:ln>
+        </p:spPr>
+      </p:sp>
+      <p:sp>
+        <p:nvSpPr>
+          <p:cNvPr id="6" name="T27/header-accent"/>
+          <p:cNvSpPr/>
+          <p:nvPr/>
+        </p:nvSpPr>
+        <p:spPr>
+          <a:xfrm>
+            <a:off x="457200" y="752475"/>
+            <a:ext cx="704850" cy="0"/>
+          </a:xfrm>
+          <a:prstGeom prst="line">
+            <a:avLst/>
+          </a:prstGeom>
+          <a:noFill/>
+          <a:ln w="28575">
             <a:solidFill>
               <a:srgbClr val="173C70"/>
             </a:solidFill>
@@ -3309,8 +3314,8 @@
         </p:nvSpPr>
         <p:spPr>
           <a:xfrm>
-            <a:off x="457200" y="1333500"/>
-            <a:ext cx="3524250" cy="4724400"/>
+            <a:off x="457200" y="1147381"/>
+            <a:ext cx="3638550" cy="4906137"/>
           </a:xfrm>
           <a:prstGeom prst="rect">
             <a:avLst/>
@@ -3334,14 +3339,14 @@
         </p:nvSpPr>
         <p:spPr>
           <a:xfrm>
-            <a:off x="466725" y="1343025"/>
-            <a:ext cx="3505200" cy="381000"/>
+            <a:off x="466725" y="1156907"/>
+            <a:ext cx="3619500" cy="381000"/>
           </a:xfrm>
           <a:prstGeom prst="rect">
             <a:avLst/>
           </a:prstGeom>
           <a:solidFill>
-            <a:srgbClr val="EEF3F8"/>
+            <a:srgbClr val="E9F4F0"/>
           </a:solidFill>
           <a:ln w="12700">
             <a:solidFill>
@@ -3361,8 +3366,8 @@
         </p:nvSpPr>
         <p:spPr>
           <a:xfrm>
-            <a:off x="457200" y="1724025"/>
-            <a:ext cx="3524250" cy="0"/>
+            <a:off x="457200" y="1537906"/>
+            <a:ext cx="3638550" cy="0"/>
           </a:xfrm>
           <a:prstGeom prst="line">
             <a:avLst/>
@@ -3384,8 +3389,8 @@
         </p:nvSpPr>
         <p:spPr>
           <a:xfrm>
-            <a:off x="581025" y="1390650"/>
-            <a:ext cx="3276600" cy="295275"/>
+            <a:off x="581025" y="1195007"/>
+            <a:ext cx="3390900" cy="304800"/>
           </a:xfrm>
           <a:prstGeom prst="rect">
             <a:avLst/>
@@ -3399,14 +3404,14 @@
           <a:p>
             <a:pPr algn="l" indent="0" marL="0">
               <a:lnSpc>
-                <a:spcPts val="2070"/>
-              </a:lnSpc>
-              <a:buNone/>
-            </a:pPr>
-            <a:r>
-              <a:rPr lang="zh-CN" altLang="en-US" sz="1800" b="1" dirty="0">
-                <a:solidFill>
-                  <a:srgbClr val="173C70"/>
+                <a:spcPts val="2242"/>
+              </a:lnSpc>
+              <a:buNone/>
+            </a:pPr>
+            <a:r>
+              <a:rPr lang="zh-CN" altLang="en-US" sz="1950" b="1" dirty="0">
+                <a:solidFill>
+                  <a:srgbClr val="146C63"/>
                 </a:solidFill>
                 <a:latin typeface="Noto Sans CJK SC" pitchFamily="34" charset="0"/>
                 <a:ea typeface="Noto Sans CJK SC" pitchFamily="34" charset="-122"/>
@@ -3414,7 +3419,7 @@
               </a:rPr>
               <a:t>A  对应证据</a:t>
             </a:r>
-            <a:endParaRPr lang="zh-CN" sz="1800" dirty="0"/>
+            <a:endParaRPr lang="zh-CN" sz="1950" dirty="0"/>
           </a:p>
         </p:txBody>
       </p:sp>
@@ -3426,8 +3431,8 @@
         </p:nvSpPr>
         <p:spPr>
           <a:xfrm>
-            <a:off x="4267200" y="1333500"/>
-            <a:ext cx="3524250" cy="4724400"/>
+            <a:off x="4276725" y="1147381"/>
+            <a:ext cx="3638550" cy="4906137"/>
           </a:xfrm>
           <a:prstGeom prst="rect">
             <a:avLst/>
@@ -3451,14 +3456,14 @@
         </p:nvSpPr>
         <p:spPr>
           <a:xfrm>
-            <a:off x="4276725" y="1343025"/>
-            <a:ext cx="3505200" cy="381000"/>
+            <a:off x="4286250" y="1156907"/>
+            <a:ext cx="3619500" cy="381000"/>
           </a:xfrm>
           <a:prstGeom prst="rect">
             <a:avLst/>
           </a:prstGeom>
           <a:solidFill>
-            <a:srgbClr val="EEF3F8"/>
+            <a:srgbClr val="E9F4F0"/>
           </a:solidFill>
           <a:ln w="12700">
             <a:solidFill>
@@ -3478,8 +3483,8 @@
         </p:nvSpPr>
         <p:spPr>
           <a:xfrm>
-            <a:off x="4267200" y="1724025"/>
-            <a:ext cx="3524250" cy="0"/>
+            <a:off x="4276725" y="1537906"/>
+            <a:ext cx="3638550" cy="0"/>
           </a:xfrm>
           <a:prstGeom prst="line">
             <a:avLst/>
@@ -3501,8 +3506,8 @@
         </p:nvSpPr>
         <p:spPr>
           <a:xfrm>
-            <a:off x="4391025" y="1390650"/>
-            <a:ext cx="3276600" cy="295275"/>
+            <a:off x="4400550" y="1195007"/>
+            <a:ext cx="3390900" cy="304800"/>
           </a:xfrm>
           <a:prstGeom prst="rect">
             <a:avLst/>
@@ -3516,14 +3521,14 @@
           <a:p>
             <a:pPr algn="l" indent="0" marL="0">
               <a:lnSpc>
-                <a:spcPts val="2070"/>
-              </a:lnSpc>
-              <a:buNone/>
-            </a:pPr>
-            <a:r>
-              <a:rPr lang="zh-CN" altLang="en-US" sz="1800" b="1" dirty="0">
-                <a:solidFill>
-                  <a:srgbClr val="173C70"/>
+                <a:spcPts val="2242"/>
+              </a:lnSpc>
+              <a:buNone/>
+            </a:pPr>
+            <a:r>
+              <a:rPr lang="zh-CN" altLang="en-US" sz="1950" b="1" dirty="0">
+                <a:solidFill>
+                  <a:srgbClr val="146C63"/>
                 </a:solidFill>
                 <a:latin typeface="Noto Sans CJK SC" pitchFamily="34" charset="0"/>
                 <a:ea typeface="Noto Sans CJK SC" pitchFamily="34" charset="-122"/>
@@ -3531,7 +3536,7 @@
               </a:rPr>
               <a:t>B  对应证据</a:t>
             </a:r>
-            <a:endParaRPr lang="zh-CN" sz="1800" dirty="0"/>
+            <a:endParaRPr lang="zh-CN" sz="1950" dirty="0"/>
           </a:p>
         </p:txBody>
       </p:sp>
@@ -3543,8 +3548,8 @@
         </p:nvSpPr>
         <p:spPr>
           <a:xfrm>
-            <a:off x="8077200" y="1333500"/>
-            <a:ext cx="3657600" cy="4724400"/>
+            <a:off x="8096250" y="1147381"/>
+            <a:ext cx="3638550" cy="4906137"/>
           </a:xfrm>
           <a:prstGeom prst="rect">
             <a:avLst/>
@@ -3568,14 +3573,14 @@
         </p:nvSpPr>
         <p:spPr>
           <a:xfrm>
-            <a:off x="8086725" y="1343025"/>
-            <a:ext cx="3638550" cy="381000"/>
+            <a:off x="8105775" y="1156907"/>
+            <a:ext cx="3619500" cy="381000"/>
           </a:xfrm>
           <a:prstGeom prst="rect">
             <a:avLst/>
           </a:prstGeom>
           <a:solidFill>
-            <a:srgbClr val="EEF3F8"/>
+            <a:srgbClr val="E9F4F0"/>
           </a:solidFill>
           <a:ln w="12700">
             <a:solidFill>
@@ -3595,8 +3600,8 @@
         </p:nvSpPr>
         <p:spPr>
           <a:xfrm>
-            <a:off x="8077200" y="1724025"/>
-            <a:ext cx="3657600" cy="0"/>
+            <a:off x="8096250" y="1537906"/>
+            <a:ext cx="3638550" cy="0"/>
           </a:xfrm>
           <a:prstGeom prst="line">
             <a:avLst/>
@@ -3618,8 +3623,8 @@
         </p:nvSpPr>
         <p:spPr>
           <a:xfrm>
-            <a:off x="8201025" y="1390650"/>
-            <a:ext cx="3409950" cy="295275"/>
+            <a:off x="8220075" y="1195007"/>
+            <a:ext cx="3390900" cy="304800"/>
           </a:xfrm>
           <a:prstGeom prst="rect">
             <a:avLst/>
@@ -3633,14 +3638,14 @@
           <a:p>
             <a:pPr algn="l" indent="0" marL="0">
               <a:lnSpc>
-                <a:spcPts val="2070"/>
-              </a:lnSpc>
-              <a:buNone/>
-            </a:pPr>
-            <a:r>
-              <a:rPr lang="zh-CN" altLang="en-US" sz="1800" b="1" dirty="0">
-                <a:solidFill>
-                  <a:srgbClr val="173C70"/>
+                <a:spcPts val="2242"/>
+              </a:lnSpc>
+              <a:buNone/>
+            </a:pPr>
+            <a:r>
+              <a:rPr lang="zh-CN" altLang="en-US" sz="1950" b="1" dirty="0">
+                <a:solidFill>
+                  <a:srgbClr val="146C63"/>
                 </a:solidFill>
                 <a:latin typeface="Noto Sans CJK SC" pitchFamily="34" charset="0"/>
                 <a:ea typeface="Noto Sans CJK SC" pitchFamily="34" charset="-122"/>
@@ -3648,7 +3653,7 @@
               </a:rPr>
               <a:t>C  对应证据</a:t>
             </a:r>
-            <a:endParaRPr lang="zh-CN" sz="1800" dirty="0"/>
+            <a:endParaRPr lang="zh-CN" sz="1950" dirty="0"/>
           </a:p>
         </p:txBody>
       </p:sp>
@@ -3660,8 +3665,8 @@
         </p:nvSpPr>
         <p:spPr>
           <a:xfrm>
-            <a:off x="590550" y="1828800"/>
-            <a:ext cx="3257550" cy="2552700"/>
+            <a:off x="609600" y="1738247"/>
+            <a:ext cx="3333750" cy="2471487"/>
           </a:xfrm>
           <a:prstGeom prst="rect">
             <a:avLst/>
@@ -3669,19 +3674,24 @@
           <a:solidFill>
             <a:srgbClr val="FFFFFF"/>
           </a:solidFill>
-          <a:ln w="12700">
-            <a:solidFill>
-              <a:srgbClr val="FFFFFF">
-                <a:alpha val="0"/>
+          <a:ln w="7620">
+            <a:solidFill>
+              <a:srgbClr val="CCD4DD"/>
+            </a:solidFill>
+            <a:prstDash val="solid"/>
+          </a:ln>
+          <a:effectLst>
+            <a:outerShdw sx="100000" sy="100000" kx="0" ky="0" algn="bl" rotWithShape="0" blurRad="28575" dist="19050" dir="5400000">
+              <a:srgbClr val="263B50">
+                <a:alpha val="12000"/>
               </a:srgbClr>
-            </a:solidFill>
-            <a:prstDash val="solid"/>
-          </a:ln>
+            </a:outerShdw>
+          </a:effectLst>
         </p:spPr>
       </p:sp>
       <p:pic>
         <p:nvPicPr>
-          <p:cNvPr id="20" name="T27/figure:0:image" descr="T1 · 示例图 · 响应曲线；合成演示值">    </p:cNvPr>
+          <p:cNvPr id="20" name="T27/figure:0:image" descr="A/B 为条件；合成数据">    </p:cNvPr>
           <p:cNvPicPr>
             <a:picLocks noChangeAspect="1"/>
           </p:cNvPicPr>
@@ -3695,8 +3705,8 @@
         </p:blipFill>
         <p:spPr>
           <a:xfrm>
-            <a:off x="590550" y="1956435"/>
-            <a:ext cx="3257550" cy="1954530"/>
+            <a:off x="638175" y="1766822"/>
+            <a:ext cx="3276600" cy="2414337"/>
           </a:xfrm>
           <a:prstGeom prst="rect">
             <a:avLst/>
@@ -3711,8 +3721,8 @@
         </p:nvSpPr>
         <p:spPr>
           <a:xfrm>
-            <a:off x="590550" y="4124325"/>
-            <a:ext cx="3257550" cy="257175"/>
+            <a:off x="590550" y="4371975"/>
+            <a:ext cx="3371850" cy="257175"/>
           </a:xfrm>
           <a:prstGeom prst="rect">
             <a:avLst/>
@@ -3739,7 +3749,7 @@
                 <a:ea typeface="Noto Sans CJK SC" pitchFamily="34" charset="-122"/>
                 <a:cs typeface="Noto Sans CJK SC" pitchFamily="34" charset="-120"/>
               </a:rPr>
-              <a:t>T1 · 示例图 · 响应曲线；合成演示值</a:t>
+              <a:t>A/B 为条件；合成数据</a:t>
             </a:r>
             <a:endParaRPr lang="zh-CN" sz="1350" dirty="0"/>
           </a:p>
@@ -3753,8 +3763,8 @@
         </p:nvSpPr>
         <p:spPr>
           <a:xfrm>
-            <a:off x="4400550" y="1828800"/>
-            <a:ext cx="3257550" cy="2552700"/>
+            <a:off x="4429125" y="1738247"/>
+            <a:ext cx="3333750" cy="2471487"/>
           </a:xfrm>
           <a:prstGeom prst="rect">
             <a:avLst/>
@@ -3762,19 +3772,24 @@
           <a:solidFill>
             <a:srgbClr val="FFFFFF"/>
           </a:solidFill>
-          <a:ln w="12700">
-            <a:solidFill>
-              <a:srgbClr val="FFFFFF">
-                <a:alpha val="0"/>
+          <a:ln w="7620">
+            <a:solidFill>
+              <a:srgbClr val="CCD4DD"/>
+            </a:solidFill>
+            <a:prstDash val="solid"/>
+          </a:ln>
+          <a:effectLst>
+            <a:outerShdw sx="100000" sy="100000" kx="0" ky="0" algn="bl" rotWithShape="0" blurRad="28575" dist="19050" dir="5400000">
+              <a:srgbClr val="263B50">
+                <a:alpha val="12000"/>
               </a:srgbClr>
-            </a:solidFill>
-            <a:prstDash val="solid"/>
-          </a:ln>
+            </a:outerShdw>
+          </a:effectLst>
         </p:spPr>
       </p:sp>
       <p:pic>
         <p:nvPicPr>
-          <p:cNvPr id="23" name="T27/figure:1:image" descr="T1 · 示例图 · 效应与区间；合成演示值">    </p:cNvPr>
+          <p:cNvPr id="23" name="T27/figure:1:image" descr="Ref. 为参考，V1–V3 为变体；合成数据">    </p:cNvPr>
           <p:cNvPicPr>
             <a:picLocks noChangeAspect="1"/>
           </p:cNvPicPr>
@@ -3788,8 +3803,8 @@
         </p:blipFill>
         <p:spPr>
           <a:xfrm>
-            <a:off x="4400550" y="1956435"/>
-            <a:ext cx="3257550" cy="1954530"/>
+            <a:off x="4457700" y="1766822"/>
+            <a:ext cx="3276600" cy="2414337"/>
           </a:xfrm>
           <a:prstGeom prst="rect">
             <a:avLst/>
@@ -3804,8 +3819,8 @@
         </p:nvSpPr>
         <p:spPr>
           <a:xfrm>
-            <a:off x="4400550" y="4124325"/>
-            <a:ext cx="3257550" cy="257175"/>
+            <a:off x="4410075" y="4371975"/>
+            <a:ext cx="3371850" cy="257175"/>
           </a:xfrm>
           <a:prstGeom prst="rect">
             <a:avLst/>
@@ -3832,7 +3847,7 @@
                 <a:ea typeface="Noto Sans CJK SC" pitchFamily="34" charset="-122"/>
                 <a:cs typeface="Noto Sans CJK SC" pitchFamily="34" charset="-120"/>
               </a:rPr>
-              <a:t>T1 · 示例图 · 效应与区间；合成演示值</a:t>
+              <a:t>Ref. 为参考，V1–V3 为变体；合成数据</a:t>
             </a:r>
             <a:endParaRPr lang="zh-CN" sz="1350" dirty="0"/>
           </a:p>
@@ -3846,8 +3861,8 @@
         </p:nvSpPr>
         <p:spPr>
           <a:xfrm>
-            <a:off x="8210550" y="1828800"/>
-            <a:ext cx="3390900" cy="2552700"/>
+            <a:off x="8248650" y="1738247"/>
+            <a:ext cx="3333750" cy="2471487"/>
           </a:xfrm>
           <a:prstGeom prst="rect">
             <a:avLst/>
@@ -3855,19 +3870,24 @@
           <a:solidFill>
             <a:srgbClr val="FFFFFF"/>
           </a:solidFill>
-          <a:ln w="12700">
-            <a:solidFill>
-              <a:srgbClr val="FFFFFF">
-                <a:alpha val="0"/>
+          <a:ln w="7620">
+            <a:solidFill>
+              <a:srgbClr val="CCD4DD"/>
+            </a:solidFill>
+            <a:prstDash val="solid"/>
+          </a:ln>
+          <a:effectLst>
+            <a:outerShdw sx="100000" sy="100000" kx="0" ky="0" algn="bl" rotWithShape="0" blurRad="28575" dist="19050" dir="5400000">
+              <a:srgbClr val="263B50">
+                <a:alpha val="12000"/>
               </a:srgbClr>
-            </a:solidFill>
-            <a:prstDash val="solid"/>
-          </a:ln>
+            </a:outerShdw>
+          </a:effectLst>
         </p:spPr>
       </p:sp>
       <p:pic>
         <p:nvPicPr>
-          <p:cNvPr id="26" name="T27/figure:2:image" descr="T1 · 示例图 · 跨环境矩阵；合成演示值">    </p:cNvPr>
+          <p:cNvPr id="26" name="T27/figure:2:image" descr="跨环境矩阵；合成数据">    </p:cNvPr>
           <p:cNvPicPr>
             <a:picLocks noChangeAspect="1"/>
           </p:cNvPicPr>
@@ -3881,8 +3901,8 @@
         </p:blipFill>
         <p:spPr>
           <a:xfrm>
-            <a:off x="8210550" y="1916430"/>
-            <a:ext cx="3390900" cy="2034540"/>
+            <a:off x="8277225" y="1766822"/>
+            <a:ext cx="3276600" cy="2414337"/>
           </a:xfrm>
           <a:prstGeom prst="rect">
             <a:avLst/>
@@ -3897,8 +3917,8 @@
         </p:nvSpPr>
         <p:spPr>
           <a:xfrm>
-            <a:off x="8210550" y="4124325"/>
-            <a:ext cx="3390900" cy="257175"/>
+            <a:off x="8229600" y="4371975"/>
+            <a:ext cx="3371850" cy="257175"/>
           </a:xfrm>
           <a:prstGeom prst="rect">
             <a:avLst/>
@@ -3925,7 +3945,7 @@
                 <a:ea typeface="Noto Sans CJK SC" pitchFamily="34" charset="-122"/>
                 <a:cs typeface="Noto Sans CJK SC" pitchFamily="34" charset="-120"/>
               </a:rPr>
-              <a:t>T1 · 示例图 · 跨环境矩阵；合成演示值</a:t>
+              <a:t>跨环境矩阵；合成数据</a:t>
             </a:r>
             <a:endParaRPr lang="zh-CN" sz="1350" dirty="0"/>
           </a:p>
@@ -3939,8 +3959,8 @@
         </p:nvSpPr>
         <p:spPr>
           <a:xfrm>
-            <a:off x="590550" y="4648200"/>
-            <a:ext cx="3257550" cy="323850"/>
+            <a:off x="590550" y="4766882"/>
+            <a:ext cx="3371850" cy="323850"/>
           </a:xfrm>
           <a:prstGeom prst="rect">
             <a:avLst/>
@@ -3954,14 +3974,14 @@
           <a:p>
             <a:pPr algn="l" indent="0" marL="0">
               <a:lnSpc>
-                <a:spcPts val="2156"/>
-              </a:lnSpc>
-              <a:buNone/>
-            </a:pPr>
-            <a:r>
-              <a:rPr lang="zh-CN" altLang="en-US" sz="1875" b="1" dirty="0">
-                <a:solidFill>
-                  <a:srgbClr val="173C70"/>
+                <a:spcPts val="2242"/>
+              </a:lnSpc>
+              <a:buNone/>
+            </a:pPr>
+            <a:r>
+              <a:rPr lang="zh-CN" altLang="en-US" sz="1950" b="1" dirty="0">
+                <a:solidFill>
+                  <a:srgbClr val="146C63"/>
                 </a:solidFill>
                 <a:latin typeface="Noto Sans CJK SC" pitchFamily="34" charset="0"/>
                 <a:ea typeface="Noto Sans CJK SC" pitchFamily="34" charset="-122"/>
@@ -3969,7 +3989,7 @@
               </a:rPr>
               <a:t>证据 A</a:t>
             </a:r>
-            <a:endParaRPr lang="zh-CN" sz="1875" dirty="0"/>
+            <a:endParaRPr lang="zh-CN" sz="1950" dirty="0"/>
           </a:p>
         </p:txBody>
       </p:sp>
@@ -3981,8 +4001,8 @@
         </p:nvSpPr>
         <p:spPr>
           <a:xfrm>
-            <a:off x="590550" y="5029200"/>
-            <a:ext cx="3257550" cy="857250"/>
+            <a:off x="590550" y="5147882"/>
+            <a:ext cx="3371850" cy="788384"/>
           </a:xfrm>
           <a:prstGeom prst="rect">
             <a:avLst/>
@@ -3996,12 +4016,12 @@
           <a:p>
             <a:pPr algn="l" indent="0" marL="0">
               <a:lnSpc>
-                <a:spcPts val="2139"/>
-              </a:lnSpc>
-              <a:buNone/>
-            </a:pPr>
-            <a:r>
-              <a:rPr lang="zh-CN" altLang="en-US" sz="1725" dirty="0">
+                <a:spcPts val="2232"/>
+              </a:lnSpc>
+              <a:buNone/>
+            </a:pPr>
+            <a:r>
+              <a:rPr lang="zh-CN" altLang="en-US" sz="1800" dirty="0">
                 <a:solidFill>
                   <a:srgbClr val="1C2430"/>
                 </a:solidFill>
@@ -4011,17 +4031,17 @@
               </a:rPr>
               <a:t>变量、样本和关键趋势</a:t>
             </a:r>
-            <a:endParaRPr lang="zh-CN" sz="1725" dirty="0"/>
-          </a:p>
-          <a:p>
-            <a:pPr algn="l" indent="0" marL="0">
-              <a:lnSpc>
-                <a:spcPts val="2139"/>
-              </a:lnSpc>
-              <a:buNone/>
-            </a:pPr>
-            <a:r>
-              <a:rPr lang="zh-CN" altLang="en-US" sz="1725" dirty="0">
+            <a:endParaRPr lang="zh-CN" sz="1800" dirty="0"/>
+          </a:p>
+          <a:p>
+            <a:pPr algn="l" indent="0" marL="0">
+              <a:lnSpc>
+                <a:spcPts val="2232"/>
+              </a:lnSpc>
+              <a:buNone/>
+            </a:pPr>
+            <a:r>
+              <a:rPr lang="zh-CN" altLang="en-US" sz="1800" dirty="0">
                 <a:solidFill>
                   <a:srgbClr val="1C2430"/>
                 </a:solidFill>
@@ -4031,7 +4051,7 @@
               </a:rPr>
               <a:t>对应来源面板及读图规则</a:t>
             </a:r>
-            <a:endParaRPr lang="zh-CN" sz="1725" dirty="0"/>
+            <a:endParaRPr lang="zh-CN" sz="1800" dirty="0"/>
           </a:p>
         </p:txBody>
       </p:sp>
@@ -4043,8 +4063,8 @@
         </p:nvSpPr>
         <p:spPr>
           <a:xfrm>
-            <a:off x="4400550" y="4648200"/>
-            <a:ext cx="3257550" cy="323850"/>
+            <a:off x="4410075" y="4766882"/>
+            <a:ext cx="3371850" cy="323850"/>
           </a:xfrm>
           <a:prstGeom prst="rect">
             <a:avLst/>
@@ -4058,14 +4078,14 @@
           <a:p>
             <a:pPr algn="l" indent="0" marL="0">
               <a:lnSpc>
-                <a:spcPts val="2156"/>
-              </a:lnSpc>
-              <a:buNone/>
-            </a:pPr>
-            <a:r>
-              <a:rPr lang="zh-CN" altLang="en-US" sz="1875" b="1" dirty="0">
-                <a:solidFill>
-                  <a:srgbClr val="173C70"/>
+                <a:spcPts val="2242"/>
+              </a:lnSpc>
+              <a:buNone/>
+            </a:pPr>
+            <a:r>
+              <a:rPr lang="zh-CN" altLang="en-US" sz="1950" b="1" dirty="0">
+                <a:solidFill>
+                  <a:srgbClr val="146C63"/>
                 </a:solidFill>
                 <a:latin typeface="Noto Sans CJK SC" pitchFamily="34" charset="0"/>
                 <a:ea typeface="Noto Sans CJK SC" pitchFamily="34" charset="-122"/>
@@ -4073,7 +4093,7 @@
               </a:rPr>
               <a:t>证据 B</a:t>
             </a:r>
-            <a:endParaRPr lang="zh-CN" sz="1875" dirty="0"/>
+            <a:endParaRPr lang="zh-CN" sz="1950" dirty="0"/>
           </a:p>
         </p:txBody>
       </p:sp>
@@ -4085,8 +4105,8 @@
         </p:nvSpPr>
         <p:spPr>
           <a:xfrm>
-            <a:off x="4400550" y="5029200"/>
-            <a:ext cx="3257550" cy="857250"/>
+            <a:off x="4410075" y="5147882"/>
+            <a:ext cx="3371850" cy="788384"/>
           </a:xfrm>
           <a:prstGeom prst="rect">
             <a:avLst/>
@@ -4100,12 +4120,12 @@
           <a:p>
             <a:pPr algn="l" indent="0" marL="0">
               <a:lnSpc>
-                <a:spcPts val="2139"/>
-              </a:lnSpc>
-              <a:buNone/>
-            </a:pPr>
-            <a:r>
-              <a:rPr lang="zh-CN" altLang="en-US" sz="1725" dirty="0">
+                <a:spcPts val="2232"/>
+              </a:lnSpc>
+              <a:buNone/>
+            </a:pPr>
+            <a:r>
+              <a:rPr lang="zh-CN" altLang="en-US" sz="1800" dirty="0">
                 <a:solidFill>
                   <a:srgbClr val="1C2430"/>
                 </a:solidFill>
@@ -4115,17 +4135,17 @@
               </a:rPr>
               <a:t>使用不同观测检查同一解释</a:t>
             </a:r>
-            <a:endParaRPr lang="zh-CN" sz="1725" dirty="0"/>
-          </a:p>
-          <a:p>
-            <a:pPr algn="l" indent="0" marL="0">
-              <a:lnSpc>
-                <a:spcPts val="2139"/>
-              </a:lnSpc>
-              <a:buNone/>
-            </a:pPr>
-            <a:r>
-              <a:rPr lang="zh-CN" altLang="en-US" sz="1725" dirty="0">
+            <a:endParaRPr lang="zh-CN" sz="1800" dirty="0"/>
+          </a:p>
+          <a:p>
+            <a:pPr algn="l" indent="0" marL="0">
+              <a:lnSpc>
+                <a:spcPts val="2232"/>
+              </a:lnSpc>
+              <a:buNone/>
+            </a:pPr>
+            <a:r>
+              <a:rPr lang="zh-CN" altLang="en-US" sz="1800" dirty="0">
                 <a:solidFill>
                   <a:srgbClr val="1C2430"/>
                 </a:solidFill>
@@ -4133,9 +4153,43 @@
                 <a:ea typeface="Noto Sans CJK SC" pitchFamily="34" charset="-122"/>
                 <a:cs typeface="Noto Sans CJK SC" pitchFamily="34" charset="-120"/>
               </a:rPr>
-              <a:t>保留自身单位与统计口径</a:t>
-            </a:r>
-            <a:endParaRPr lang="zh-CN" sz="1725" dirty="0"/>
+              <a:t>保留自身</a:t>
+            </a:r>
+            <a:pPr algn="l" indent="0" marL="0">
+              <a:lnSpc>
+                <a:spcPts val="2232"/>
+              </a:lnSpc>
+              <a:buNone/>
+            </a:pPr>
+            <a:r>
+              <a:rPr lang="zh-CN" altLang="en-US" sz="1800" b="1" dirty="0">
+                <a:solidFill>
+                  <a:srgbClr val="146C63"/>
+                </a:solidFill>
+                <a:latin typeface="Noto Sans CJK SC" pitchFamily="34" charset="0"/>
+                <a:ea typeface="Noto Sans CJK SC" pitchFamily="34" charset="-122"/>
+                <a:cs typeface="Noto Sans CJK SC" pitchFamily="34" charset="-120"/>
+              </a:rPr>
+              <a:t>单位</a:t>
+            </a:r>
+            <a:pPr algn="l" indent="0" marL="0">
+              <a:lnSpc>
+                <a:spcPts val="2232"/>
+              </a:lnSpc>
+              <a:buNone/>
+            </a:pPr>
+            <a:r>
+              <a:rPr lang="zh-CN" altLang="en-US" sz="1800" dirty="0">
+                <a:solidFill>
+                  <a:srgbClr val="1C2430"/>
+                </a:solidFill>
+                <a:latin typeface="Noto Sans CJK SC" pitchFamily="34" charset="0"/>
+                <a:ea typeface="Noto Sans CJK SC" pitchFamily="34" charset="-122"/>
+                <a:cs typeface="Noto Sans CJK SC" pitchFamily="34" charset="-120"/>
+              </a:rPr>
+              <a:t>与统计口径</a:t>
+            </a:r>
+            <a:endParaRPr lang="zh-CN" sz="1800" dirty="0"/>
           </a:p>
         </p:txBody>
       </p:sp>
@@ -4147,8 +4201,8 @@
         </p:nvSpPr>
         <p:spPr>
           <a:xfrm>
-            <a:off x="8210550" y="4648200"/>
-            <a:ext cx="3390900" cy="323850"/>
+            <a:off x="8229600" y="4766882"/>
+            <a:ext cx="3371850" cy="323850"/>
           </a:xfrm>
           <a:prstGeom prst="rect">
             <a:avLst/>
@@ -4162,14 +4216,14 @@
           <a:p>
             <a:pPr algn="l" indent="0" marL="0">
               <a:lnSpc>
-                <a:spcPts val="2156"/>
-              </a:lnSpc>
-              <a:buNone/>
-            </a:pPr>
-            <a:r>
-              <a:rPr lang="zh-CN" altLang="en-US" sz="1875" b="1" dirty="0">
-                <a:solidFill>
-                  <a:srgbClr val="173C70"/>
+                <a:spcPts val="2242"/>
+              </a:lnSpc>
+              <a:buNone/>
+            </a:pPr>
+            <a:r>
+              <a:rPr lang="zh-CN" altLang="en-US" sz="1950" b="1" dirty="0">
+                <a:solidFill>
+                  <a:srgbClr val="146C63"/>
                 </a:solidFill>
                 <a:latin typeface="Noto Sans CJK SC" pitchFamily="34" charset="0"/>
                 <a:ea typeface="Noto Sans CJK SC" pitchFamily="34" charset="-122"/>
@@ -4177,7 +4231,7 @@
               </a:rPr>
               <a:t>证据 C</a:t>
             </a:r>
-            <a:endParaRPr lang="zh-CN" sz="1875" dirty="0"/>
+            <a:endParaRPr lang="zh-CN" sz="1950" dirty="0"/>
           </a:p>
         </p:txBody>
       </p:sp>
@@ -4189,8 +4243,8 @@
         </p:nvSpPr>
         <p:spPr>
           <a:xfrm>
-            <a:off x="8210550" y="5029200"/>
-            <a:ext cx="3390900" cy="857250"/>
+            <a:off x="8229600" y="5147882"/>
+            <a:ext cx="3371850" cy="788384"/>
           </a:xfrm>
           <a:prstGeom prst="rect">
             <a:avLst/>
@@ -4204,12 +4258,12 @@
           <a:p>
             <a:pPr algn="l" indent="0" marL="0">
               <a:lnSpc>
-                <a:spcPts val="2139"/>
-              </a:lnSpc>
-              <a:buNone/>
-            </a:pPr>
-            <a:r>
-              <a:rPr lang="zh-CN" altLang="en-US" sz="1725" dirty="0">
+                <a:spcPts val="2232"/>
+              </a:lnSpc>
+              <a:buNone/>
+            </a:pPr>
+            <a:r>
+              <a:rPr lang="zh-CN" altLang="en-US" sz="1800" dirty="0">
                 <a:solidFill>
                   <a:srgbClr val="1C2430"/>
                 </a:solidFill>
@@ -4219,17 +4273,17 @@
               </a:rPr>
               <a:t>补充机制或边界证据</a:t>
             </a:r>
-            <a:endParaRPr lang="zh-CN" sz="1725" dirty="0"/>
-          </a:p>
-          <a:p>
-            <a:pPr algn="l" indent="0" marL="0">
-              <a:lnSpc>
-                <a:spcPts val="2139"/>
-              </a:lnSpc>
-              <a:buNone/>
-            </a:pPr>
-            <a:r>
-              <a:rPr lang="zh-CN" altLang="en-US" sz="1725" dirty="0">
+            <a:endParaRPr lang="zh-CN" sz="1800" dirty="0"/>
+          </a:p>
+          <a:p>
+            <a:pPr algn="l" indent="0" marL="0">
+              <a:lnSpc>
+                <a:spcPts val="2232"/>
+              </a:lnSpc>
+              <a:buNone/>
+            </a:pPr>
+            <a:r>
+              <a:rPr lang="zh-CN" altLang="en-US" sz="1800" dirty="0">
                 <a:solidFill>
                   <a:srgbClr val="1C2430"/>
                 </a:solidFill>
@@ -4239,7 +4293,7 @@
               </a:rPr>
               <a:t>不要把相关性作为因果结论</a:t>
             </a:r>
-            <a:endParaRPr lang="zh-CN" sz="1725" dirty="0"/>
+            <a:endParaRPr lang="zh-CN" sz="1800" dirty="0"/>
           </a:p>
         </p:txBody>
       </p:sp>
@@ -4279,7 +4333,7 @@
                 <a:ea typeface="Noto Sans CJK SC" pitchFamily="34" charset="-122"/>
                 <a:cs typeface="Noto Sans CJK SC" pitchFamily="34" charset="-120"/>
               </a:rPr>
-              <a:t>T1 · 2026 · 待替换</a:t>
+              <a:t>T1 · 2026 · 书目占位；图表均为合成示例</a:t>
             </a:r>
             <a:endParaRPr lang="zh-CN" sz="1125" dirty="0"/>
           </a:p>
@@ -4388,14 +4442,14 @@
       </p:sp>
       <p:sp>
         <p:nvSpPr>
-          <p:cNvPr id="4" name="T28/kicker"/>
-          <p:cNvSpPr/>
-          <p:nvPr/>
-        </p:nvSpPr>
-        <p:spPr>
-          <a:xfrm>
-            <a:off x="457200" y="152400"/>
-            <a:ext cx="11277600" cy="190500"/>
+          <p:cNvPr id="4" name="T28/title"/>
+          <p:cNvSpPr/>
+          <p:nvPr/>
+        </p:nvSpPr>
+        <p:spPr>
+          <a:xfrm>
+            <a:off x="457200" y="209550"/>
+            <a:ext cx="11277600" cy="438150"/>
           </a:xfrm>
           <a:prstGeom prst="rect">
             <a:avLst/>
@@ -4409,12 +4463,155 @@
           <a:p>
             <a:pPr algn="l" indent="0" marL="0">
               <a:lnSpc>
-                <a:spcPts val="1320"/>
-              </a:lnSpc>
-              <a:buNone/>
-            </a:pPr>
-            <a:r>
-              <a:rPr lang="zh-CN" altLang="en-US" sz="1200" dirty="0">
+                <a:spcPts val="3360"/>
+              </a:lnSpc>
+              <a:buNone/>
+            </a:pPr>
+            <a:r>
+              <a:rPr lang="zh-CN" altLang="en-US" sz="3000" b="1" dirty="0">
+                <a:solidFill>
+                  <a:srgbClr val="1C2430"/>
+                </a:solidFill>
+                <a:latin typeface="Noto Sans CJK SC" pitchFamily="34" charset="0"/>
+                <a:ea typeface="Noto Sans CJK SC" pitchFamily="34" charset="-122"/>
+                <a:cs typeface="Noto Sans CJK SC" pitchFamily="34" charset="-120"/>
+              </a:rPr>
+              <a:t>主证据与补充面板</a:t>
+            </a:r>
+            <a:endParaRPr lang="zh-CN" sz="3000" dirty="0"/>
+          </a:p>
+        </p:txBody>
+      </p:sp>
+      <p:sp>
+        <p:nvSpPr>
+          <p:cNvPr id="5" name="T28/header-rule"/>
+          <p:cNvSpPr/>
+          <p:nvPr/>
+        </p:nvSpPr>
+        <p:spPr>
+          <a:xfrm>
+            <a:off x="457200" y="752475"/>
+            <a:ext cx="11277600" cy="0"/>
+          </a:xfrm>
+          <a:prstGeom prst="line">
+            <a:avLst/>
+          </a:prstGeom>
+          <a:noFill/>
+          <a:ln w="10478">
+            <a:solidFill>
+              <a:srgbClr val="BEC8D4"/>
+            </a:solidFill>
+            <a:prstDash val="solid"/>
+          </a:ln>
+        </p:spPr>
+      </p:sp>
+      <p:sp>
+        <p:nvSpPr>
+          <p:cNvPr id="6" name="T28/header-accent"/>
+          <p:cNvSpPr/>
+          <p:nvPr/>
+        </p:nvSpPr>
+        <p:spPr>
+          <a:xfrm>
+            <a:off x="457200" y="752475"/>
+            <a:ext cx="704850" cy="0"/>
+          </a:xfrm>
+          <a:prstGeom prst="line">
+            <a:avLst/>
+          </a:prstGeom>
+          <a:noFill/>
+          <a:ln w="28575">
+            <a:solidFill>
+              <a:srgbClr val="173C70"/>
+            </a:solidFill>
+            <a:prstDash val="solid"/>
+          </a:ln>
+        </p:spPr>
+      </p:sp>
+      <p:sp>
+        <p:nvSpPr>
+          <p:cNvPr id="7" name="T28/figure:0:paper"/>
+          <p:cNvSpPr/>
+          <p:nvPr/>
+        </p:nvSpPr>
+        <p:spPr>
+          <a:xfrm>
+            <a:off x="1668062" y="1166432"/>
+            <a:ext cx="4779177" cy="3516154"/>
+          </a:xfrm>
+          <a:prstGeom prst="rect">
+            <a:avLst/>
+          </a:prstGeom>
+          <a:solidFill>
+            <a:srgbClr val="FFFFFF"/>
+          </a:solidFill>
+          <a:ln w="7620">
+            <a:solidFill>
+              <a:srgbClr val="CCD4DD"/>
+            </a:solidFill>
+            <a:prstDash val="solid"/>
+          </a:ln>
+          <a:effectLst>
+            <a:outerShdw sx="100000" sy="100000" kx="0" ky="0" algn="bl" rotWithShape="0" blurRad="28575" dist="19050" dir="5400000">
+              <a:srgbClr val="263B50">
+                <a:alpha val="12000"/>
+              </a:srgbClr>
+            </a:outerShdw>
+          </a:effectLst>
+        </p:spPr>
+      </p:sp>
+      <p:pic>
+        <p:nvPicPr>
+          <p:cNvPr id="8" name="T28/figure:0:image" descr="面板 A；A/B 为条件；合成数据">    </p:cNvPr>
+          <p:cNvPicPr>
+            <a:picLocks noChangeAspect="1"/>
+          </p:cNvPicPr>
+          <p:nvPr/>
+        </p:nvPicPr>
+        <p:blipFill>
+          <a:blip r:embed="rId1"/>
+          <a:srcRect l="1500" r="49000" t="2500" b="48500"/>
+          <a:stretch/>
+        </p:blipFill>
+        <p:spPr>
+          <a:xfrm>
+            <a:off x="1696637" y="1195007"/>
+            <a:ext cx="4722027" cy="3459004"/>
+          </a:xfrm>
+          <a:prstGeom prst="rect">
+            <a:avLst/>
+          </a:prstGeom>
+        </p:spPr>
+      </p:pic>
+      <p:sp>
+        <p:nvSpPr>
+          <p:cNvPr id="9" name="T28/figure:0:caption"/>
+          <p:cNvSpPr/>
+          <p:nvPr/>
+        </p:nvSpPr>
+        <p:spPr>
+          <a:xfrm>
+            <a:off x="457200" y="4787360"/>
+            <a:ext cx="7200900" cy="257175"/>
+          </a:xfrm>
+          <a:prstGeom prst="rect">
+            <a:avLst/>
+          </a:prstGeom>
+          <a:noFill/>
+          <a:ln/>
+        </p:spPr>
+        <p:txBody>
+          <a:bodyPr wrap="none" lIns="0" tIns="0" rIns="0" bIns="0" rtlCol="0" anchor="t"/>
+          <a:lstStyle/>
+          <a:p>
+            <a:pPr algn="l" indent="0" marL="0">
+              <a:lnSpc>
+                <a:spcPts val="1674"/>
+              </a:lnSpc>
+              <a:buNone/>
+            </a:pPr>
+            <a:r>
+              <a:rPr lang="zh-CN" altLang="en-US" sz="1350" dirty="0">
                 <a:solidFill>
                   <a:srgbClr val="515B68"/>
                 </a:solidFill>
@@ -4422,22 +4619,78 @@
                 <a:ea typeface="Noto Sans CJK SC" pitchFamily="34" charset="-122"/>
                 <a:cs typeface="Noto Sans CJK SC" pitchFamily="34" charset="-120"/>
               </a:rPr>
-              <a:t>结构模板 / 占位说明与合成数据</a:t>
-            </a:r>
-            <a:endParaRPr lang="zh-CN" sz="1200" dirty="0"/>
-          </a:p>
-        </p:txBody>
-      </p:sp>
-      <p:sp>
-        <p:nvSpPr>
-          <p:cNvPr id="5" name="T28/title"/>
-          <p:cNvSpPr/>
-          <p:nvPr/>
-        </p:nvSpPr>
-        <p:spPr>
-          <a:xfrm>
-            <a:off x="457200" y="381000"/>
-            <a:ext cx="11277600" cy="400050"/>
+              <a:t>面板 A；A/B 为条件；合成数据</a:t>
+            </a:r>
+            <a:endParaRPr lang="zh-CN" sz="1350" dirty="0"/>
+          </a:p>
+        </p:txBody>
+      </p:sp>
+      <p:sp>
+        <p:nvSpPr>
+          <p:cNvPr id="10" name="T28/figure:1:paper"/>
+          <p:cNvSpPr/>
+          <p:nvPr/>
+        </p:nvSpPr>
+        <p:spPr>
+          <a:xfrm>
+            <a:off x="8113511" y="1166432"/>
+            <a:ext cx="3489729" cy="2586419"/>
+          </a:xfrm>
+          <a:prstGeom prst="rect">
+            <a:avLst/>
+          </a:prstGeom>
+          <a:solidFill>
+            <a:srgbClr val="FFFFFF"/>
+          </a:solidFill>
+          <a:ln w="7620">
+            <a:solidFill>
+              <a:srgbClr val="CCD4DD"/>
+            </a:solidFill>
+            <a:prstDash val="solid"/>
+          </a:ln>
+          <a:effectLst>
+            <a:outerShdw sx="100000" sy="100000" kx="0" ky="0" algn="bl" rotWithShape="0" blurRad="28575" dist="19050" dir="5400000">
+              <a:srgbClr val="263B50">
+                <a:alpha val="12000"/>
+              </a:srgbClr>
+            </a:outerShdw>
+          </a:effectLst>
+        </p:spPr>
+      </p:sp>
+      <p:pic>
+        <p:nvPicPr>
+          <p:cNvPr id="11" name="T28/figure:1:image" descr="Ref. 为参考，V1–V3 为变体；合成数据">    </p:cNvPr>
+          <p:cNvPicPr>
+            <a:picLocks noChangeAspect="1"/>
+          </p:cNvPicPr>
+          <p:nvPr/>
+        </p:nvPicPr>
+        <p:blipFill>
+          <a:blip r:embed="rId2"/>
+          <a:stretch>
+            <a:fillRect/>
+          </a:stretch>
+        </p:blipFill>
+        <p:spPr>
+          <a:xfrm>
+            <a:off x="8142086" y="1195007"/>
+            <a:ext cx="3432579" cy="2529269"/>
+          </a:xfrm>
+          <a:prstGeom prst="rect">
+            <a:avLst/>
+          </a:prstGeom>
+        </p:spPr>
+      </p:pic>
+      <p:sp>
+        <p:nvSpPr>
+          <p:cNvPr id="12" name="T28/figure:1:caption"/>
+          <p:cNvSpPr/>
+          <p:nvPr/>
+        </p:nvSpPr>
+        <p:spPr>
+          <a:xfrm>
+            <a:off x="7981950" y="3857625"/>
+            <a:ext cx="3752850" cy="257175"/>
           </a:xfrm>
           <a:prstGeom prst="rect">
             <a:avLst/>
@@ -4451,12 +4704,96 @@
           <a:p>
             <a:pPr algn="l" indent="0" marL="0">
               <a:lnSpc>
-                <a:spcPts val="2856"/>
-              </a:lnSpc>
-              <a:buNone/>
-            </a:pPr>
-            <a:r>
-              <a:rPr lang="zh-CN" altLang="en-US" sz="2550" b="1" dirty="0">
+                <a:spcPts val="1674"/>
+              </a:lnSpc>
+              <a:buNone/>
+            </a:pPr>
+            <a:r>
+              <a:rPr lang="zh-CN" altLang="en-US" sz="1350" dirty="0">
+                <a:solidFill>
+                  <a:srgbClr val="515B68"/>
+                </a:solidFill>
+                <a:latin typeface="Noto Sans CJK SC" pitchFamily="34" charset="0"/>
+                <a:ea typeface="Noto Sans CJK SC" pitchFamily="34" charset="-122"/>
+                <a:cs typeface="Noto Sans CJK SC" pitchFamily="34" charset="-120"/>
+              </a:rPr>
+              <a:t>Ref. 为参考，V1–V3 为变体；合成数据</a:t>
+            </a:r>
+            <a:endParaRPr lang="zh-CN" sz="1350" dirty="0"/>
+          </a:p>
+        </p:txBody>
+      </p:sp>
+      <p:sp>
+        <p:nvSpPr>
+          <p:cNvPr id="13" name="T28/card/region-1/title"/>
+          <p:cNvSpPr/>
+          <p:nvPr/>
+        </p:nvSpPr>
+        <p:spPr>
+          <a:xfrm>
+            <a:off x="457200" y="5202079"/>
+            <a:ext cx="7200900" cy="323850"/>
+          </a:xfrm>
+          <a:prstGeom prst="rect">
+            <a:avLst/>
+          </a:prstGeom>
+          <a:noFill/>
+          <a:ln/>
+        </p:spPr>
+        <p:txBody>
+          <a:bodyPr wrap="none" lIns="0" tIns="0" rIns="0" bIns="0" rtlCol="0" anchor="t"/>
+          <a:lstStyle/>
+          <a:p>
+            <a:pPr algn="l" indent="0" marL="0">
+              <a:lnSpc>
+                <a:spcPts val="2242"/>
+              </a:lnSpc>
+              <a:buNone/>
+            </a:pPr>
+            <a:r>
+              <a:rPr lang="zh-CN" altLang="en-US" sz="1950" b="1" dirty="0">
+                <a:solidFill>
+                  <a:srgbClr val="146C63"/>
+                </a:solidFill>
+                <a:latin typeface="Noto Sans CJK SC" pitchFamily="34" charset="0"/>
+                <a:ea typeface="Noto Sans CJK SC" pitchFamily="34" charset="-122"/>
+                <a:cs typeface="Noto Sans CJK SC" pitchFamily="34" charset="-120"/>
+              </a:rPr>
+              <a:t>主面板结论</a:t>
+            </a:r>
+            <a:endParaRPr lang="zh-CN" sz="1950" dirty="0"/>
+          </a:p>
+        </p:txBody>
+      </p:sp>
+      <p:sp>
+        <p:nvSpPr>
+          <p:cNvPr id="14" name="T28/card/region-1/body"/>
+          <p:cNvSpPr/>
+          <p:nvPr/>
+        </p:nvSpPr>
+        <p:spPr>
+          <a:xfrm>
+            <a:off x="457200" y="5583079"/>
+            <a:ext cx="7200900" cy="511397"/>
+          </a:xfrm>
+          <a:prstGeom prst="rect">
+            <a:avLst/>
+          </a:prstGeom>
+          <a:noFill/>
+          <a:ln/>
+        </p:spPr>
+        <p:txBody>
+          <a:bodyPr wrap="none" lIns="0" tIns="0" rIns="0" bIns="0" rtlCol="0" anchor="t"/>
+          <a:lstStyle/>
+          <a:p>
+            <a:pPr algn="l" indent="0" marL="0">
+              <a:lnSpc>
+                <a:spcPts val="2232"/>
+              </a:lnSpc>
+              <a:buNone/>
+            </a:pPr>
+            <a:r>
+              <a:rPr lang="zh-CN" altLang="en-US" sz="1800" dirty="0">
                 <a:solidFill>
                   <a:srgbClr val="1C2430"/>
                 </a:solidFill>
@@ -4464,30 +4801,32 @@
                 <a:ea typeface="Noto Sans CJK SC" pitchFamily="34" charset="-122"/>
                 <a:cs typeface="Noto Sans CJK SC" pitchFamily="34" charset="-120"/>
               </a:rPr>
-              <a:t>全图定位与局部放大</a:t>
-            </a:r>
-            <a:endParaRPr lang="zh-CN" sz="2550" dirty="0"/>
-          </a:p>
-        </p:txBody>
-      </p:sp>
-      <p:sp>
-        <p:nvSpPr>
-          <p:cNvPr id="6" name="T28/header-rule"/>
-          <p:cNvSpPr/>
-          <p:nvPr/>
-        </p:nvSpPr>
-        <p:spPr>
-          <a:xfrm>
-            <a:off x="457200" y="876300"/>
-            <a:ext cx="11277600" cy="0"/>
-          </a:xfrm>
-          <a:prstGeom prst="line">
-            <a:avLst/>
-          </a:prstGeom>
-          <a:noFill/>
-          <a:ln w="11430">
-            <a:solidFill>
-              <a:srgbClr val="173C70"/>
+              <a:t>两个条件的差异随时间展开</a:t>
+            </a:r>
+            <a:endParaRPr lang="zh-CN" sz="1800" dirty="0"/>
+          </a:p>
+        </p:txBody>
+      </p:sp>
+      <p:sp>
+        <p:nvSpPr>
+          <p:cNvPr id="15" name="T28/card/region-2/frame"/>
+          <p:cNvSpPr/>
+          <p:nvPr/>
+        </p:nvSpPr>
+        <p:spPr>
+          <a:xfrm>
+            <a:off x="7981950" y="4494371"/>
+            <a:ext cx="3752850" cy="1578959"/>
+          </a:xfrm>
+          <a:prstGeom prst="rect">
+            <a:avLst/>
+          </a:prstGeom>
+          <a:solidFill>
+            <a:srgbClr val="FFFFFF"/>
+          </a:solidFill>
+          <a:ln w="14288">
+            <a:solidFill>
+              <a:srgbClr val="146C63"/>
             </a:solidFill>
             <a:prstDash val="solid"/>
           </a:ln>
@@ -4495,14 +4834,14 @@
       </p:sp>
       <p:sp>
         <p:nvSpPr>
-          <p:cNvPr id="7" name="T28/figure:0:paper"/>
-          <p:cNvSpPr/>
-          <p:nvPr/>
-        </p:nvSpPr>
-        <p:spPr>
-          <a:xfrm>
-            <a:off x="457200" y="1371600"/>
-            <a:ext cx="4267200" cy="3638550"/>
+          <p:cNvPr id="16" name="T28/card/region-2/title-cutout"/>
+          <p:cNvSpPr/>
+          <p:nvPr/>
+        </p:nvSpPr>
+        <p:spPr>
+          <a:xfrm>
+            <a:off x="8115300" y="4341971"/>
+            <a:ext cx="1743075" cy="323850"/>
           </a:xfrm>
           <a:prstGeom prst="rect">
             <a:avLst/>
@@ -4520,40 +4859,39 @@
           </a:ln>
         </p:spPr>
       </p:sp>
-      <p:pic>
-        <p:nvPicPr>
-          <p:cNvPr id="8" name="T28/figure:0:image" descr="T1 · 示例图 · 多面板科学图；合成演示值">    </p:cNvPr>
-          <p:cNvPicPr>
-            <a:picLocks noChangeAspect="1"/>
-          </p:cNvPicPr>
-          <p:nvPr/>
-        </p:nvPicPr>
-        <p:blipFill>
-          <a:blip r:embed="rId1"/>
-          <a:stretch>
-            <a:fillRect/>
-          </a:stretch>
-        </p:blipFill>
-        <p:spPr>
-          <a:xfrm>
-            <a:off x="457200" y="1739265"/>
-            <a:ext cx="4267200" cy="2560320"/>
-          </a:xfrm>
-          <a:prstGeom prst="rect">
-            <a:avLst/>
-          </a:prstGeom>
-        </p:spPr>
-      </p:pic>
-      <p:sp>
-        <p:nvSpPr>
-          <p:cNvPr id="9" name="T28/figure:0:caption"/>
-          <p:cNvSpPr/>
-          <p:nvPr/>
-        </p:nvSpPr>
-        <p:spPr>
-          <a:xfrm>
-            <a:off x="457200" y="4752975"/>
-            <a:ext cx="4267200" cy="257175"/>
+      <p:sp>
+        <p:nvSpPr>
+          <p:cNvPr id="17" name="T28/card/region-2/base-rule"/>
+          <p:cNvSpPr/>
+          <p:nvPr/>
+        </p:nvSpPr>
+        <p:spPr>
+          <a:xfrm>
+            <a:off x="8172450" y="5920931"/>
+            <a:ext cx="333375" cy="0"/>
+          </a:xfrm>
+          <a:prstGeom prst="line">
+            <a:avLst/>
+          </a:prstGeom>
+          <a:noFill/>
+          <a:ln w="28575">
+            <a:solidFill>
+              <a:srgbClr val="146C63"/>
+            </a:solidFill>
+            <a:prstDash val="solid"/>
+          </a:ln>
+        </p:spPr>
+      </p:sp>
+      <p:sp>
+        <p:nvSpPr>
+          <p:cNvPr id="18" name="T28/card/region-2/title"/>
+          <p:cNvSpPr/>
+          <p:nvPr/>
+        </p:nvSpPr>
+        <p:spPr>
+          <a:xfrm>
+            <a:off x="8172450" y="4351496"/>
+            <a:ext cx="3371850" cy="361950"/>
           </a:xfrm>
           <a:prstGeom prst="rect">
             <a:avLst/>
@@ -4567,85 +4905,35 @@
           <a:p>
             <a:pPr algn="l" indent="0" marL="0">
               <a:lnSpc>
-                <a:spcPts val="1674"/>
-              </a:lnSpc>
-              <a:buNone/>
-            </a:pPr>
-            <a:r>
-              <a:rPr lang="zh-CN" altLang="en-US" sz="1350" dirty="0">
-                <a:solidFill>
-                  <a:srgbClr val="515B68"/>
-                </a:solidFill>
-                <a:latin typeface="Noto Sans CJK SC" pitchFamily="34" charset="0"/>
-                <a:ea typeface="Noto Sans CJK SC" pitchFamily="34" charset="-122"/>
-                <a:cs typeface="Noto Sans CJK SC" pitchFamily="34" charset="-120"/>
-              </a:rPr>
-              <a:t>T1 · 示例图 · 多面板科学图；合成演示值</a:t>
-            </a:r>
-            <a:endParaRPr lang="zh-CN" sz="1350" dirty="0"/>
-          </a:p>
-        </p:txBody>
-      </p:sp>
-      <p:sp>
-        <p:nvSpPr>
-          <p:cNvPr id="10" name="T28/figure:1:paper"/>
-          <p:cNvSpPr/>
-          <p:nvPr/>
-        </p:nvSpPr>
-        <p:spPr>
-          <a:xfrm>
-            <a:off x="5029200" y="1371600"/>
-            <a:ext cx="6705600" cy="3638550"/>
-          </a:xfrm>
-          <a:prstGeom prst="rect">
-            <a:avLst/>
-          </a:prstGeom>
-          <a:solidFill>
-            <a:srgbClr val="FFFFFF"/>
-          </a:solidFill>
-          <a:ln w="12700">
-            <a:solidFill>
-              <a:srgbClr val="FFFFFF">
-                <a:alpha val="0"/>
-              </a:srgbClr>
-            </a:solidFill>
-            <a:prstDash val="solid"/>
-          </a:ln>
-        </p:spPr>
-      </p:sp>
-      <p:pic>
-        <p:nvPicPr>
-          <p:cNvPr id="11" name="T28/figure:1:image" descr="T1 · 示例图 · 合成图面板 A 的局部视窗">    </p:cNvPr>
-          <p:cNvPicPr>
-            <a:picLocks noChangeAspect="1"/>
-          </p:cNvPicPr>
-          <p:nvPr/>
-        </p:nvPicPr>
-        <p:blipFill>
-          <a:blip r:embed="rId2"/>
-          <a:srcRect l="1500" r="49000" t="2500" b="48500"/>
-          <a:stretch/>
-        </p:blipFill>
-        <p:spPr>
-          <a:xfrm>
-            <a:off x="5607601" y="1371600"/>
-            <a:ext cx="5548798" cy="3295650"/>
-          </a:xfrm>
-          <a:prstGeom prst="rect">
-            <a:avLst/>
-          </a:prstGeom>
-        </p:spPr>
-      </p:pic>
-      <p:sp>
-        <p:nvSpPr>
-          <p:cNvPr id="12" name="T28/figure:1:caption"/>
-          <p:cNvSpPr/>
-          <p:nvPr/>
-        </p:nvSpPr>
-        <p:spPr>
-          <a:xfrm>
-            <a:off x="5029200" y="4752975"/>
-            <a:ext cx="6705600" cy="257175"/>
+                <a:spcPts val="2242"/>
+              </a:lnSpc>
+              <a:buNone/>
+            </a:pPr>
+            <a:r>
+              <a:rPr lang="zh-CN" altLang="en-US" sz="1950" b="1" dirty="0">
+                <a:solidFill>
+                  <a:srgbClr val="146C63"/>
+                </a:solidFill>
+                <a:latin typeface="Noto Sans CJK SC" pitchFamily="34" charset="0"/>
+                <a:ea typeface="Noto Sans CJK SC" pitchFamily="34" charset="-122"/>
+                <a:cs typeface="Noto Sans CJK SC" pitchFamily="34" charset="-120"/>
+              </a:rPr>
+              <a:t>补充证据与限定</a:t>
+            </a:r>
+            <a:endParaRPr lang="zh-CN" sz="1950" dirty="0"/>
+          </a:p>
+        </p:txBody>
+      </p:sp>
+      <p:sp>
+        <p:nvSpPr>
+          <p:cNvPr id="19" name="T28/card/region-2/body"/>
+          <p:cNvSpPr/>
+          <p:nvPr/>
+        </p:nvSpPr>
+        <p:spPr>
+          <a:xfrm>
+            <a:off x="8172450" y="4884896"/>
+            <a:ext cx="3371850" cy="997934"/>
           </a:xfrm>
           <a:prstGeom prst="rect">
             <a:avLst/>
@@ -4659,96 +4947,12 @@
           <a:p>
             <a:pPr algn="l" indent="0" marL="0">
               <a:lnSpc>
-                <a:spcPts val="1674"/>
-              </a:lnSpc>
-              <a:buNone/>
-            </a:pPr>
-            <a:r>
-              <a:rPr lang="zh-CN" altLang="en-US" sz="1350" dirty="0">
-                <a:solidFill>
-                  <a:srgbClr val="515B68"/>
-                </a:solidFill>
-                <a:latin typeface="Noto Sans CJK SC" pitchFamily="34" charset="0"/>
-                <a:ea typeface="Noto Sans CJK SC" pitchFamily="34" charset="-122"/>
-                <a:cs typeface="Noto Sans CJK SC" pitchFamily="34" charset="-120"/>
-              </a:rPr>
-              <a:t>T1 · 示例图 · 合成图面板 A 的局部视窗</a:t>
-            </a:r>
-            <a:endParaRPr lang="zh-CN" sz="1350" dirty="0"/>
-          </a:p>
-        </p:txBody>
-      </p:sp>
-      <p:sp>
-        <p:nvSpPr>
-          <p:cNvPr id="13" name="T28/card/region-1/title"/>
-          <p:cNvSpPr/>
-          <p:nvPr/>
-        </p:nvSpPr>
-        <p:spPr>
-          <a:xfrm>
-            <a:off x="457200" y="5257800"/>
-            <a:ext cx="4267200" cy="323850"/>
-          </a:xfrm>
-          <a:prstGeom prst="rect">
-            <a:avLst/>
-          </a:prstGeom>
-          <a:noFill/>
-          <a:ln/>
-        </p:spPr>
-        <p:txBody>
-          <a:bodyPr wrap="none" lIns="0" tIns="0" rIns="0" bIns="0" rtlCol="0" anchor="t"/>
-          <a:lstStyle/>
-          <a:p>
-            <a:pPr algn="l" indent="0" marL="0">
-              <a:lnSpc>
-                <a:spcPts val="2156"/>
-              </a:lnSpc>
-              <a:buNone/>
-            </a:pPr>
-            <a:r>
-              <a:rPr lang="zh-CN" altLang="en-US" sz="1875" b="1" dirty="0">
-                <a:solidFill>
-                  <a:srgbClr val="173C70"/>
-                </a:solidFill>
-                <a:latin typeface="Noto Sans CJK SC" pitchFamily="34" charset="0"/>
-                <a:ea typeface="Noto Sans CJK SC" pitchFamily="34" charset="-122"/>
-                <a:cs typeface="Noto Sans CJK SC" pitchFamily="34" charset="-120"/>
-              </a:rPr>
-              <a:t>全图定位</a:t>
-            </a:r>
-            <a:endParaRPr lang="zh-CN" sz="1875" dirty="0"/>
-          </a:p>
-        </p:txBody>
-      </p:sp>
-      <p:sp>
-        <p:nvSpPr>
-          <p:cNvPr id="14" name="T28/card/region-1/body"/>
-          <p:cNvSpPr/>
-          <p:nvPr/>
-        </p:nvSpPr>
-        <p:spPr>
-          <a:xfrm>
-            <a:off x="457200" y="5638800"/>
-            <a:ext cx="4267200" cy="419100"/>
-          </a:xfrm>
-          <a:prstGeom prst="rect">
-            <a:avLst/>
-          </a:prstGeom>
-          <a:noFill/>
-          <a:ln/>
-        </p:spPr>
-        <p:txBody>
-          <a:bodyPr wrap="none" lIns="0" tIns="0" rIns="0" bIns="0" rtlCol="0" anchor="t"/>
-          <a:lstStyle/>
-          <a:p>
-            <a:pPr algn="l" indent="0" marL="0">
-              <a:lnSpc>
-                <a:spcPts val="2139"/>
-              </a:lnSpc>
-              <a:buNone/>
-            </a:pPr>
-            <a:r>
-              <a:rPr lang="zh-CN" altLang="en-US" sz="1725" dirty="0">
+                <a:spcPts val="2232"/>
+              </a:lnSpc>
+              <a:buNone/>
+            </a:pPr>
+            <a:r>
+              <a:rPr lang="zh-CN" altLang="en-US" sz="1800" dirty="0">
                 <a:solidFill>
                   <a:srgbClr val="1C2430"/>
                 </a:solidFill>
@@ -4756,83 +4960,19 @@
                 <a:ea typeface="Noto Sans CJK SC" pitchFamily="34" charset="-122"/>
                 <a:cs typeface="Noto Sans CJK SC" pitchFamily="34" charset="-120"/>
               </a:rPr>
-              <a:t>保留图号和细节区域的位置</a:t>
-            </a:r>
-            <a:endParaRPr lang="zh-CN" sz="1725" dirty="0"/>
-          </a:p>
-        </p:txBody>
-      </p:sp>
-      <p:sp>
-        <p:nvSpPr>
-          <p:cNvPr id="15" name="T28/card/region-2/title"/>
-          <p:cNvSpPr/>
-          <p:nvPr/>
-        </p:nvSpPr>
-        <p:spPr>
-          <a:xfrm>
-            <a:off x="5029200" y="5257800"/>
-            <a:ext cx="6705600" cy="323850"/>
-          </a:xfrm>
-          <a:prstGeom prst="rect">
-            <a:avLst/>
-          </a:prstGeom>
-          <a:noFill/>
-          <a:ln/>
-        </p:spPr>
-        <p:txBody>
-          <a:bodyPr wrap="none" lIns="0" tIns="0" rIns="0" bIns="0" rtlCol="0" anchor="t"/>
-          <a:lstStyle/>
-          <a:p>
-            <a:pPr algn="l" indent="0" marL="0">
-              <a:lnSpc>
-                <a:spcPts val="2156"/>
-              </a:lnSpc>
-              <a:buNone/>
-            </a:pPr>
-            <a:r>
-              <a:rPr lang="zh-CN" altLang="en-US" sz="1875" b="1" dirty="0">
-                <a:solidFill>
-                  <a:srgbClr val="173C70"/>
-                </a:solidFill>
-                <a:latin typeface="Noto Sans CJK SC" pitchFamily="34" charset="0"/>
-                <a:ea typeface="Noto Sans CJK SC" pitchFamily="34" charset="-122"/>
-                <a:cs typeface="Noto Sans CJK SC" pitchFamily="34" charset="-120"/>
-              </a:rPr>
-              <a:t>局部读数与上下文</a:t>
-            </a:r>
-            <a:endParaRPr lang="zh-CN" sz="1875" dirty="0"/>
-          </a:p>
-        </p:txBody>
-      </p:sp>
-      <p:sp>
-        <p:nvSpPr>
-          <p:cNvPr id="16" name="T28/card/region-2/body"/>
-          <p:cNvSpPr/>
-          <p:nvPr/>
-        </p:nvSpPr>
-        <p:spPr>
-          <a:xfrm>
-            <a:off x="5029200" y="5638800"/>
-            <a:ext cx="6705600" cy="419100"/>
-          </a:xfrm>
-          <a:prstGeom prst="rect">
-            <a:avLst/>
-          </a:prstGeom>
-          <a:noFill/>
-          <a:ln/>
-        </p:spPr>
-        <p:txBody>
-          <a:bodyPr wrap="none" lIns="0" tIns="0" rIns="0" bIns="0" rtlCol="0" anchor="t"/>
-          <a:lstStyle/>
-          <a:p>
-            <a:pPr algn="l" indent="0" marL="0">
-              <a:lnSpc>
-                <a:spcPts val="2139"/>
-              </a:lnSpc>
-              <a:buNone/>
-            </a:pPr>
-            <a:r>
-              <a:rPr lang="zh-CN" altLang="en-US" sz="1725" dirty="0">
+              <a:t>效应区间补充趋势图</a:t>
+            </a:r>
+            <a:endParaRPr lang="zh-CN" sz="1800" dirty="0"/>
+          </a:p>
+          <a:p>
+            <a:pPr algn="l" indent="0" marL="0">
+              <a:lnSpc>
+                <a:spcPts val="2232"/>
+              </a:lnSpc>
+              <a:buNone/>
+            </a:pPr>
+            <a:r>
+              <a:rPr lang="zh-CN" altLang="en-US" sz="1800" dirty="0">
                 <a:solidFill>
                   <a:srgbClr val="1C2430"/>
                 </a:solidFill>
@@ -4840,15 +4980,52 @@
                 <a:ea typeface="Noto Sans CJK SC" pitchFamily="34" charset="-122"/>
                 <a:cs typeface="Noto Sans CJK SC" pitchFamily="34" charset="-120"/>
               </a:rPr>
-              <a:t>放大指定面板，保留坐标、单位和邻近图例</a:t>
-            </a:r>
-            <a:endParaRPr lang="zh-CN" sz="1725" dirty="0"/>
-          </a:p>
-        </p:txBody>
-      </p:sp>
-      <p:sp>
-        <p:nvSpPr>
-          <p:cNvPr id="17" name="T28/sources"/>
+              <a:t>两图都保留坐标与</a:t>
+            </a:r>
+            <a:pPr algn="l" indent="0" marL="0">
+              <a:lnSpc>
+                <a:spcPts val="2232"/>
+              </a:lnSpc>
+              <a:buNone/>
+            </a:pPr>
+            <a:r>
+              <a:rPr lang="zh-CN" altLang="en-US" sz="1800" b="1" dirty="0">
+                <a:solidFill>
+                  <a:srgbClr val="146C63"/>
+                </a:solidFill>
+                <a:latin typeface="Noto Sans CJK SC" pitchFamily="34" charset="0"/>
+                <a:ea typeface="Noto Sans CJK SC" pitchFamily="34" charset="-122"/>
+                <a:cs typeface="Noto Sans CJK SC" pitchFamily="34" charset="-120"/>
+              </a:rPr>
+              <a:t>对照</a:t>
+            </a:r>
+            <a:endParaRPr lang="zh-CN" sz="1800" dirty="0"/>
+          </a:p>
+          <a:p>
+            <a:pPr algn="l" indent="0" marL="0">
+              <a:lnSpc>
+                <a:spcPts val="2232"/>
+              </a:lnSpc>
+              <a:buNone/>
+            </a:pPr>
+            <a:r>
+              <a:rPr lang="zh-CN" altLang="en-US" sz="1800" dirty="0">
+                <a:solidFill>
+                  <a:srgbClr val="1C2430"/>
+                </a:solidFill>
+                <a:latin typeface="Noto Sans CJK SC" pitchFamily="34" charset="0"/>
+                <a:ea typeface="Noto Sans CJK SC" pitchFamily="34" charset="-122"/>
+                <a:cs typeface="Noto Sans CJK SC" pitchFamily="34" charset="-120"/>
+              </a:rPr>
+              <a:t>合成示例不支持研究结论</a:t>
+            </a:r>
+            <a:endParaRPr lang="zh-CN" sz="1800" dirty="0"/>
+          </a:p>
+        </p:txBody>
+      </p:sp>
+      <p:sp>
+        <p:nvSpPr>
+          <p:cNvPr id="20" name="T28/sources"/>
           <p:cNvSpPr/>
           <p:nvPr/>
         </p:nvSpPr>
@@ -4882,7 +5059,7 @@
                 <a:ea typeface="Noto Sans CJK SC" pitchFamily="34" charset="-122"/>
                 <a:cs typeface="Noto Sans CJK SC" pitchFamily="34" charset="-120"/>
               </a:rPr>
-              <a:t>T1 · 2026 · 待替换</a:t>
+              <a:t>T1 · 2026 · 书目占位；图表均为合成示例</a:t>
             </a:r>
             <a:endParaRPr lang="zh-CN" sz="1125" dirty="0"/>
           </a:p>
@@ -4991,14 +5168,14 @@
       </p:sp>
       <p:sp>
         <p:nvSpPr>
-          <p:cNvPr id="4" name="T29/kicker"/>
-          <p:cNvSpPr/>
-          <p:nvPr/>
-        </p:nvSpPr>
-        <p:spPr>
-          <a:xfrm>
-            <a:off x="457200" y="152400"/>
-            <a:ext cx="11277600" cy="190500"/>
+          <p:cNvPr id="4" name="T29/title"/>
+          <p:cNvSpPr/>
+          <p:nvPr/>
+        </p:nvSpPr>
+        <p:spPr>
+          <a:xfrm>
+            <a:off x="457200" y="209550"/>
+            <a:ext cx="11277600" cy="438150"/>
           </a:xfrm>
           <a:prstGeom prst="rect">
             <a:avLst/>
@@ -5012,54 +5189,12 @@
           <a:p>
             <a:pPr algn="l" indent="0" marL="0">
               <a:lnSpc>
-                <a:spcPts val="1320"/>
-              </a:lnSpc>
-              <a:buNone/>
-            </a:pPr>
-            <a:r>
-              <a:rPr lang="zh-CN" altLang="en-US" sz="1200" dirty="0">
-                <a:solidFill>
-                  <a:srgbClr val="515B68"/>
-                </a:solidFill>
-                <a:latin typeface="Noto Sans CJK SC" pitchFamily="34" charset="0"/>
-                <a:ea typeface="Noto Sans CJK SC" pitchFamily="34" charset="-122"/>
-                <a:cs typeface="Noto Sans CJK SC" pitchFamily="34" charset="-120"/>
-              </a:rPr>
-              <a:t>结构模板 / 占位说明与合成数据</a:t>
-            </a:r>
-            <a:endParaRPr lang="zh-CN" sz="1200" dirty="0"/>
-          </a:p>
-        </p:txBody>
-      </p:sp>
-      <p:sp>
-        <p:nvSpPr>
-          <p:cNvPr id="5" name="T29/title"/>
-          <p:cNvSpPr/>
-          <p:nvPr/>
-        </p:nvSpPr>
-        <p:spPr>
-          <a:xfrm>
-            <a:off x="457200" y="381000"/>
-            <a:ext cx="11277600" cy="400050"/>
-          </a:xfrm>
-          <a:prstGeom prst="rect">
-            <a:avLst/>
-          </a:prstGeom>
-          <a:noFill/>
-          <a:ln/>
-        </p:spPr>
-        <p:txBody>
-          <a:bodyPr wrap="none" lIns="0" tIns="0" rIns="0" bIns="0" rtlCol="0" anchor="t"/>
-          <a:lstStyle/>
-          <a:p>
-            <a:pPr algn="l" indent="0" marL="0">
-              <a:lnSpc>
-                <a:spcPts val="2856"/>
-              </a:lnSpc>
-              <a:buNone/>
-            </a:pPr>
-            <a:r>
-              <a:rPr lang="zh-CN" altLang="en-US" sz="2550" b="1" dirty="0">
+                <a:spcPts val="3360"/>
+              </a:lnSpc>
+              <a:buNone/>
+            </a:pPr>
+            <a:r>
+              <a:rPr lang="zh-CN" altLang="en-US" sz="3000" b="1" dirty="0">
                 <a:solidFill>
                   <a:srgbClr val="1C2430"/>
                 </a:solidFill>
@@ -5067,28 +5202,51 @@
                 <a:ea typeface="Noto Sans CJK SC" pitchFamily="34" charset="-122"/>
                 <a:cs typeface="Noto Sans CJK SC" pitchFamily="34" charset="-120"/>
               </a:rPr>
-              <a:t>竖向原图与分步解读</a:t>
-            </a:r>
-            <a:endParaRPr lang="zh-CN" sz="2550" dirty="0"/>
-          </a:p>
-        </p:txBody>
-      </p:sp>
-      <p:sp>
-        <p:nvSpPr>
-          <p:cNvPr id="6" name="T29/header-rule"/>
-          <p:cNvSpPr/>
-          <p:nvPr/>
-        </p:nvSpPr>
-        <p:spPr>
-          <a:xfrm>
-            <a:off x="457200" y="876300"/>
+              <a:t>竖长原图的独立面板</a:t>
+            </a:r>
+            <a:endParaRPr lang="zh-CN" sz="3000" dirty="0"/>
+          </a:p>
+        </p:txBody>
+      </p:sp>
+      <p:sp>
+        <p:nvSpPr>
+          <p:cNvPr id="5" name="T29/header-rule"/>
+          <p:cNvSpPr/>
+          <p:nvPr/>
+        </p:nvSpPr>
+        <p:spPr>
+          <a:xfrm>
+            <a:off x="457200" y="752475"/>
             <a:ext cx="11277600" cy="0"/>
           </a:xfrm>
           <a:prstGeom prst="line">
             <a:avLst/>
           </a:prstGeom>
           <a:noFill/>
-          <a:ln w="11430">
+          <a:ln w="10478">
+            <a:solidFill>
+              <a:srgbClr val="BEC8D4"/>
+            </a:solidFill>
+            <a:prstDash val="solid"/>
+          </a:ln>
+        </p:spPr>
+      </p:sp>
+      <p:sp>
+        <p:nvSpPr>
+          <p:cNvPr id="6" name="T29/header-accent"/>
+          <p:cNvSpPr/>
+          <p:nvPr/>
+        </p:nvSpPr>
+        <p:spPr>
+          <a:xfrm>
+            <a:off x="457200" y="752475"/>
+            <a:ext cx="704850" cy="0"/>
+          </a:xfrm>
+          <a:prstGeom prst="line">
+            <a:avLst/>
+          </a:prstGeom>
+          <a:noFill/>
+          <a:ln w="28575">
             <a:solidFill>
               <a:srgbClr val="173C70"/>
             </a:solidFill>
@@ -5104,8 +5262,8 @@
         </p:nvSpPr>
         <p:spPr>
           <a:xfrm>
-            <a:off x="457200" y="1409700"/>
-            <a:ext cx="4514850" cy="4667250"/>
+            <a:off x="457200" y="1222153"/>
+            <a:ext cx="7334250" cy="4851178"/>
           </a:xfrm>
           <a:prstGeom prst="rect">
             <a:avLst/>
@@ -5129,14 +5287,14 @@
         </p:nvSpPr>
         <p:spPr>
           <a:xfrm>
-            <a:off x="571500" y="1295400"/>
-            <a:ext cx="1409700" cy="323850"/>
+            <a:off x="571500" y="1107853"/>
+            <a:ext cx="2590800" cy="342900"/>
           </a:xfrm>
           <a:prstGeom prst="rect">
             <a:avLst/>
           </a:prstGeom>
           <a:solidFill>
-            <a:srgbClr val="173C70"/>
+            <a:srgbClr val="146C63"/>
           </a:solidFill>
           <a:ln w="12700">
             <a:solidFill>
@@ -5156,8 +5314,8 @@
         </p:nvSpPr>
         <p:spPr>
           <a:xfrm>
-            <a:off x="676275" y="1323975"/>
-            <a:ext cx="1200150" cy="276225"/>
+            <a:off x="676275" y="1136428"/>
+            <a:ext cx="2381250" cy="285750"/>
           </a:xfrm>
           <a:prstGeom prst="rect">
             <a:avLst/>
@@ -5171,12 +5329,12 @@
           <a:p>
             <a:pPr algn="l" indent="0" marL="0">
               <a:lnSpc>
-                <a:spcPts val="2070"/>
-              </a:lnSpc>
-              <a:buNone/>
-            </a:pPr>
-            <a:r>
-              <a:rPr lang="zh-CN" altLang="en-US" sz="1800" b="1" dirty="0">
+                <a:spcPts val="2242"/>
+              </a:lnSpc>
+              <a:buNone/>
+            </a:pPr>
+            <a:r>
+              <a:rPr lang="zh-CN" altLang="en-US" sz="1950" b="1" dirty="0">
                 <a:solidFill>
                   <a:srgbClr val="FFFFFF"/>
                 </a:solidFill>
@@ -5184,9 +5342,9 @@
                 <a:ea typeface="Noto Sans CJK SC" pitchFamily="34" charset="-122"/>
                 <a:cs typeface="Noto Sans CJK SC" pitchFamily="34" charset="-120"/>
               </a:rPr>
-              <a:t>竖向证据图</a:t>
-            </a:r>
-            <a:endParaRPr lang="zh-CN" sz="1800" dirty="0"/>
+              <a:t>面板 A：独立证据</a:t>
+            </a:r>
+            <a:endParaRPr lang="zh-CN" sz="1950" dirty="0"/>
           </a:p>
         </p:txBody>
       </p:sp>
@@ -5198,8 +5356,8 @@
         </p:nvSpPr>
         <p:spPr>
           <a:xfrm>
-            <a:off x="590550" y="1733550"/>
-            <a:ext cx="4248150" cy="4191000"/>
+            <a:off x="609600" y="1628148"/>
+            <a:ext cx="7029450" cy="3898407"/>
           </a:xfrm>
           <a:prstGeom prst="rect">
             <a:avLst/>
@@ -5207,6 +5365,126 @@
           <a:solidFill>
             <a:srgbClr val="FFFFFF"/>
           </a:solidFill>
+          <a:ln w="7620">
+            <a:solidFill>
+              <a:srgbClr val="CCD4DD"/>
+            </a:solidFill>
+            <a:prstDash val="solid"/>
+          </a:ln>
+          <a:effectLst>
+            <a:outerShdw sx="100000" sy="100000" kx="0" ky="0" algn="bl" rotWithShape="0" blurRad="28575" dist="19050" dir="5400000">
+              <a:srgbClr val="263B50">
+                <a:alpha val="12000"/>
+              </a:srgbClr>
+            </a:outerShdw>
+          </a:effectLst>
+        </p:spPr>
+      </p:sp>
+      <p:pic>
+        <p:nvPicPr>
+          <p:cNvPr id="11" name="T29/figure:0:image" descr="竖图面板 A；其余面板另页；合成数据">    </p:cNvPr>
+          <p:cNvPicPr>
+            <a:picLocks noChangeAspect="1"/>
+          </p:cNvPicPr>
+          <p:nvPr/>
+        </p:nvPicPr>
+        <p:blipFill>
+          <a:blip r:embed="rId1"/>
+          <a:srcRect l="3500" r="1500" t="800" b="67700"/>
+          <a:stretch/>
+        </p:blipFill>
+        <p:spPr>
+          <a:xfrm>
+            <a:off x="638175" y="1656723"/>
+            <a:ext cx="6972300" cy="3841257"/>
+          </a:xfrm>
+          <a:prstGeom prst="rect">
+            <a:avLst/>
+          </a:prstGeom>
+        </p:spPr>
+      </p:pic>
+      <p:sp>
+        <p:nvSpPr>
+          <p:cNvPr id="12" name="T29/figure:0:caption"/>
+          <p:cNvSpPr/>
+          <p:nvPr/>
+        </p:nvSpPr>
+        <p:spPr>
+          <a:xfrm>
+            <a:off x="590550" y="5657850"/>
+            <a:ext cx="7067550" cy="257175"/>
+          </a:xfrm>
+          <a:prstGeom prst="rect">
+            <a:avLst/>
+          </a:prstGeom>
+          <a:noFill/>
+          <a:ln/>
+        </p:spPr>
+        <p:txBody>
+          <a:bodyPr wrap="none" lIns="0" tIns="0" rIns="0" bIns="0" rtlCol="0" anchor="t"/>
+          <a:lstStyle/>
+          <a:p>
+            <a:pPr algn="l" indent="0" marL="0">
+              <a:lnSpc>
+                <a:spcPts val="1674"/>
+              </a:lnSpc>
+              <a:buNone/>
+            </a:pPr>
+            <a:r>
+              <a:rPr lang="zh-CN" altLang="en-US" sz="1350" dirty="0">
+                <a:solidFill>
+                  <a:srgbClr val="515B68"/>
+                </a:solidFill>
+                <a:latin typeface="Noto Sans CJK SC" pitchFamily="34" charset="0"/>
+                <a:ea typeface="Noto Sans CJK SC" pitchFamily="34" charset="-122"/>
+                <a:cs typeface="Noto Sans CJK SC" pitchFamily="34" charset="-120"/>
+              </a:rPr>
+              <a:t>竖图面板 A；其余面板另页；合成数据</a:t>
+            </a:r>
+            <a:endParaRPr lang="zh-CN" sz="1350" dirty="0"/>
+          </a:p>
+        </p:txBody>
+      </p:sp>
+      <p:sp>
+        <p:nvSpPr>
+          <p:cNvPr id="13" name="T29/card/region-1/base-rule"/>
+          <p:cNvSpPr/>
+          <p:nvPr/>
+        </p:nvSpPr>
+        <p:spPr>
+          <a:xfrm>
+            <a:off x="8134350" y="2571750"/>
+            <a:ext cx="3600450" cy="0"/>
+          </a:xfrm>
+          <a:prstGeom prst="line">
+            <a:avLst/>
+          </a:prstGeom>
+          <a:noFill/>
+          <a:ln w="10478">
+            <a:solidFill>
+              <a:srgbClr val="BEC8D4"/>
+            </a:solidFill>
+            <a:prstDash val="solid"/>
+          </a:ln>
+        </p:spPr>
+      </p:sp>
+      <p:sp>
+        <p:nvSpPr>
+          <p:cNvPr id="14" name="T29/card/region-1/side-mark"/>
+          <p:cNvSpPr/>
+          <p:nvPr/>
+        </p:nvSpPr>
+        <p:spPr>
+          <a:xfrm>
+            <a:off x="8134350" y="1186244"/>
+            <a:ext cx="47625" cy="295275"/>
+          </a:xfrm>
+          <a:prstGeom prst="rect">
+            <a:avLst/>
+          </a:prstGeom>
+          <a:solidFill>
+            <a:srgbClr val="536A7A"/>
+          </a:solidFill>
           <a:ln w="12700">
             <a:solidFill>
               <a:srgbClr val="FFFFFF">
@@ -5217,40 +5495,16 @@
           </a:ln>
         </p:spPr>
       </p:sp>
-      <p:pic>
-        <p:nvPicPr>
-          <p:cNvPr id="11" name="T29/figure:0:image" descr="T1 · 示例图 · 竖向面板示例；合成演示值">    </p:cNvPr>
-          <p:cNvPicPr>
-            <a:picLocks noChangeAspect="1"/>
-          </p:cNvPicPr>
-          <p:nvPr/>
-        </p:nvPicPr>
-        <p:blipFill>
-          <a:blip r:embed="rId1"/>
-          <a:stretch>
-            <a:fillRect/>
-          </a:stretch>
-        </p:blipFill>
-        <p:spPr>
-          <a:xfrm>
-            <a:off x="1556632" y="1733550"/>
-            <a:ext cx="2315986" cy="3848100"/>
-          </a:xfrm>
-          <a:prstGeom prst="rect">
-            <a:avLst/>
-          </a:prstGeom>
-        </p:spPr>
-      </p:pic>
-      <p:sp>
-        <p:nvSpPr>
-          <p:cNvPr id="12" name="T29/figure:0:caption"/>
-          <p:cNvSpPr/>
-          <p:nvPr/>
-        </p:nvSpPr>
-        <p:spPr>
-          <a:xfrm>
-            <a:off x="590550" y="5667375"/>
-            <a:ext cx="4248150" cy="257175"/>
+      <p:sp>
+        <p:nvSpPr>
+          <p:cNvPr id="15" name="T29/card/region-1/title"/>
+          <p:cNvSpPr/>
+          <p:nvPr/>
+        </p:nvSpPr>
+        <p:spPr>
+          <a:xfrm>
+            <a:off x="8286750" y="1186244"/>
+            <a:ext cx="3448050" cy="304800"/>
           </a:xfrm>
           <a:prstGeom prst="rect">
             <a:avLst/>
@@ -5264,85 +5518,35 @@
           <a:p>
             <a:pPr algn="l" indent="0" marL="0">
               <a:lnSpc>
-                <a:spcPts val="1674"/>
-              </a:lnSpc>
-              <a:buNone/>
-            </a:pPr>
-            <a:r>
-              <a:rPr lang="zh-CN" altLang="en-US" sz="1350" dirty="0">
-                <a:solidFill>
-                  <a:srgbClr val="515B68"/>
-                </a:solidFill>
-                <a:latin typeface="Noto Sans CJK SC" pitchFamily="34" charset="0"/>
-                <a:ea typeface="Noto Sans CJK SC" pitchFamily="34" charset="-122"/>
-                <a:cs typeface="Noto Sans CJK SC" pitchFamily="34" charset="-120"/>
-              </a:rPr>
-              <a:t>T1 · 示例图 · 竖向面板示例；合成演示值</a:t>
-            </a:r>
-            <a:endParaRPr lang="zh-CN" sz="1350" dirty="0"/>
-          </a:p>
-        </p:txBody>
-      </p:sp>
-      <p:sp>
-        <p:nvSpPr>
-          <p:cNvPr id="13" name="T29/card/region-1/base-rule"/>
-          <p:cNvSpPr/>
-          <p:nvPr/>
-        </p:nvSpPr>
-        <p:spPr>
-          <a:xfrm>
-            <a:off x="5314950" y="2705100"/>
-            <a:ext cx="6419850" cy="0"/>
-          </a:xfrm>
-          <a:prstGeom prst="line">
-            <a:avLst/>
-          </a:prstGeom>
-          <a:noFill/>
-          <a:ln w="10478">
-            <a:solidFill>
-              <a:srgbClr val="BEC8D4"/>
-            </a:solidFill>
-            <a:prstDash val="solid"/>
-          </a:ln>
-        </p:spPr>
-      </p:sp>
-      <p:sp>
-        <p:nvSpPr>
-          <p:cNvPr id="14" name="T29/card/region-1/side-mark"/>
-          <p:cNvSpPr/>
-          <p:nvPr/>
-        </p:nvSpPr>
-        <p:spPr>
-          <a:xfrm>
-            <a:off x="5314950" y="1352550"/>
-            <a:ext cx="47625" cy="295275"/>
-          </a:xfrm>
-          <a:prstGeom prst="rect">
-            <a:avLst/>
-          </a:prstGeom>
-          <a:solidFill>
-            <a:srgbClr val="173C70"/>
-          </a:solidFill>
-          <a:ln w="12700">
-            <a:solidFill>
-              <a:srgbClr val="FFFFFF">
-                <a:alpha val="0"/>
-              </a:srgbClr>
-            </a:solidFill>
-            <a:prstDash val="solid"/>
-          </a:ln>
-        </p:spPr>
-      </p:sp>
-      <p:sp>
-        <p:nvSpPr>
-          <p:cNvPr id="15" name="T29/card/region-1/title"/>
-          <p:cNvSpPr/>
-          <p:nvPr/>
-        </p:nvSpPr>
-        <p:spPr>
-          <a:xfrm>
-            <a:off x="5467350" y="1352550"/>
-            <a:ext cx="6267450" cy="304800"/>
+                <a:spcPts val="2242"/>
+              </a:lnSpc>
+              <a:buNone/>
+            </a:pPr>
+            <a:r>
+              <a:rPr lang="zh-CN" altLang="en-US" sz="1950" b="1" dirty="0">
+                <a:solidFill>
+                  <a:srgbClr val="536A7A"/>
+                </a:solidFill>
+                <a:latin typeface="Noto Sans CJK SC" pitchFamily="34" charset="0"/>
+                <a:ea typeface="Noto Sans CJK SC" pitchFamily="34" charset="-122"/>
+                <a:cs typeface="Noto Sans CJK SC" pitchFamily="34" charset="-120"/>
+              </a:rPr>
+              <a:t>面板范围</a:t>
+            </a:r>
+            <a:endParaRPr lang="zh-CN" sz="1950" dirty="0"/>
+          </a:p>
+        </p:txBody>
+      </p:sp>
+      <p:sp>
+        <p:nvSpPr>
+          <p:cNvPr id="16" name="T29/card/region-1/body"/>
+          <p:cNvSpPr/>
+          <p:nvPr/>
+        </p:nvSpPr>
+        <p:spPr>
+          <a:xfrm>
+            <a:off x="8286750" y="1605344"/>
+            <a:ext cx="3448050" cy="871156"/>
           </a:xfrm>
           <a:prstGeom prst="rect">
             <a:avLst/>
@@ -5356,54 +5560,32 @@
           <a:p>
             <a:pPr algn="l" indent="0" marL="0">
               <a:lnSpc>
-                <a:spcPts val="2070"/>
-              </a:lnSpc>
-              <a:buNone/>
-            </a:pPr>
-            <a:r>
-              <a:rPr lang="zh-CN" altLang="en-US" sz="1800" b="1" dirty="0">
-                <a:solidFill>
-                  <a:srgbClr val="173C70"/>
-                </a:solidFill>
-                <a:latin typeface="Noto Sans CJK SC" pitchFamily="34" charset="0"/>
-                <a:ea typeface="Noto Sans CJK SC" pitchFamily="34" charset="-122"/>
-                <a:cs typeface="Noto Sans CJK SC" pitchFamily="34" charset="-120"/>
-              </a:rPr>
-              <a:t>阅读顺序</a:t>
+                <a:spcPts val="2232"/>
+              </a:lnSpc>
+              <a:buNone/>
+            </a:pPr>
+            <a:r>
+              <a:rPr lang="zh-CN" altLang="en-US" sz="1800" dirty="0">
+                <a:solidFill>
+                  <a:srgbClr val="1C2430"/>
+                </a:solidFill>
+                <a:latin typeface="Noto Sans CJK SC" pitchFamily="34" charset="0"/>
+                <a:ea typeface="Noto Sans CJK SC" pitchFamily="34" charset="-122"/>
+                <a:cs typeface="Noto Sans CJK SC" pitchFamily="34" charset="-120"/>
+              </a:rPr>
+              <a:t>本页只展开面板 A</a:t>
             </a:r>
             <a:endParaRPr lang="zh-CN" sz="1800" dirty="0"/>
           </a:p>
-        </p:txBody>
-      </p:sp>
-      <p:sp>
-        <p:nvSpPr>
-          <p:cNvPr id="16" name="T29/card/region-1/body"/>
-          <p:cNvSpPr/>
-          <p:nvPr/>
-        </p:nvSpPr>
-        <p:spPr>
-          <a:xfrm>
-            <a:off x="5467350" y="1771650"/>
-            <a:ext cx="6267450" cy="838200"/>
-          </a:xfrm>
-          <a:prstGeom prst="rect">
-            <a:avLst/>
-          </a:prstGeom>
-          <a:noFill/>
-          <a:ln/>
-        </p:spPr>
-        <p:txBody>
-          <a:bodyPr wrap="none" lIns="0" tIns="0" rIns="0" bIns="0" rtlCol="0" anchor="t"/>
-          <a:lstStyle/>
-          <a:p>
-            <a:pPr algn="l" indent="0" marL="0">
-              <a:lnSpc>
-                <a:spcPts val="2139"/>
-              </a:lnSpc>
-              <a:buNone/>
-            </a:pPr>
-            <a:r>
-              <a:rPr lang="zh-CN" altLang="en-US" sz="1725" dirty="0">
+          <a:p>
+            <a:pPr algn="l" indent="0" marL="0">
+              <a:lnSpc>
+                <a:spcPts val="2232"/>
+              </a:lnSpc>
+              <a:buNone/>
+            </a:pPr>
+            <a:r>
+              <a:rPr lang="zh-CN" altLang="en-US" sz="1800" dirty="0">
                 <a:solidFill>
                   <a:srgbClr val="1C2430"/>
                 </a:solidFill>
@@ -5411,29 +5593,9 @@
                 <a:ea typeface="Noto Sans CJK SC" pitchFamily="34" charset="-122"/>
                 <a:cs typeface="Noto Sans CJK SC" pitchFamily="34" charset="-120"/>
               </a:rPr>
-              <a:t>按面板和变量解释竖向图</a:t>
-            </a:r>
-            <a:endParaRPr lang="zh-CN" sz="1725" dirty="0"/>
-          </a:p>
-          <a:p>
-            <a:pPr algn="l" indent="0" marL="0">
-              <a:lnSpc>
-                <a:spcPts val="2139"/>
-              </a:lnSpc>
-              <a:buNone/>
-            </a:pPr>
-            <a:r>
-              <a:rPr lang="zh-CN" altLang="en-US" sz="1725" dirty="0">
-                <a:solidFill>
-                  <a:srgbClr val="1C2430"/>
-                </a:solidFill>
-                <a:latin typeface="Noto Sans CJK SC" pitchFamily="34" charset="0"/>
-                <a:ea typeface="Noto Sans CJK SC" pitchFamily="34" charset="-122"/>
-                <a:cs typeface="Noto Sans CJK SC" pitchFamily="34" charset="-120"/>
-              </a:rPr>
-              <a:t>先识别输入、过程与输出</a:t>
-            </a:r>
-            <a:endParaRPr lang="zh-CN" sz="1725" dirty="0"/>
+              <a:t>保留条件、坐标和误差带</a:t>
+            </a:r>
+            <a:endParaRPr lang="zh-CN" sz="1800" dirty="0"/>
           </a:p>
         </p:txBody>
       </p:sp>
@@ -5445,8 +5607,8 @@
         </p:nvSpPr>
         <p:spPr>
           <a:xfrm>
-            <a:off x="5314950" y="2933700"/>
-            <a:ext cx="6419850" cy="1371600"/>
+            <a:off x="8134350" y="2828925"/>
+            <a:ext cx="3600450" cy="1404557"/>
           </a:xfrm>
           <a:prstGeom prst="rect">
             <a:avLst/>
@@ -5470,14 +5632,14 @@
         </p:nvSpPr>
         <p:spPr>
           <a:xfrm>
-            <a:off x="5324475" y="2943225"/>
-            <a:ext cx="6400800" cy="371475"/>
+            <a:off x="8143875" y="2838450"/>
+            <a:ext cx="3581400" cy="371475"/>
           </a:xfrm>
           <a:prstGeom prst="rect">
             <a:avLst/>
           </a:prstGeom>
           <a:solidFill>
-            <a:srgbClr val="EEF3F8"/>
+            <a:srgbClr val="E9F4F0"/>
           </a:solidFill>
           <a:ln w="12700">
             <a:solidFill>
@@ -5497,8 +5659,8 @@
         </p:nvSpPr>
         <p:spPr>
           <a:xfrm>
-            <a:off x="5314950" y="3314700"/>
-            <a:ext cx="6419850" cy="0"/>
+            <a:off x="8134350" y="3209925"/>
+            <a:ext cx="3600450" cy="0"/>
           </a:xfrm>
           <a:prstGeom prst="line">
             <a:avLst/>
@@ -5520,8 +5682,8 @@
         </p:nvSpPr>
         <p:spPr>
           <a:xfrm>
-            <a:off x="5438775" y="2990850"/>
-            <a:ext cx="6172200" cy="276225"/>
+            <a:off x="8258175" y="2876550"/>
+            <a:ext cx="3352800" cy="295275"/>
           </a:xfrm>
           <a:prstGeom prst="rect">
             <a:avLst/>
@@ -5535,20 +5697,99 @@
           <a:p>
             <a:pPr algn="l" indent="0" marL="0">
               <a:lnSpc>
-                <a:spcPts val="2070"/>
+                <a:spcPts val="2242"/>
+              </a:lnSpc>
+              <a:buNone/>
+            </a:pPr>
+            <a:r>
+              <a:rPr lang="zh-CN" altLang="en-US" sz="1950" b="1" dirty="0">
+                <a:solidFill>
+                  <a:srgbClr val="146C63"/>
+                </a:solidFill>
+                <a:latin typeface="Noto Sans CJK SC" pitchFamily="34" charset="0"/>
+                <a:ea typeface="Noto Sans CJK SC" pitchFamily="34" charset="-122"/>
+                <a:cs typeface="Noto Sans CJK SC" pitchFamily="34" charset="-120"/>
+              </a:rPr>
+              <a:t>关键证据</a:t>
+            </a:r>
+            <a:endParaRPr lang="zh-CN" sz="1950" dirty="0"/>
+          </a:p>
+        </p:txBody>
+      </p:sp>
+      <p:sp>
+        <p:nvSpPr>
+          <p:cNvPr id="21" name="T29/card/region-2/body"/>
+          <p:cNvSpPr/>
+          <p:nvPr/>
+        </p:nvSpPr>
+        <p:spPr>
+          <a:xfrm>
+            <a:off x="8267700" y="3314700"/>
+            <a:ext cx="3333750" cy="823532"/>
+          </a:xfrm>
+          <a:prstGeom prst="rect">
+            <a:avLst/>
+          </a:prstGeom>
+          <a:noFill/>
+          <a:ln/>
+        </p:spPr>
+        <p:txBody>
+          <a:bodyPr wrap="none" lIns="0" tIns="0" rIns="0" bIns="0" rtlCol="0" anchor="t"/>
+          <a:lstStyle/>
+          <a:p>
+            <a:pPr algn="l" indent="0" marL="0">
+              <a:lnSpc>
+                <a:spcPts val="2232"/>
+              </a:lnSpc>
+              <a:buNone/>
+            </a:pPr>
+            <a:r>
+              <a:rPr lang="zh-CN" altLang="en-US" sz="1800" dirty="0">
+                <a:solidFill>
+                  <a:srgbClr val="1C2430"/>
+                </a:solidFill>
+                <a:latin typeface="Noto Sans CJK SC" pitchFamily="34" charset="0"/>
+                <a:ea typeface="Noto Sans CJK SC" pitchFamily="34" charset="-122"/>
+                <a:cs typeface="Noto Sans CJK SC" pitchFamily="34" charset="-120"/>
+              </a:rPr>
+              <a:t>指出哪个面板支持具体论点</a:t>
+            </a:r>
+            <a:endParaRPr lang="zh-CN" sz="1800" dirty="0"/>
+          </a:p>
+          <a:p>
+            <a:pPr algn="l" indent="0" marL="0">
+              <a:lnSpc>
+                <a:spcPts val="2232"/>
+              </a:lnSpc>
+              <a:buNone/>
+            </a:pPr>
+            <a:r>
+              <a:rPr lang="zh-CN" altLang="en-US" sz="1800" dirty="0">
+                <a:solidFill>
+                  <a:srgbClr val="1C2430"/>
+                </a:solidFill>
+                <a:latin typeface="Noto Sans CJK SC" pitchFamily="34" charset="0"/>
+                <a:ea typeface="Noto Sans CJK SC" pitchFamily="34" charset="-122"/>
+                <a:cs typeface="Noto Sans CJK SC" pitchFamily="34" charset="-120"/>
+              </a:rPr>
+              <a:t>把精确读数与正文或源数据</a:t>
+            </a:r>
+            <a:pPr algn="l" indent="0" marL="0">
+              <a:lnSpc>
+                <a:spcPts val="2232"/>
               </a:lnSpc>
               <a:buNone/>
             </a:pPr>
             <a:r>
               <a:rPr lang="zh-CN" altLang="en-US" sz="1800" b="1" dirty="0">
                 <a:solidFill>
-                  <a:srgbClr val="173C70"/>
-                </a:solidFill>
-                <a:latin typeface="Noto Sans CJK SC" pitchFamily="34" charset="0"/>
-                <a:ea typeface="Noto Sans CJK SC" pitchFamily="34" charset="-122"/>
-                <a:cs typeface="Noto Sans CJK SC" pitchFamily="34" charset="-120"/>
-              </a:rPr>
-              <a:t>关键证据</a:t>
+                  <a:srgbClr val="146C63"/>
+                </a:solidFill>
+                <a:latin typeface="Noto Sans CJK SC" pitchFamily="34" charset="0"/>
+                <a:ea typeface="Noto Sans CJK SC" pitchFamily="34" charset="-122"/>
+                <a:cs typeface="Noto Sans CJK SC" pitchFamily="34" charset="-120"/>
+              </a:rPr>
+              <a:t>对照</a:t>
             </a:r>
             <a:endParaRPr lang="zh-CN" sz="1800" dirty="0"/>
           </a:p>
@@ -5556,76 +5797,14 @@
       </p:sp>
       <p:sp>
         <p:nvSpPr>
-          <p:cNvPr id="21" name="T29/card/region-2/body"/>
-          <p:cNvSpPr/>
-          <p:nvPr/>
-        </p:nvSpPr>
-        <p:spPr>
-          <a:xfrm>
-            <a:off x="5448300" y="3429000"/>
-            <a:ext cx="6153150" cy="781050"/>
-          </a:xfrm>
-          <a:prstGeom prst="rect">
-            <a:avLst/>
-          </a:prstGeom>
-          <a:noFill/>
-          <a:ln/>
-        </p:spPr>
-        <p:txBody>
-          <a:bodyPr wrap="none" lIns="0" tIns="0" rIns="0" bIns="0" rtlCol="0" anchor="t"/>
-          <a:lstStyle/>
-          <a:p>
-            <a:pPr algn="l" indent="0" marL="0">
-              <a:lnSpc>
-                <a:spcPts val="2139"/>
-              </a:lnSpc>
-              <a:buNone/>
-            </a:pPr>
-            <a:r>
-              <a:rPr lang="zh-CN" altLang="en-US" sz="1725" dirty="0">
-                <a:solidFill>
-                  <a:srgbClr val="1C2430"/>
-                </a:solidFill>
-                <a:latin typeface="Noto Sans CJK SC" pitchFamily="34" charset="0"/>
-                <a:ea typeface="Noto Sans CJK SC" pitchFamily="34" charset="-122"/>
-                <a:cs typeface="Noto Sans CJK SC" pitchFamily="34" charset="-120"/>
-              </a:rPr>
-              <a:t>指出哪个面板支持具体论点</a:t>
-            </a:r>
-            <a:endParaRPr lang="zh-CN" sz="1725" dirty="0"/>
-          </a:p>
-          <a:p>
-            <a:pPr algn="l" indent="0" marL="0">
-              <a:lnSpc>
-                <a:spcPts val="2139"/>
-              </a:lnSpc>
-              <a:buNone/>
-            </a:pPr>
-            <a:r>
-              <a:rPr lang="zh-CN" altLang="en-US" sz="1725" dirty="0">
-                <a:solidFill>
-                  <a:srgbClr val="1C2430"/>
-                </a:solidFill>
-                <a:latin typeface="Noto Sans CJK SC" pitchFamily="34" charset="0"/>
-                <a:ea typeface="Noto Sans CJK SC" pitchFamily="34" charset="-122"/>
-                <a:cs typeface="Noto Sans CJK SC" pitchFamily="34" charset="-120"/>
-              </a:rPr>
-              <a:t>把精确读数与正文或源数据对照</a:t>
-            </a:r>
-            <a:endParaRPr lang="zh-CN" sz="1725" dirty="0"/>
-          </a:p>
-        </p:txBody>
-      </p:sp>
-      <p:sp>
-        <p:nvSpPr>
           <p:cNvPr id="22" name="T29/card/region-3/frame"/>
           <p:cNvSpPr/>
           <p:nvPr/>
         </p:nvSpPr>
         <p:spPr>
           <a:xfrm>
-            <a:off x="5314950" y="4667250"/>
-            <a:ext cx="6419850" cy="1352550"/>
+            <a:off x="8134350" y="4604957"/>
+            <a:ext cx="3600450" cy="1468279"/>
           </a:xfrm>
           <a:prstGeom prst="rect">
             <a:avLst/>
@@ -5649,14 +5828,14 @@
         </p:nvSpPr>
         <p:spPr>
           <a:xfrm>
-            <a:off x="5429250" y="4552950"/>
-            <a:ext cx="1409700" cy="320040"/>
+            <a:off x="8248650" y="4490657"/>
+            <a:ext cx="1504950" cy="342900"/>
           </a:xfrm>
           <a:prstGeom prst="rect">
             <a:avLst/>
           </a:prstGeom>
           <a:solidFill>
-            <a:srgbClr val="903543"/>
+            <a:srgbClr val="A24736"/>
           </a:solidFill>
           <a:ln w="12700">
             <a:solidFill>
@@ -5676,8 +5855,8 @@
         </p:nvSpPr>
         <p:spPr>
           <a:xfrm>
-            <a:off x="5534025" y="4581525"/>
-            <a:ext cx="1200150" cy="262890"/>
+            <a:off x="8353425" y="4519232"/>
+            <a:ext cx="1295400" cy="285750"/>
           </a:xfrm>
           <a:prstGeom prst="rect">
             <a:avLst/>
@@ -5691,12 +5870,12 @@
           <a:p>
             <a:pPr algn="l" indent="0" marL="0">
               <a:lnSpc>
-                <a:spcPts val="2070"/>
-              </a:lnSpc>
-              <a:buNone/>
-            </a:pPr>
-            <a:r>
-              <a:rPr lang="zh-CN" altLang="en-US" sz="1800" b="1" dirty="0">
+                <a:spcPts val="2242"/>
+              </a:lnSpc>
+              <a:buNone/>
+            </a:pPr>
+            <a:r>
+              <a:rPr lang="zh-CN" altLang="en-US" sz="1950" b="1" dirty="0">
                 <a:solidFill>
                   <a:srgbClr val="FFFFFF"/>
                 </a:solidFill>
@@ -5706,39 +5885,59 @@
               </a:rPr>
               <a:t>局限与外推</a:t>
             </a:r>
+            <a:endParaRPr lang="zh-CN" sz="1950" dirty="0"/>
+          </a:p>
+        </p:txBody>
+      </p:sp>
+      <p:sp>
+        <p:nvSpPr>
+          <p:cNvPr id="25" name="T29/card/region-3/body"/>
+          <p:cNvSpPr/>
+          <p:nvPr/>
+        </p:nvSpPr>
+        <p:spPr>
+          <a:xfrm>
+            <a:off x="8267700" y="4976432"/>
+            <a:ext cx="3333750" cy="1001554"/>
+          </a:xfrm>
+          <a:prstGeom prst="rect">
+            <a:avLst/>
+          </a:prstGeom>
+          <a:noFill/>
+          <a:ln/>
+        </p:spPr>
+        <p:txBody>
+          <a:bodyPr wrap="none" lIns="0" tIns="0" rIns="0" bIns="0" rtlCol="0" anchor="t"/>
+          <a:lstStyle/>
+          <a:p>
+            <a:pPr algn="l" indent="0" marL="0">
+              <a:lnSpc>
+                <a:spcPts val="2232"/>
+              </a:lnSpc>
+              <a:buNone/>
+            </a:pPr>
+            <a:r>
+              <a:rPr lang="zh-CN" altLang="en-US" sz="1800" dirty="0">
+                <a:solidFill>
+                  <a:srgbClr val="1C2430"/>
+                </a:solidFill>
+                <a:latin typeface="Noto Sans CJK SC" pitchFamily="34" charset="0"/>
+                <a:ea typeface="Noto Sans CJK SC" pitchFamily="34" charset="-122"/>
+                <a:cs typeface="Noto Sans CJK SC" pitchFamily="34" charset="-120"/>
+              </a:rPr>
+              <a:t>保留图中未覆盖的条件</a:t>
+            </a:r>
             <a:endParaRPr lang="zh-CN" sz="1800" dirty="0"/>
           </a:p>
-        </p:txBody>
-      </p:sp>
-      <p:sp>
-        <p:nvSpPr>
-          <p:cNvPr id="25" name="T29/card/region-3/body"/>
-          <p:cNvSpPr/>
-          <p:nvPr/>
-        </p:nvSpPr>
-        <p:spPr>
-          <a:xfrm>
-            <a:off x="5448300" y="5015865"/>
-            <a:ext cx="6153150" cy="908685"/>
-          </a:xfrm>
-          <a:prstGeom prst="rect">
-            <a:avLst/>
-          </a:prstGeom>
-          <a:noFill/>
-          <a:ln/>
-        </p:spPr>
-        <p:txBody>
-          <a:bodyPr wrap="none" lIns="0" tIns="0" rIns="0" bIns="0" rtlCol="0" anchor="t"/>
-          <a:lstStyle/>
-          <a:p>
-            <a:pPr algn="l" indent="0" marL="0">
-              <a:lnSpc>
-                <a:spcPts val="2139"/>
-              </a:lnSpc>
-              <a:buNone/>
-            </a:pPr>
-            <a:r>
-              <a:rPr lang="zh-CN" altLang="en-US" sz="1725" dirty="0">
+          <a:p>
+            <a:pPr algn="l" indent="0" marL="0">
+              <a:lnSpc>
+                <a:spcPts val="2232"/>
+              </a:lnSpc>
+              <a:buNone/>
+            </a:pPr>
+            <a:r>
+              <a:rPr lang="zh-CN" altLang="en-US" sz="1800" dirty="0">
                 <a:solidFill>
                   <a:srgbClr val="1C2430"/>
                 </a:solidFill>
@@ -5746,29 +5945,9 @@
                 <a:ea typeface="Noto Sans CJK SC" pitchFamily="34" charset="-122"/>
                 <a:cs typeface="Noto Sans CJK SC" pitchFamily="34" charset="-120"/>
               </a:rPr>
-              <a:t>保留图中未覆盖的条件</a:t>
-            </a:r>
-            <a:endParaRPr lang="zh-CN" sz="1725" dirty="0"/>
-          </a:p>
-          <a:p>
-            <a:pPr algn="l" indent="0" marL="0">
-              <a:lnSpc>
-                <a:spcPts val="2139"/>
-              </a:lnSpc>
-              <a:buNone/>
-            </a:pPr>
-            <a:r>
-              <a:rPr lang="zh-CN" altLang="en-US" sz="1725" dirty="0">
-                <a:solidFill>
-                  <a:srgbClr val="1C2430"/>
-                </a:solidFill>
-                <a:latin typeface="Noto Sans CJK SC" pitchFamily="34" charset="0"/>
-                <a:ea typeface="Noto Sans CJK SC" pitchFamily="34" charset="-122"/>
-                <a:cs typeface="Noto Sans CJK SC" pitchFamily="34" charset="-120"/>
-              </a:rPr>
               <a:t>放大原图不改变其证据范围</a:t>
             </a:r>
-            <a:endParaRPr lang="zh-CN" sz="1725" dirty="0"/>
+            <a:endParaRPr lang="zh-CN" sz="1800" dirty="0"/>
           </a:p>
         </p:txBody>
       </p:sp>
@@ -5808,7 +5987,7 @@
                 <a:ea typeface="Noto Sans CJK SC" pitchFamily="34" charset="-122"/>
                 <a:cs typeface="Noto Sans CJK SC" pitchFamily="34" charset="-120"/>
               </a:rPr>
-              <a:t>T1 · 2026 · 待替换</a:t>
+              <a:t>T1 · 2026 · 书目占位；图表均为合成示例</a:t>
             </a:r>
             <a:endParaRPr lang="zh-CN" sz="1125" dirty="0"/>
           </a:p>
@@ -5917,14 +6096,14 @@
       </p:sp>
       <p:sp>
         <p:nvSpPr>
-          <p:cNvPr id="4" name="T30/kicker"/>
-          <p:cNvSpPr/>
-          <p:nvPr/>
-        </p:nvSpPr>
-        <p:spPr>
-          <a:xfrm>
-            <a:off x="457200" y="152400"/>
-            <a:ext cx="11277600" cy="190500"/>
+          <p:cNvPr id="4" name="T30/title"/>
+          <p:cNvSpPr/>
+          <p:nvPr/>
+        </p:nvSpPr>
+        <p:spPr>
+          <a:xfrm>
+            <a:off x="457200" y="209550"/>
+            <a:ext cx="11277600" cy="438150"/>
           </a:xfrm>
           <a:prstGeom prst="rect">
             <a:avLst/>
@@ -5938,54 +6117,12 @@
           <a:p>
             <a:pPr algn="l" indent="0" marL="0">
               <a:lnSpc>
-                <a:spcPts val="1320"/>
-              </a:lnSpc>
-              <a:buNone/>
-            </a:pPr>
-            <a:r>
-              <a:rPr lang="zh-CN" altLang="en-US" sz="1200" dirty="0">
-                <a:solidFill>
-                  <a:srgbClr val="515B68"/>
-                </a:solidFill>
-                <a:latin typeface="Noto Sans CJK SC" pitchFamily="34" charset="0"/>
-                <a:ea typeface="Noto Sans CJK SC" pitchFamily="34" charset="-122"/>
-                <a:cs typeface="Noto Sans CJK SC" pitchFamily="34" charset="-120"/>
-              </a:rPr>
-              <a:t>结构模板 / 占位说明与合成数据</a:t>
-            </a:r>
-            <a:endParaRPr lang="zh-CN" sz="1200" dirty="0"/>
-          </a:p>
-        </p:txBody>
-      </p:sp>
-      <p:sp>
-        <p:nvSpPr>
-          <p:cNvPr id="5" name="T30/title"/>
-          <p:cNvSpPr/>
-          <p:nvPr/>
-        </p:nvSpPr>
-        <p:spPr>
-          <a:xfrm>
-            <a:off x="457200" y="381000"/>
-            <a:ext cx="11277600" cy="400050"/>
-          </a:xfrm>
-          <a:prstGeom prst="rect">
-            <a:avLst/>
-          </a:prstGeom>
-          <a:noFill/>
-          <a:ln/>
-        </p:spPr>
-        <p:txBody>
-          <a:bodyPr wrap="none" lIns="0" tIns="0" rIns="0" bIns="0" rtlCol="0" anchor="t"/>
-          <a:lstStyle/>
-          <a:p>
-            <a:pPr algn="l" indent="0" marL="0">
-              <a:lnSpc>
-                <a:spcPts val="2856"/>
-              </a:lnSpc>
-              <a:buNone/>
-            </a:pPr>
-            <a:r>
-              <a:rPr lang="zh-CN" altLang="en-US" sz="2550" b="1" dirty="0">
+                <a:spcPts val="3360"/>
+              </a:lnSpc>
+              <a:buNone/>
+            </a:pPr>
+            <a:r>
+              <a:rPr lang="zh-CN" altLang="en-US" sz="3000" b="1" dirty="0">
                 <a:solidFill>
                   <a:srgbClr val="1C2430"/>
                 </a:solidFill>
@@ -5995,26 +6132,49 @@
               </a:rPr>
               <a:t>图例变量与结果判读</a:t>
             </a:r>
-            <a:endParaRPr lang="zh-CN" sz="2550" dirty="0"/>
-          </a:p>
-        </p:txBody>
-      </p:sp>
-      <p:sp>
-        <p:nvSpPr>
-          <p:cNvPr id="6" name="T30/header-rule"/>
-          <p:cNvSpPr/>
-          <p:nvPr/>
-        </p:nvSpPr>
-        <p:spPr>
-          <a:xfrm>
-            <a:off x="457200" y="876300"/>
+            <a:endParaRPr lang="zh-CN" sz="3000" dirty="0"/>
+          </a:p>
+        </p:txBody>
+      </p:sp>
+      <p:sp>
+        <p:nvSpPr>
+          <p:cNvPr id="5" name="T30/header-rule"/>
+          <p:cNvSpPr/>
+          <p:nvPr/>
+        </p:nvSpPr>
+        <p:spPr>
+          <a:xfrm>
+            <a:off x="457200" y="752475"/>
             <a:ext cx="11277600" cy="0"/>
           </a:xfrm>
           <a:prstGeom prst="line">
             <a:avLst/>
           </a:prstGeom>
           <a:noFill/>
-          <a:ln w="11430">
+          <a:ln w="10478">
+            <a:solidFill>
+              <a:srgbClr val="BEC8D4"/>
+            </a:solidFill>
+            <a:prstDash val="solid"/>
+          </a:ln>
+        </p:spPr>
+      </p:sp>
+      <p:sp>
+        <p:nvSpPr>
+          <p:cNvPr id="6" name="T30/header-accent"/>
+          <p:cNvSpPr/>
+          <p:nvPr/>
+        </p:nvSpPr>
+        <p:spPr>
+          <a:xfrm>
+            <a:off x="457200" y="752475"/>
+            <a:ext cx="704850" cy="0"/>
+          </a:xfrm>
+          <a:prstGeom prst="line">
+            <a:avLst/>
+          </a:prstGeom>
+          <a:noFill/>
+          <a:ln w="28575">
             <a:solidFill>
               <a:srgbClr val="173C70"/>
             </a:solidFill>
@@ -6030,8 +6190,8 @@
         </p:nvSpPr>
         <p:spPr>
           <a:xfrm>
-            <a:off x="4629150" y="1352550"/>
-            <a:ext cx="7105650" cy="4629150"/>
+            <a:off x="4629150" y="1167194"/>
+            <a:ext cx="7105650" cy="4807172"/>
           </a:xfrm>
           <a:prstGeom prst="rect">
             <a:avLst/>
@@ -6055,14 +6215,14 @@
         </p:nvSpPr>
         <p:spPr>
           <a:xfrm>
-            <a:off x="4638675" y="1362075"/>
+            <a:off x="4638675" y="1176719"/>
             <a:ext cx="7086600" cy="381000"/>
           </a:xfrm>
           <a:prstGeom prst="rect">
             <a:avLst/>
           </a:prstGeom>
           <a:solidFill>
-            <a:srgbClr val="EEF3F8"/>
+            <a:srgbClr val="EAF2FA"/>
           </a:solidFill>
           <a:ln w="12700">
             <a:solidFill>
@@ -6082,7 +6242,7 @@
         </p:nvSpPr>
         <p:spPr>
           <a:xfrm>
-            <a:off x="4629150" y="1743075"/>
+            <a:off x="4629150" y="1557719"/>
             <a:ext cx="7105650" cy="0"/>
           </a:xfrm>
           <a:prstGeom prst="line">
@@ -6105,8 +6265,8 @@
         </p:nvSpPr>
         <p:spPr>
           <a:xfrm>
-            <a:off x="4752975" y="1409700"/>
-            <a:ext cx="6858000" cy="295275"/>
+            <a:off x="4752975" y="1214819"/>
+            <a:ext cx="6858000" cy="304800"/>
           </a:xfrm>
           <a:prstGeom prst="rect">
             <a:avLst/>
@@ -6120,14 +6280,14 @@
           <a:p>
             <a:pPr algn="l" indent="0" marL="0">
               <a:lnSpc>
-                <a:spcPts val="2070"/>
-              </a:lnSpc>
-              <a:buNone/>
-            </a:pPr>
-            <a:r>
-              <a:rPr lang="zh-CN" altLang="en-US" sz="1800" b="1" dirty="0">
-                <a:solidFill>
-                  <a:srgbClr val="173C70"/>
+                <a:spcPts val="2242"/>
+              </a:lnSpc>
+              <a:buNone/>
+            </a:pPr>
+            <a:r>
+              <a:rPr lang="zh-CN" altLang="en-US" sz="1950" b="1" dirty="0">
+                <a:solidFill>
+                  <a:srgbClr val="235E96"/>
                 </a:solidFill>
                 <a:latin typeface="Noto Sans CJK SC" pitchFamily="34" charset="0"/>
                 <a:ea typeface="Noto Sans CJK SC" pitchFamily="34" charset="-122"/>
@@ -6135,7 +6295,7 @@
               </a:rPr>
               <a:t>图像与图例</a:t>
             </a:r>
-            <a:endParaRPr lang="zh-CN" sz="1800" dirty="0"/>
+            <a:endParaRPr lang="zh-CN" sz="1950" dirty="0"/>
           </a:p>
         </p:txBody>
       </p:sp>
@@ -6147,8 +6307,8 @@
         </p:nvSpPr>
         <p:spPr>
           <a:xfrm>
-            <a:off x="4762500" y="1847850"/>
-            <a:ext cx="6838950" cy="3981450"/>
+            <a:off x="5645087" y="1700593"/>
+            <a:ext cx="5073777" cy="3753612"/>
           </a:xfrm>
           <a:prstGeom prst="rect">
             <a:avLst/>
@@ -6156,19 +6316,24 @@
           <a:solidFill>
             <a:srgbClr val="FFFFFF"/>
           </a:solidFill>
-          <a:ln w="12700">
-            <a:solidFill>
-              <a:srgbClr val="FFFFFF">
-                <a:alpha val="0"/>
+          <a:ln w="7620">
+            <a:solidFill>
+              <a:srgbClr val="CCD4DD"/>
+            </a:solidFill>
+            <a:prstDash val="solid"/>
+          </a:ln>
+          <a:effectLst>
+            <a:outerShdw sx="100000" sy="100000" kx="0" ky="0" algn="bl" rotWithShape="0" blurRad="28575" dist="19050" dir="5400000">
+              <a:srgbClr val="263B50">
+                <a:alpha val="12000"/>
               </a:srgbClr>
-            </a:solidFill>
-            <a:prstDash val="solid"/>
-          </a:ln>
+            </a:outerShdw>
+          </a:effectLst>
         </p:spPr>
       </p:sp>
       <p:pic>
         <p:nvPicPr>
-          <p:cNvPr id="12" name="T30/figure:0:image" descr="T1 · 示例图 · 响应曲线；合成演示值">    </p:cNvPr>
+          <p:cNvPr id="12" name="T30/figure:0:image" descr="A/B 为条件；合成数据">    </p:cNvPr>
           <p:cNvPicPr>
             <a:picLocks noChangeAspect="1"/>
           </p:cNvPicPr>
@@ -6182,8 +6347,8 @@
         </p:blipFill>
         <p:spPr>
           <a:xfrm>
-            <a:off x="5149850" y="1847850"/>
-            <a:ext cx="6064250" cy="3638550"/>
+            <a:off x="5673662" y="1729168"/>
+            <a:ext cx="5016627" cy="3696462"/>
           </a:xfrm>
           <a:prstGeom prst="rect">
             <a:avLst/>
@@ -6198,7 +6363,7 @@
         </p:nvSpPr>
         <p:spPr>
           <a:xfrm>
-            <a:off x="4762500" y="5572125"/>
+            <a:off x="4762500" y="5558981"/>
             <a:ext cx="6838950" cy="257175"/>
           </a:xfrm>
           <a:prstGeom prst="rect">
@@ -6226,7 +6391,7 @@
                 <a:ea typeface="Noto Sans CJK SC" pitchFamily="34" charset="-122"/>
                 <a:cs typeface="Noto Sans CJK SC" pitchFamily="34" charset="-120"/>
               </a:rPr>
-              <a:t>T1 · 示例图 · 响应曲线；合成演示值</a:t>
+              <a:t>A/B 为条件；合成数据</a:t>
             </a:r>
             <a:endParaRPr lang="zh-CN" sz="1350" dirty="0"/>
           </a:p>
@@ -6234,19 +6399,21 @@
       </p:sp>
       <p:sp>
         <p:nvSpPr>
-          <p:cNvPr id="14" name="T30/card/region-1/base-rule"/>
-          <p:cNvSpPr/>
-          <p:nvPr/>
-        </p:nvSpPr>
-        <p:spPr>
-          <a:xfrm>
-            <a:off x="457200" y="2743200"/>
-            <a:ext cx="3829050" cy="0"/>
-          </a:xfrm>
-          <a:prstGeom prst="line">
-            <a:avLst/>
-          </a:prstGeom>
-          <a:noFill/>
+          <p:cNvPr id="14" name="T30/card/region-1/frame"/>
+          <p:cNvSpPr/>
+          <p:nvPr/>
+        </p:nvSpPr>
+        <p:spPr>
+          <a:xfrm>
+            <a:off x="457200" y="1206722"/>
+            <a:ext cx="3829050" cy="1404557"/>
+          </a:xfrm>
+          <a:prstGeom prst="rect">
+            <a:avLst/>
+          </a:prstGeom>
+          <a:solidFill>
+            <a:srgbClr val="FFFFFF"/>
+          </a:solidFill>
           <a:ln w="10478">
             <a:solidFill>
               <a:srgbClr val="BEC8D4"/>
@@ -6257,20 +6424,20 @@
       </p:sp>
       <p:sp>
         <p:nvSpPr>
-          <p:cNvPr id="15" name="T30/card/region-1/side-mark"/>
-          <p:cNvSpPr/>
-          <p:nvPr/>
-        </p:nvSpPr>
-        <p:spPr>
-          <a:xfrm>
-            <a:off x="457200" y="1409700"/>
-            <a:ext cx="47625" cy="295275"/>
+          <p:cNvPr id="15" name="T30/card/region-1/heading-fill"/>
+          <p:cNvSpPr/>
+          <p:nvPr/>
+        </p:nvSpPr>
+        <p:spPr>
+          <a:xfrm>
+            <a:off x="466725" y="1216247"/>
+            <a:ext cx="3810000" cy="371475"/>
           </a:xfrm>
           <a:prstGeom prst="rect">
             <a:avLst/>
           </a:prstGeom>
           <a:solidFill>
-            <a:srgbClr val="173C70"/>
+            <a:srgbClr val="F0F3F6"/>
           </a:solidFill>
           <a:ln w="12700">
             <a:solidFill>
@@ -6284,13 +6451,340 @@
       </p:sp>
       <p:sp>
         <p:nvSpPr>
-          <p:cNvPr id="16" name="T30/card/region-1/title"/>
-          <p:cNvSpPr/>
-          <p:nvPr/>
-        </p:nvSpPr>
-        <p:spPr>
-          <a:xfrm>
-            <a:off x="609600" y="1409700"/>
+          <p:cNvPr id="16" name="T30/card/region-1/heading-rule"/>
+          <p:cNvSpPr/>
+          <p:nvPr/>
+        </p:nvSpPr>
+        <p:spPr>
+          <a:xfrm>
+            <a:off x="457200" y="1587722"/>
+            <a:ext cx="3829050" cy="0"/>
+          </a:xfrm>
+          <a:prstGeom prst="line">
+            <a:avLst/>
+          </a:prstGeom>
+          <a:noFill/>
+          <a:ln w="9525">
+            <a:solidFill>
+              <a:srgbClr val="BEC8D4"/>
+            </a:solidFill>
+            <a:prstDash val="solid"/>
+          </a:ln>
+        </p:spPr>
+      </p:sp>
+      <p:sp>
+        <p:nvSpPr>
+          <p:cNvPr id="17" name="T30/card/region-1/title"/>
+          <p:cNvSpPr/>
+          <p:nvPr/>
+        </p:nvSpPr>
+        <p:spPr>
+          <a:xfrm>
+            <a:off x="581025" y="1254347"/>
+            <a:ext cx="3581400" cy="295275"/>
+          </a:xfrm>
+          <a:prstGeom prst="rect">
+            <a:avLst/>
+          </a:prstGeom>
+          <a:noFill/>
+          <a:ln/>
+        </p:spPr>
+        <p:txBody>
+          <a:bodyPr wrap="none" lIns="0" tIns="0" rIns="0" bIns="0" rtlCol="0" anchor="t"/>
+          <a:lstStyle/>
+          <a:p>
+            <a:pPr algn="l" indent="0" marL="0">
+              <a:lnSpc>
+                <a:spcPts val="2242"/>
+              </a:lnSpc>
+              <a:buNone/>
+            </a:pPr>
+            <a:r>
+              <a:rPr lang="zh-CN" altLang="en-US" sz="1950" b="1" dirty="0">
+                <a:solidFill>
+                  <a:srgbClr val="536A7A"/>
+                </a:solidFill>
+                <a:latin typeface="Noto Sans CJK SC" pitchFamily="34" charset="0"/>
+                <a:ea typeface="Noto Sans CJK SC" pitchFamily="34" charset="-122"/>
+                <a:cs typeface="Noto Sans CJK SC" pitchFamily="34" charset="-120"/>
+              </a:rPr>
+              <a:t>坐标与变量</a:t>
+            </a:r>
+            <a:endParaRPr lang="zh-CN" sz="1950" dirty="0"/>
+          </a:p>
+        </p:txBody>
+      </p:sp>
+      <p:sp>
+        <p:nvSpPr>
+          <p:cNvPr id="18" name="T30/card/region-1/body"/>
+          <p:cNvSpPr/>
+          <p:nvPr/>
+        </p:nvSpPr>
+        <p:spPr>
+          <a:xfrm>
+            <a:off x="590550" y="1692497"/>
+            <a:ext cx="3562350" cy="823531"/>
+          </a:xfrm>
+          <a:prstGeom prst="rect">
+            <a:avLst/>
+          </a:prstGeom>
+          <a:noFill/>
+          <a:ln/>
+        </p:spPr>
+        <p:txBody>
+          <a:bodyPr wrap="none" lIns="0" tIns="0" rIns="0" bIns="0" rtlCol="0" anchor="t"/>
+          <a:lstStyle/>
+          <a:p>
+            <a:pPr algn="l" indent="0" marL="0">
+              <a:lnSpc>
+                <a:spcPts val="2232"/>
+              </a:lnSpc>
+              <a:buNone/>
+            </a:pPr>
+            <a:r>
+              <a:rPr lang="zh-CN" altLang="en-US" sz="1800" dirty="0">
+                <a:solidFill>
+                  <a:srgbClr val="1C2430"/>
+                </a:solidFill>
+                <a:latin typeface="Noto Sans CJK SC" pitchFamily="34" charset="0"/>
+                <a:ea typeface="Noto Sans CJK SC" pitchFamily="34" charset="-122"/>
+                <a:cs typeface="Noto Sans CJK SC" pitchFamily="34" charset="-120"/>
+              </a:rPr>
+              <a:t>解释横纵轴、量纲与归一化</a:t>
+            </a:r>
+            <a:endParaRPr lang="zh-CN" sz="1800" dirty="0"/>
+          </a:p>
+          <a:p>
+            <a:pPr algn="l" indent="0" marL="0">
+              <a:lnSpc>
+                <a:spcPts val="2232"/>
+              </a:lnSpc>
+              <a:buNone/>
+            </a:pPr>
+            <a:r>
+              <a:rPr lang="zh-CN" altLang="en-US" sz="1800" dirty="0">
+                <a:solidFill>
+                  <a:srgbClr val="1C2430"/>
+                </a:solidFill>
+                <a:latin typeface="Noto Sans CJK SC" pitchFamily="34" charset="0"/>
+                <a:ea typeface="Noto Sans CJK SC" pitchFamily="34" charset="-122"/>
+                <a:cs typeface="Noto Sans CJK SC" pitchFamily="34" charset="-120"/>
+              </a:rPr>
+              <a:t>注明对数刻度或截断范围</a:t>
+            </a:r>
+            <a:endParaRPr lang="zh-CN" sz="1800" dirty="0"/>
+          </a:p>
+        </p:txBody>
+      </p:sp>
+      <p:sp>
+        <p:nvSpPr>
+          <p:cNvPr id="19" name="T30/card/region-2/heading-rule"/>
+          <p:cNvSpPr/>
+          <p:nvPr/>
+        </p:nvSpPr>
+        <p:spPr>
+          <a:xfrm>
+            <a:off x="457200" y="3250216"/>
+            <a:ext cx="3829050" cy="0"/>
+          </a:xfrm>
+          <a:prstGeom prst="line">
+            <a:avLst/>
+          </a:prstGeom>
+          <a:noFill/>
+          <a:ln w="9525">
+            <a:solidFill>
+              <a:srgbClr val="BEC8D4"/>
+            </a:solidFill>
+            <a:prstDash val="solid"/>
+          </a:ln>
+        </p:spPr>
+      </p:sp>
+      <p:sp>
+        <p:nvSpPr>
+          <p:cNvPr id="20" name="T30/card/region-2/heading-mark"/>
+          <p:cNvSpPr/>
+          <p:nvPr/>
+        </p:nvSpPr>
+        <p:spPr>
+          <a:xfrm>
+            <a:off x="457200" y="3250216"/>
+            <a:ext cx="342900" cy="0"/>
+          </a:xfrm>
+          <a:prstGeom prst="line">
+            <a:avLst/>
+          </a:prstGeom>
+          <a:noFill/>
+          <a:ln w="17145">
+            <a:solidFill>
+              <a:srgbClr val="235E96"/>
+            </a:solidFill>
+            <a:prstDash val="solid"/>
+          </a:ln>
+        </p:spPr>
+      </p:sp>
+      <p:sp>
+        <p:nvSpPr>
+          <p:cNvPr id="21" name="T30/card/region-2/title"/>
+          <p:cNvSpPr/>
+          <p:nvPr/>
+        </p:nvSpPr>
+        <p:spPr>
+          <a:xfrm>
+            <a:off x="457200" y="2907316"/>
+            <a:ext cx="3829050" cy="323850"/>
+          </a:xfrm>
+          <a:prstGeom prst="rect">
+            <a:avLst/>
+          </a:prstGeom>
+          <a:noFill/>
+          <a:ln/>
+        </p:spPr>
+        <p:txBody>
+          <a:bodyPr wrap="none" lIns="0" tIns="0" rIns="0" bIns="0" rtlCol="0" anchor="t"/>
+          <a:lstStyle/>
+          <a:p>
+            <a:pPr algn="l" indent="0" marL="0">
+              <a:lnSpc>
+                <a:spcPts val="2242"/>
+              </a:lnSpc>
+              <a:buNone/>
+            </a:pPr>
+            <a:r>
+              <a:rPr lang="zh-CN" altLang="en-US" sz="1950" b="1" dirty="0">
+                <a:solidFill>
+                  <a:srgbClr val="235E96"/>
+                </a:solidFill>
+                <a:latin typeface="Noto Sans CJK SC" pitchFamily="34" charset="0"/>
+                <a:ea typeface="Noto Sans CJK SC" pitchFamily="34" charset="-122"/>
+                <a:cs typeface="Noto Sans CJK SC" pitchFamily="34" charset="-120"/>
+              </a:rPr>
+              <a:t>颜色与处理</a:t>
+            </a:r>
+            <a:endParaRPr lang="zh-CN" sz="1950" dirty="0"/>
+          </a:p>
+        </p:txBody>
+      </p:sp>
+      <p:sp>
+        <p:nvSpPr>
+          <p:cNvPr id="22" name="T30/card/region-2/body"/>
+          <p:cNvSpPr/>
+          <p:nvPr/>
+        </p:nvSpPr>
+        <p:spPr>
+          <a:xfrm>
+            <a:off x="457200" y="3383566"/>
+            <a:ext cx="3829050" cy="890968"/>
+          </a:xfrm>
+          <a:prstGeom prst="rect">
+            <a:avLst/>
+          </a:prstGeom>
+          <a:noFill/>
+          <a:ln/>
+        </p:spPr>
+        <p:txBody>
+          <a:bodyPr wrap="none" lIns="0" tIns="0" rIns="0" bIns="0" rtlCol="0" anchor="t"/>
+          <a:lstStyle/>
+          <a:p>
+            <a:pPr algn="l" indent="0" marL="0">
+              <a:lnSpc>
+                <a:spcPts val="2232"/>
+              </a:lnSpc>
+              <a:buNone/>
+            </a:pPr>
+            <a:r>
+              <a:rPr lang="zh-CN" altLang="en-US" sz="1800" dirty="0">
+                <a:solidFill>
+                  <a:srgbClr val="1C2430"/>
+                </a:solidFill>
+                <a:latin typeface="Noto Sans CJK SC" pitchFamily="34" charset="0"/>
+                <a:ea typeface="Noto Sans CJK SC" pitchFamily="34" charset="-122"/>
+                <a:cs typeface="Noto Sans CJK SC" pitchFamily="34" charset="-120"/>
+              </a:rPr>
+              <a:t>颜色只编码条件或类别</a:t>
+            </a:r>
+            <a:endParaRPr lang="zh-CN" sz="1800" dirty="0"/>
+          </a:p>
+          <a:p>
+            <a:pPr algn="l" indent="0" marL="0">
+              <a:lnSpc>
+                <a:spcPts val="2232"/>
+              </a:lnSpc>
+              <a:buNone/>
+            </a:pPr>
+            <a:r>
+              <a:rPr lang="zh-CN" altLang="en-US" sz="1800" dirty="0">
+                <a:solidFill>
+                  <a:srgbClr val="1C2430"/>
+                </a:solidFill>
+                <a:latin typeface="Noto Sans CJK SC" pitchFamily="34" charset="0"/>
+                <a:ea typeface="Noto Sans CJK SC" pitchFamily="34" charset="-122"/>
+                <a:cs typeface="Noto Sans CJK SC" pitchFamily="34" charset="-120"/>
+              </a:rPr>
+              <a:t>线型和符号也应能区分</a:t>
+            </a:r>
+            <a:endParaRPr lang="zh-CN" sz="1800" dirty="0"/>
+          </a:p>
+        </p:txBody>
+      </p:sp>
+      <p:sp>
+        <p:nvSpPr>
+          <p:cNvPr id="23" name="T30/card/region-3/base-rule"/>
+          <p:cNvSpPr/>
+          <p:nvPr/>
+        </p:nvSpPr>
+        <p:spPr>
+          <a:xfrm>
+            <a:off x="457200" y="5994178"/>
+            <a:ext cx="3829050" cy="0"/>
+          </a:xfrm>
+          <a:prstGeom prst="line">
+            <a:avLst/>
+          </a:prstGeom>
+          <a:noFill/>
+          <a:ln w="10478">
+            <a:solidFill>
+              <a:srgbClr val="BEC8D4"/>
+            </a:solidFill>
+            <a:prstDash val="solid"/>
+          </a:ln>
+        </p:spPr>
+      </p:sp>
+      <p:sp>
+        <p:nvSpPr>
+          <p:cNvPr id="24" name="T30/card/region-3/side-mark"/>
+          <p:cNvSpPr/>
+          <p:nvPr/>
+        </p:nvSpPr>
+        <p:spPr>
+          <a:xfrm>
+            <a:off x="457200" y="4588859"/>
+            <a:ext cx="47625" cy="295275"/>
+          </a:xfrm>
+          <a:prstGeom prst="rect">
+            <a:avLst/>
+          </a:prstGeom>
+          <a:solidFill>
+            <a:srgbClr val="235E96"/>
+          </a:solidFill>
+          <a:ln w="12700">
+            <a:solidFill>
+              <a:srgbClr val="FFFFFF">
+                <a:alpha val="0"/>
+              </a:srgbClr>
+            </a:solidFill>
+            <a:prstDash val="solid"/>
+          </a:ln>
+        </p:spPr>
+      </p:sp>
+      <p:sp>
+        <p:nvSpPr>
+          <p:cNvPr id="25" name="T30/card/region-3/title"/>
+          <p:cNvSpPr/>
+          <p:nvPr/>
+        </p:nvSpPr>
+        <p:spPr>
+          <a:xfrm>
+            <a:off x="609600" y="4588859"/>
             <a:ext cx="3676650" cy="304800"/>
           </a:xfrm>
           <a:prstGeom prst="rect">
@@ -6305,54 +6799,108 @@
           <a:p>
             <a:pPr algn="l" indent="0" marL="0">
               <a:lnSpc>
-                <a:spcPts val="2070"/>
+                <a:spcPts val="2242"/>
+              </a:lnSpc>
+              <a:buNone/>
+            </a:pPr>
+            <a:r>
+              <a:rPr lang="zh-CN" altLang="en-US" sz="1950" b="1" dirty="0">
+                <a:solidFill>
+                  <a:srgbClr val="235E96"/>
+                </a:solidFill>
+                <a:latin typeface="Noto Sans CJK SC" pitchFamily="34" charset="0"/>
+                <a:ea typeface="Noto Sans CJK SC" pitchFamily="34" charset="-122"/>
+                <a:cs typeface="Noto Sans CJK SC" pitchFamily="34" charset="-120"/>
+              </a:rPr>
+              <a:t>判读规则</a:t>
+            </a:r>
+            <a:endParaRPr lang="zh-CN" sz="1950" dirty="0"/>
+          </a:p>
+        </p:txBody>
+      </p:sp>
+      <p:sp>
+        <p:nvSpPr>
+          <p:cNvPr id="26" name="T30/card/region-3/body"/>
+          <p:cNvSpPr/>
+          <p:nvPr/>
+        </p:nvSpPr>
+        <p:spPr>
+          <a:xfrm>
+            <a:off x="609600" y="5007959"/>
+            <a:ext cx="3676650" cy="890968"/>
+          </a:xfrm>
+          <a:prstGeom prst="rect">
+            <a:avLst/>
+          </a:prstGeom>
+          <a:noFill/>
+          <a:ln/>
+        </p:spPr>
+        <p:txBody>
+          <a:bodyPr wrap="none" lIns="0" tIns="0" rIns="0" bIns="0" rtlCol="0" anchor="t"/>
+          <a:lstStyle/>
+          <a:p>
+            <a:pPr algn="l" indent="0" marL="0">
+              <a:lnSpc>
+                <a:spcPts val="2232"/>
+              </a:lnSpc>
+              <a:buNone/>
+            </a:pPr>
+            <a:r>
+              <a:rPr lang="zh-CN" altLang="en-US" sz="1800" dirty="0">
+                <a:solidFill>
+                  <a:srgbClr val="1C2430"/>
+                </a:solidFill>
+                <a:latin typeface="Noto Sans CJK SC" pitchFamily="34" charset="0"/>
+                <a:ea typeface="Noto Sans CJK SC" pitchFamily="34" charset="-122"/>
+                <a:cs typeface="Noto Sans CJK SC" pitchFamily="34" charset="-120"/>
+              </a:rPr>
+              <a:t>说明点、带和</a:t>
+            </a:r>
+            <a:pPr algn="l" indent="0" marL="0">
+              <a:lnSpc>
+                <a:spcPts val="2232"/>
               </a:lnSpc>
               <a:buNone/>
             </a:pPr>
             <a:r>
               <a:rPr lang="zh-CN" altLang="en-US" sz="1800" b="1" dirty="0">
                 <a:solidFill>
-                  <a:srgbClr val="173C70"/>
-                </a:solidFill>
-                <a:latin typeface="Noto Sans CJK SC" pitchFamily="34" charset="0"/>
-                <a:ea typeface="Noto Sans CJK SC" pitchFamily="34" charset="-122"/>
-                <a:cs typeface="Noto Sans CJK SC" pitchFamily="34" charset="-120"/>
-              </a:rPr>
-              <a:t>坐标与变量</a:t>
+                  <a:srgbClr val="235E96"/>
+                </a:solidFill>
+                <a:latin typeface="Noto Sans CJK SC" pitchFamily="34" charset="0"/>
+                <a:ea typeface="Noto Sans CJK SC" pitchFamily="34" charset="-122"/>
+                <a:cs typeface="Noto Sans CJK SC" pitchFamily="34" charset="-120"/>
+              </a:rPr>
+              <a:t>误差条</a:t>
+            </a:r>
+            <a:pPr algn="l" indent="0" marL="0">
+              <a:lnSpc>
+                <a:spcPts val="2232"/>
+              </a:lnSpc>
+              <a:buNone/>
+            </a:pPr>
+            <a:r>
+              <a:rPr lang="zh-CN" altLang="en-US" sz="1800" dirty="0">
+                <a:solidFill>
+                  <a:srgbClr val="1C2430"/>
+                </a:solidFill>
+                <a:latin typeface="Noto Sans CJK SC" pitchFamily="34" charset="0"/>
+                <a:ea typeface="Noto Sans CJK SC" pitchFamily="34" charset="-122"/>
+                <a:cs typeface="Noto Sans CJK SC" pitchFamily="34" charset="-120"/>
+              </a:rPr>
+              <a:t>代表什么</a:t>
             </a:r>
             <a:endParaRPr lang="zh-CN" sz="1800" dirty="0"/>
           </a:p>
-        </p:txBody>
-      </p:sp>
-      <p:sp>
-        <p:nvSpPr>
-          <p:cNvPr id="17" name="T30/card/region-1/body"/>
-          <p:cNvSpPr/>
-          <p:nvPr/>
-        </p:nvSpPr>
-        <p:spPr>
-          <a:xfrm>
-            <a:off x="609600" y="1828800"/>
-            <a:ext cx="3676650" cy="819150"/>
-          </a:xfrm>
-          <a:prstGeom prst="rect">
-            <a:avLst/>
-          </a:prstGeom>
-          <a:noFill/>
-          <a:ln/>
-        </p:spPr>
-        <p:txBody>
-          <a:bodyPr wrap="none" lIns="0" tIns="0" rIns="0" bIns="0" rtlCol="0" anchor="t"/>
-          <a:lstStyle/>
-          <a:p>
-            <a:pPr algn="l" indent="0" marL="0">
-              <a:lnSpc>
-                <a:spcPts val="2139"/>
-              </a:lnSpc>
-              <a:buNone/>
-            </a:pPr>
-            <a:r>
-              <a:rPr lang="zh-CN" altLang="en-US" sz="1725" dirty="0">
+          <a:p>
+            <a:pPr algn="l" indent="0" marL="0">
+              <a:lnSpc>
+                <a:spcPts val="2232"/>
+              </a:lnSpc>
+              <a:buNone/>
+            </a:pPr>
+            <a:r>
+              <a:rPr lang="zh-CN" altLang="en-US" sz="1800" dirty="0">
                 <a:solidFill>
                   <a:srgbClr val="1C2430"/>
                 </a:solidFill>
@@ -6360,289 +6908,15 @@
                 <a:ea typeface="Noto Sans CJK SC" pitchFamily="34" charset="-122"/>
                 <a:cs typeface="Noto Sans CJK SC" pitchFamily="34" charset="-120"/>
               </a:rPr>
-              <a:t>解释横纵轴、量纲与归一化</a:t>
-            </a:r>
-            <a:endParaRPr lang="zh-CN" sz="1725" dirty="0"/>
-          </a:p>
-          <a:p>
-            <a:pPr algn="l" indent="0" marL="0">
-              <a:lnSpc>
-                <a:spcPts val="2139"/>
-              </a:lnSpc>
-              <a:buNone/>
-            </a:pPr>
-            <a:r>
-              <a:rPr lang="zh-CN" altLang="en-US" sz="1725" dirty="0">
-                <a:solidFill>
-                  <a:srgbClr val="1C2430"/>
-                </a:solidFill>
-                <a:latin typeface="Noto Sans CJK SC" pitchFamily="34" charset="0"/>
-                <a:ea typeface="Noto Sans CJK SC" pitchFamily="34" charset="-122"/>
-                <a:cs typeface="Noto Sans CJK SC" pitchFamily="34" charset="-120"/>
-              </a:rPr>
-              <a:t>注明对数刻度或截断范围</a:t>
-            </a:r>
-            <a:endParaRPr lang="zh-CN" sz="1725" dirty="0"/>
-          </a:p>
-        </p:txBody>
-      </p:sp>
-      <p:sp>
-        <p:nvSpPr>
-          <p:cNvPr id="18" name="T30/card/region-2/heading-rule"/>
-          <p:cNvSpPr/>
-          <p:nvPr/>
-        </p:nvSpPr>
-        <p:spPr>
-          <a:xfrm>
-            <a:off x="457200" y="3371850"/>
-            <a:ext cx="3829050" cy="0"/>
-          </a:xfrm>
-          <a:prstGeom prst="line">
-            <a:avLst/>
-          </a:prstGeom>
-          <a:noFill/>
-          <a:ln w="9525">
-            <a:solidFill>
-              <a:srgbClr val="BEC8D4"/>
-            </a:solidFill>
-            <a:prstDash val="solid"/>
-          </a:ln>
-        </p:spPr>
-      </p:sp>
-      <p:sp>
-        <p:nvSpPr>
-          <p:cNvPr id="19" name="T30/card/region-2/heading-mark"/>
-          <p:cNvSpPr/>
-          <p:nvPr/>
-        </p:nvSpPr>
-        <p:spPr>
-          <a:xfrm>
-            <a:off x="457200" y="3371850"/>
-            <a:ext cx="342900" cy="0"/>
-          </a:xfrm>
-          <a:prstGeom prst="line">
-            <a:avLst/>
-          </a:prstGeom>
-          <a:noFill/>
-          <a:ln w="17145">
-            <a:solidFill>
-              <a:srgbClr val="173C70"/>
-            </a:solidFill>
-            <a:prstDash val="solid"/>
-          </a:ln>
-        </p:spPr>
-      </p:sp>
-      <p:sp>
-        <p:nvSpPr>
-          <p:cNvPr id="20" name="T30/card/region-2/title"/>
-          <p:cNvSpPr/>
-          <p:nvPr/>
-        </p:nvSpPr>
-        <p:spPr>
-          <a:xfrm>
-            <a:off x="457200" y="3028950"/>
-            <a:ext cx="3829050" cy="323850"/>
-          </a:xfrm>
-          <a:prstGeom prst="rect">
-            <a:avLst/>
-          </a:prstGeom>
-          <a:noFill/>
-          <a:ln/>
-        </p:spPr>
-        <p:txBody>
-          <a:bodyPr wrap="none" lIns="0" tIns="0" rIns="0" bIns="0" rtlCol="0" anchor="t"/>
-          <a:lstStyle/>
-          <a:p>
-            <a:pPr algn="l" indent="0" marL="0">
-              <a:lnSpc>
-                <a:spcPts val="2156"/>
-              </a:lnSpc>
-              <a:buNone/>
-            </a:pPr>
-            <a:r>
-              <a:rPr lang="zh-CN" altLang="en-US" sz="1875" b="1" dirty="0">
-                <a:solidFill>
-                  <a:srgbClr val="173C70"/>
-                </a:solidFill>
-                <a:latin typeface="Noto Sans CJK SC" pitchFamily="34" charset="0"/>
-                <a:ea typeface="Noto Sans CJK SC" pitchFamily="34" charset="-122"/>
-                <a:cs typeface="Noto Sans CJK SC" pitchFamily="34" charset="-120"/>
-              </a:rPr>
-              <a:t>颜色与处理</a:t>
-            </a:r>
-            <a:endParaRPr lang="zh-CN" sz="1875" dirty="0"/>
-          </a:p>
-        </p:txBody>
-      </p:sp>
-      <p:sp>
-        <p:nvSpPr>
-          <p:cNvPr id="21" name="T30/card/region-2/body"/>
-          <p:cNvSpPr/>
-          <p:nvPr/>
-        </p:nvSpPr>
-        <p:spPr>
-          <a:xfrm>
-            <a:off x="457200" y="3505200"/>
-            <a:ext cx="3829050" cy="838200"/>
-          </a:xfrm>
-          <a:prstGeom prst="rect">
-            <a:avLst/>
-          </a:prstGeom>
-          <a:noFill/>
-          <a:ln/>
-        </p:spPr>
-        <p:txBody>
-          <a:bodyPr wrap="none" lIns="0" tIns="0" rIns="0" bIns="0" rtlCol="0" anchor="t"/>
-          <a:lstStyle/>
-          <a:p>
-            <a:pPr algn="l" indent="0" marL="0">
-              <a:lnSpc>
-                <a:spcPts val="2232"/>
-              </a:lnSpc>
-              <a:buNone/>
-            </a:pPr>
-            <a:r>
-              <a:rPr lang="zh-CN" altLang="en-US" sz="1800" dirty="0">
-                <a:solidFill>
-                  <a:srgbClr val="1C2430"/>
-                </a:solidFill>
-                <a:latin typeface="Noto Sans CJK SC" pitchFamily="34" charset="0"/>
-                <a:ea typeface="Noto Sans CJK SC" pitchFamily="34" charset="-122"/>
-                <a:cs typeface="Noto Sans CJK SC" pitchFamily="34" charset="-120"/>
-              </a:rPr>
-              <a:t>颜色只编码条件或类别</a:t>
+              <a:t>依据实验设计解释比较关系</a:t>
             </a:r>
             <a:endParaRPr lang="zh-CN" sz="1800" dirty="0"/>
           </a:p>
-          <a:p>
-            <a:pPr algn="l" indent="0" marL="0">
-              <a:lnSpc>
-                <a:spcPts val="2232"/>
-              </a:lnSpc>
-              <a:buNone/>
-            </a:pPr>
-            <a:r>
-              <a:rPr lang="zh-CN" altLang="en-US" sz="1800" dirty="0">
-                <a:solidFill>
-                  <a:srgbClr val="1C2430"/>
-                </a:solidFill>
-                <a:latin typeface="Noto Sans CJK SC" pitchFamily="34" charset="0"/>
-                <a:ea typeface="Noto Sans CJK SC" pitchFamily="34" charset="-122"/>
-                <a:cs typeface="Noto Sans CJK SC" pitchFamily="34" charset="-120"/>
-              </a:rPr>
-              <a:t>线型和符号也应能区分</a:t>
-            </a:r>
-            <a:endParaRPr lang="zh-CN" sz="1800" dirty="0"/>
-          </a:p>
-        </p:txBody>
-      </p:sp>
-      <p:sp>
-        <p:nvSpPr>
-          <p:cNvPr id="22" name="T30/card/region-3/title"/>
-          <p:cNvSpPr/>
-          <p:nvPr/>
-        </p:nvSpPr>
-        <p:spPr>
-          <a:xfrm>
-            <a:off x="457200" y="4648200"/>
-            <a:ext cx="3829050" cy="323850"/>
-          </a:xfrm>
-          <a:prstGeom prst="rect">
-            <a:avLst/>
-          </a:prstGeom>
-          <a:noFill/>
-          <a:ln/>
-        </p:spPr>
-        <p:txBody>
-          <a:bodyPr wrap="none" lIns="0" tIns="0" rIns="0" bIns="0" rtlCol="0" anchor="t"/>
-          <a:lstStyle/>
-          <a:p>
-            <a:pPr algn="l" indent="0" marL="0">
-              <a:lnSpc>
-                <a:spcPts val="2156"/>
-              </a:lnSpc>
-              <a:buNone/>
-            </a:pPr>
-            <a:r>
-              <a:rPr lang="zh-CN" altLang="en-US" sz="1875" b="1" dirty="0">
-                <a:solidFill>
-                  <a:srgbClr val="173C70"/>
-                </a:solidFill>
-                <a:latin typeface="Noto Sans CJK SC" pitchFamily="34" charset="0"/>
-                <a:ea typeface="Noto Sans CJK SC" pitchFamily="34" charset="-122"/>
-                <a:cs typeface="Noto Sans CJK SC" pitchFamily="34" charset="-120"/>
-              </a:rPr>
-              <a:t>判读规则</a:t>
-            </a:r>
-            <a:endParaRPr lang="zh-CN" sz="1875" dirty="0"/>
-          </a:p>
-        </p:txBody>
-      </p:sp>
-      <p:sp>
-        <p:nvSpPr>
-          <p:cNvPr id="23" name="T30/card/region-3/body"/>
-          <p:cNvSpPr/>
-          <p:nvPr/>
-        </p:nvSpPr>
-        <p:spPr>
-          <a:xfrm>
-            <a:off x="457200" y="5095875"/>
-            <a:ext cx="3829050" cy="866775"/>
-          </a:xfrm>
-          <a:prstGeom prst="rect">
-            <a:avLst/>
-          </a:prstGeom>
-          <a:noFill/>
-          <a:ln/>
-        </p:spPr>
-        <p:txBody>
-          <a:bodyPr wrap="none" lIns="0" tIns="0" rIns="0" bIns="0" rtlCol="0" anchor="t"/>
-          <a:lstStyle/>
-          <a:p>
-            <a:pPr algn="l" indent="0" marL="0">
-              <a:lnSpc>
-                <a:spcPts val="2232"/>
-              </a:lnSpc>
-              <a:buNone/>
-            </a:pPr>
-            <a:r>
-              <a:rPr lang="zh-CN" altLang="en-US" sz="1800" dirty="0">
-                <a:solidFill>
-                  <a:srgbClr val="1C2430"/>
-                </a:solidFill>
-                <a:latin typeface="Noto Sans CJK SC" pitchFamily="34" charset="0"/>
-                <a:ea typeface="Noto Sans CJK SC" pitchFamily="34" charset="-122"/>
-                <a:cs typeface="Noto Sans CJK SC" pitchFamily="34" charset="-120"/>
-              </a:rPr>
-              <a:t>说明点、带和误差条代表什么</a:t>
-            </a:r>
-            <a:endParaRPr lang="zh-CN" sz="1800" dirty="0"/>
-          </a:p>
-          <a:p>
-            <a:pPr algn="l" indent="0" marL="0">
-              <a:lnSpc>
-                <a:spcPts val="2232"/>
-              </a:lnSpc>
-              <a:buNone/>
-            </a:pPr>
-            <a:r>
-              <a:rPr lang="zh-CN" altLang="en-US" sz="1800" dirty="0">
-                <a:solidFill>
-                  <a:srgbClr val="1C2430"/>
-                </a:solidFill>
-                <a:latin typeface="Noto Sans CJK SC" pitchFamily="34" charset="0"/>
-                <a:ea typeface="Noto Sans CJK SC" pitchFamily="34" charset="-122"/>
-                <a:cs typeface="Noto Sans CJK SC" pitchFamily="34" charset="-120"/>
-              </a:rPr>
-              <a:t>依据实验设计解释比较关系</a:t>
-            </a:r>
-            <a:endParaRPr lang="zh-CN" sz="1800" dirty="0"/>
-          </a:p>
-        </p:txBody>
-      </p:sp>
-      <p:sp>
-        <p:nvSpPr>
-          <p:cNvPr id="24" name="T30/sources"/>
+        </p:txBody>
+      </p:sp>
+      <p:sp>
+        <p:nvSpPr>
+          <p:cNvPr id="27" name="T30/sources"/>
           <p:cNvSpPr/>
           <p:nvPr/>
         </p:nvSpPr>
@@ -6676,7 +6950,7 @@
                 <a:ea typeface="Noto Sans CJK SC" pitchFamily="34" charset="-122"/>
                 <a:cs typeface="Noto Sans CJK SC" pitchFamily="34" charset="-120"/>
               </a:rPr>
-              <a:t>T1 · 2026 · 待替换</a:t>
+              <a:t>T1 · 2026 · 书目占位；图表均为合成示例</a:t>
             </a:r>
             <a:endParaRPr lang="zh-CN" sz="1125" dirty="0"/>
           </a:p>
